--- a/03-build/pptx/C5_U5_alumno.pptx
+++ b/03-build/pptx/C5_U5_alumno.pptx
@@ -4639,7 +4639,6 @@
               <a:srgbClr val="E4E3DE"/>
             </a:solidFill>
           </a:ln>
-          <a:effectLst/>
           <a:effectLst>
             <a:outerShdw blurRad="90000" dist="38000" dir="5400000" rotWithShape="0">
               <a:srgbClr val="20242E">
@@ -4963,7 +4962,6 @@
               <a:srgbClr val="E4E3DE"/>
             </a:solidFill>
           </a:ln>
-          <a:effectLst/>
           <a:effectLst>
             <a:outerShdw blurRad="90000" dist="38000" dir="5400000" rotWithShape="0">
               <a:srgbClr val="20242E">
@@ -5287,7 +5285,6 @@
               <a:srgbClr val="E4E3DE"/>
             </a:solidFill>
           </a:ln>
-          <a:effectLst/>
           <a:effectLst>
             <a:outerShdw blurRad="90000" dist="38000" dir="5400000" rotWithShape="0">
               <a:srgbClr val="20242E">
@@ -5611,7 +5608,6 @@
               <a:srgbClr val="E4E3DE"/>
             </a:solidFill>
           </a:ln>
-          <a:effectLst/>
           <a:effectLst>
             <a:outerShdw blurRad="90000" dist="38000" dir="5400000" rotWithShape="0">
               <a:srgbClr val="20242E">
@@ -7394,7 +7390,6 @@
               <a:srgbClr val="1E9E74"/>
             </a:solidFill>
           </a:ln>
-          <a:effectLst/>
           <a:effectLst>
             <a:outerShdw blurRad="90000" dist="38000" dir="5400000" rotWithShape="0">
               <a:srgbClr val="20242E">
@@ -7539,7 +7534,6 @@
               <a:srgbClr val="1E9E74"/>
             </a:solidFill>
           </a:ln>
-          <a:effectLst/>
           <a:effectLst>
             <a:outerShdw blurRad="90000" dist="38000" dir="5400000" rotWithShape="0">
               <a:srgbClr val="20242E">
@@ -7684,7 +7678,6 @@
               <a:srgbClr val="1E9E74"/>
             </a:solidFill>
           </a:ln>
-          <a:effectLst/>
           <a:effectLst>
             <a:outerShdw blurRad="90000" dist="38000" dir="5400000" rotWithShape="0">
               <a:srgbClr val="20242E">
@@ -7829,7 +7822,6 @@
               <a:srgbClr val="1E9E74"/>
             </a:solidFill>
           </a:ln>
-          <a:effectLst/>
           <a:effectLst>
             <a:outerShdw blurRad="90000" dist="38000" dir="5400000" rotWithShape="0">
               <a:srgbClr val="20242E">
@@ -7974,7 +7966,6 @@
               <a:srgbClr val="1E9E74"/>
             </a:solidFill>
           </a:ln>
-          <a:effectLst/>
           <a:effectLst>
             <a:outerShdw blurRad="90000" dist="38000" dir="5400000" rotWithShape="0">
               <a:srgbClr val="20242E">
@@ -8119,7 +8110,6 @@
               <a:srgbClr val="1E9E74"/>
             </a:solidFill>
           </a:ln>
-          <a:effectLst/>
           <a:effectLst>
             <a:outerShdw blurRad="90000" dist="38000" dir="5400000" rotWithShape="0">
               <a:srgbClr val="20242E">
@@ -11677,7 +11667,6 @@
               <a:srgbClr val="E4E3DE"/>
             </a:solidFill>
           </a:ln>
-          <a:effectLst/>
           <a:effectLst>
             <a:outerShdw blurRad="90000" dist="38000" dir="5400000" rotWithShape="0">
               <a:srgbClr val="20242E">
@@ -12356,7 +12345,6 @@
               <a:srgbClr val="1E9E74"/>
             </a:solidFill>
           </a:ln>
-          <a:effectLst/>
           <a:effectLst>
             <a:outerShdw blurRad="90000" dist="38000" dir="5400000" rotWithShape="0">
               <a:srgbClr val="20242E">
@@ -19319,7 +19307,6 @@
               <a:srgbClr val="1E9E74"/>
             </a:solidFill>
           </a:ln>
-          <a:effectLst/>
           <a:effectLst>
             <a:outerShdw blurRad="90000" dist="38000" dir="5400000" rotWithShape="0">
               <a:srgbClr val="20242E">
@@ -19553,7 +19540,6 @@
               <a:srgbClr val="1E9E74"/>
             </a:solidFill>
           </a:ln>
-          <a:effectLst/>
           <a:effectLst>
             <a:outerShdw blurRad="90000" dist="38000" dir="5400000" rotWithShape="0">
               <a:srgbClr val="20242E">
@@ -19787,7 +19773,6 @@
               <a:srgbClr val="1E9E74"/>
             </a:solidFill>
           </a:ln>
-          <a:effectLst/>
           <a:effectLst>
             <a:outerShdw blurRad="90000" dist="38000" dir="5400000" rotWithShape="0">
               <a:srgbClr val="20242E">
@@ -27324,7 +27309,6 @@
               <a:srgbClr val="1E9E74"/>
             </a:solidFill>
           </a:ln>
-          <a:effectLst/>
           <a:effectLst>
             <a:outerShdw blurRad="90000" dist="38000" dir="5400000" rotWithShape="0">
               <a:srgbClr val="20242E">
@@ -27627,7 +27611,6 @@
               <a:srgbClr val="1E9E74"/>
             </a:solidFill>
           </a:ln>
-          <a:effectLst/>
           <a:effectLst>
             <a:outerShdw blurRad="90000" dist="38000" dir="5400000" rotWithShape="0">
               <a:srgbClr val="20242E">
@@ -27930,7 +27913,6 @@
               <a:srgbClr val="1E9E74"/>
             </a:solidFill>
           </a:ln>
-          <a:effectLst/>
           <a:effectLst>
             <a:outerShdw blurRad="90000" dist="38000" dir="5400000" rotWithShape="0">
               <a:srgbClr val="20242E">
@@ -28233,7 +28215,6 @@
               <a:srgbClr val="1E9E74"/>
             </a:solidFill>
           </a:ln>
-          <a:effectLst/>
           <a:effectLst>
             <a:outerShdw blurRad="90000" dist="38000" dir="5400000" rotWithShape="0">
               <a:srgbClr val="20242E">
@@ -28536,7 +28517,6 @@
               <a:srgbClr val="1E9E74"/>
             </a:solidFill>
           </a:ln>
-          <a:effectLst/>
           <a:effectLst>
             <a:outerShdw blurRad="90000" dist="38000" dir="5400000" rotWithShape="0">
               <a:srgbClr val="20242E">
@@ -28839,7 +28819,6 @@
               <a:srgbClr val="157355"/>
             </a:solidFill>
           </a:ln>
-          <a:effectLst/>
           <a:effectLst>
             <a:outerShdw blurRad="90000" dist="38000" dir="5400000" rotWithShape="0">
               <a:srgbClr val="20242E">
@@ -29142,7 +29121,6 @@
               <a:srgbClr val="157355"/>
             </a:solidFill>
           </a:ln>
-          <a:effectLst/>
           <a:effectLst>
             <a:outerShdw blurRad="90000" dist="38000" dir="5400000" rotWithShape="0">
               <a:srgbClr val="20242E">
@@ -29445,7 +29423,6 @@
               <a:srgbClr val="157355"/>
             </a:solidFill>
           </a:ln>
-          <a:effectLst/>
           <a:effectLst>
             <a:outerShdw blurRad="90000" dist="38000" dir="5400000" rotWithShape="0">
               <a:srgbClr val="20242E">
@@ -30272,7 +30249,6 @@
           <a:ln>
             <a:noFill/>
           </a:ln>
-          <a:effectLst/>
           <a:effectLst>
             <a:outerShdw blurRad="90000" dist="38000" dir="5400000" rotWithShape="0">
               <a:srgbClr val="20242E">
@@ -35807,7 +35783,6 @@
           <a:ln>
             <a:noFill/>
           </a:ln>
-          <a:effectLst/>
           <a:effectLst>
             <a:outerShdw blurRad="90000" dist="38000" dir="5400000" rotWithShape="0">
               <a:srgbClr val="20242E">
@@ -40177,7 +40152,6 @@
               <a:srgbClr val="1E9E74"/>
             </a:solidFill>
           </a:ln>
-          <a:effectLst/>
           <a:effectLst>
             <a:outerShdw blurRad="90000" dist="38000" dir="5400000" rotWithShape="0">
               <a:srgbClr val="20242E">
@@ -40322,7 +40296,6 @@
               <a:srgbClr val="1E9E74"/>
             </a:solidFill>
           </a:ln>
-          <a:effectLst/>
           <a:effectLst>
             <a:outerShdw blurRad="90000" dist="38000" dir="5400000" rotWithShape="0">
               <a:srgbClr val="20242E">
@@ -40467,7 +40440,6 @@
               <a:srgbClr val="1E9E74"/>
             </a:solidFill>
           </a:ln>
-          <a:effectLst/>
           <a:effectLst>
             <a:outerShdw blurRad="90000" dist="38000" dir="5400000" rotWithShape="0">
               <a:srgbClr val="20242E">
@@ -40612,7 +40584,6 @@
               <a:srgbClr val="1E9E74"/>
             </a:solidFill>
           </a:ln>
-          <a:effectLst/>
           <a:effectLst>
             <a:outerShdw blurRad="90000" dist="38000" dir="5400000" rotWithShape="0">
               <a:srgbClr val="20242E">
@@ -40757,7 +40728,6 @@
               <a:srgbClr val="1E9E74"/>
             </a:solidFill>
           </a:ln>
-          <a:effectLst/>
           <a:effectLst>
             <a:outerShdw blurRad="90000" dist="38000" dir="5400000" rotWithShape="0">
               <a:srgbClr val="20242E">
@@ -40902,7 +40872,6 @@
               <a:srgbClr val="1E9E74"/>
             </a:solidFill>
           </a:ln>
-          <a:effectLst/>
           <a:effectLst>
             <a:outerShdw blurRad="90000" dist="38000" dir="5400000" rotWithShape="0">
               <a:srgbClr val="20242E">
@@ -42396,7 +42365,6 @@
               <a:srgbClr val="1E9E74"/>
             </a:solidFill>
           </a:ln>
-          <a:effectLst/>
           <a:effectLst>
             <a:outerShdw blurRad="90000" dist="38000" dir="5400000" rotWithShape="0">
               <a:srgbClr val="20242E">
@@ -42551,7 +42519,6 @@
               <a:srgbClr val="B7860B"/>
             </a:solidFill>
           </a:ln>
-          <a:effectLst/>
           <a:effectLst>
             <a:outerShdw blurRad="90000" dist="38000" dir="5400000" rotWithShape="0">
               <a:srgbClr val="20242E">
@@ -42706,7 +42673,6 @@
               <a:srgbClr val="1E9E74"/>
             </a:solidFill>
           </a:ln>
-          <a:effectLst/>
           <a:effectLst>
             <a:outerShdw blurRad="90000" dist="38000" dir="5400000" rotWithShape="0">
               <a:srgbClr val="20242E">
@@ -42861,7 +42827,6 @@
               <a:srgbClr val="B7860B"/>
             </a:solidFill>
           </a:ln>
-          <a:effectLst/>
           <a:effectLst>
             <a:outerShdw blurRad="90000" dist="38000" dir="5400000" rotWithShape="0">
               <a:srgbClr val="20242E">
@@ -43016,7 +42981,6 @@
               <a:srgbClr val="1E9E74"/>
             </a:solidFill>
           </a:ln>
-          <a:effectLst/>
           <a:effectLst>
             <a:outerShdw blurRad="90000" dist="38000" dir="5400000" rotWithShape="0">
               <a:srgbClr val="20242E">
@@ -43171,7 +43135,6 @@
               <a:srgbClr val="B7860B"/>
             </a:solidFill>
           </a:ln>
-          <a:effectLst/>
           <a:effectLst>
             <a:outerShdw blurRad="90000" dist="38000" dir="5400000" rotWithShape="0">
               <a:srgbClr val="20242E">
@@ -46870,7 +46833,6 @@
               <a:srgbClr val="1E9E74"/>
             </a:solidFill>
           </a:ln>
-          <a:effectLst/>
           <a:effectLst>
             <a:outerShdw blurRad="90000" dist="38000" dir="5400000" rotWithShape="0">
               <a:srgbClr val="20242E">

--- a/03-build/pptx/C5_U5_alumno.pptx
+++ b/03-build/pptx/C5_U5_alumno.pptx
@@ -11,6 +11,9 @@
     <p:sldId id="259" r:id="rId10"/>
     <p:sldId id="260" r:id="rId11"/>
     <p:sldId id="261" r:id="rId12"/>
+    <p:sldId id="276" r:id="rId27"/>
+    <p:sldId id="277" r:id="rId28"/>
+    <p:sldId id="278" r:id="rId29"/>
     <p:sldId id="262" r:id="rId13"/>
     <p:sldId id="263" r:id="rId14"/>
     <p:sldId id="264" r:id="rId15"/>
@@ -124,6 +127,255 @@
     </a:lvl9pPr>
   </p:defaultTextStyle>
 </p:presentation>
+</file>
+
+<file path=ppt/notesSlides/notesSlide1.xml><?xml version="1.0" encoding="utf-8"?>
+<p:notes xmlns:a="http://schemas.openxmlformats.org/drawingml/2006/main" xmlns:p="http://schemas.openxmlformats.org/presentationml/2006/main" xmlns:r="http://schemas.openxmlformats.org/officeDocument/2006/relationships">
+  <p:cSld>
+    <p:spTree>
+      <p:nvGrpSpPr>
+        <p:cNvPr id="1" name=""/>
+        <p:cNvGrpSpPr/>
+        <p:nvPr/>
+      </p:nvGrpSpPr>
+      <p:grpSpPr>
+        <a:xfrm>
+          <a:off x="0" y="0"/>
+          <a:ext cx="0" cy="0"/>
+          <a:chOff x="0" y="0"/>
+          <a:chExt cx="0" cy="0"/>
+        </a:xfrm>
+      </p:grpSpPr>
+      <p:sp>
+        <p:nvSpPr>
+          <p:cNvPr id="2" name="Slide Image Placeholder 1"/>
+          <p:cNvSpPr>
+            <a:spLocks noGrp="1"/>
+          </p:cNvSpPr>
+          <p:nvPr>
+            <p:ph type="sldImg" idx="2"/>
+          </p:nvPr>
+        </p:nvSpPr>
+        <p:spPr/>
+      </p:sp>
+      <p:sp>
+        <p:nvSpPr>
+          <p:cNvPr id="3" name="Notes Placeholder 2"/>
+          <p:cNvSpPr>
+            <a:spLocks noGrp="1"/>
+          </p:cNvSpPr>
+          <p:nvPr>
+            <p:ph type="body" idx="3" sz="quarter"/>
+          </p:nvPr>
+        </p:nvSpPr>
+        <p:spPr/>
+        <p:txBody>
+          <a:bodyPr/>
+          <a:lstStyle/>
+          <a:p>
+            <a:r>
+              <a:t>RETO 4 · El pedido imposible — 🎭 simulatie met beperking</a:t>
+            </a:r>
+          </a:p>
+          <a:p>
+            <a:r>
+              <a:t>OPDRACHT: Krijg een volledig menu binnen: voorgerecht, hoofdgerecht, drank en dessert.</a:t>
+            </a:r>
+          </a:p>
+          <a:p>
+            <a:r>
+              <a:t>DE REGEL: Elke «lo siento» dwingt je tot een nieuw voorstel — en je mag nooit twee keer dezelfde beleefdheidsformule gebruiken.</a:t>
+            </a:r>
+          </a:p>
+          <a:p>
+            <a:r>
+              <a:t>VERLOOP: El camarero coge su lista de «no hay». | Pides. Te dicen que no. Propón otra cosa. | Sigue hasta tener los cuatro platos. | Cambiad de papel.</a:t>
+            </a:r>
+          </a:p>
+          <a:p>
+            <a:r>
+              <a:t>SLEUTEL: Zes formules voor vier gangen: er is speling, maar niet veel. Wie herhaalt, begint opnieuw.  ||  «¿Qué me recomienda?» is de ontsnappingsroute — laat leerlingen die zelf ontdekken in plaats van hem aan te reiken.  ||  De ober mag niet op alles nee zeggen: minstens vier gerechten blijven beschikbaar, anders loopt het spel vast.</a:t>
+            </a:r>
+          </a:p>
+          <a:p>
+            <a:r>
+              <a:t>NOTA: Geef de «no hay»-lijst alleen aan de ober. Ziet de klant hem, dan verdwijnt het improviseren.</a:t>
+            </a:r>
+          </a:p>
+        </p:txBody>
+      </p:sp>
+    </p:spTree>
+  </p:cSld>
+  <p:clrMapOvr>
+    <a:masterClrMapping/>
+  </p:clrMapOvr>
+</p:notes>
+</file>
+
+<file path=ppt/notesSlides/notesSlide2.xml><?xml version="1.0" encoding="utf-8"?>
+<p:notes xmlns:a="http://schemas.openxmlformats.org/drawingml/2006/main" xmlns:p="http://schemas.openxmlformats.org/presentationml/2006/main" xmlns:r="http://schemas.openxmlformats.org/officeDocument/2006/relationships">
+  <p:cSld>
+    <p:spTree>
+      <p:nvGrpSpPr>
+        <p:cNvPr id="1" name=""/>
+        <p:cNvGrpSpPr/>
+        <p:nvPr/>
+      </p:nvGrpSpPr>
+      <p:grpSpPr>
+        <a:xfrm>
+          <a:off x="0" y="0"/>
+          <a:ext cx="0" cy="0"/>
+          <a:chOff x="0" y="0"/>
+          <a:chExt cx="0" cy="0"/>
+        </a:xfrm>
+      </p:grpSpPr>
+      <p:sp>
+        <p:nvSpPr>
+          <p:cNvPr id="2" name="Slide Image Placeholder 1"/>
+          <p:cNvSpPr>
+            <a:spLocks noGrp="1"/>
+          </p:cNvSpPr>
+          <p:nvPr>
+            <p:ph type="sldImg" idx="2"/>
+          </p:nvPr>
+        </p:nvSpPr>
+        <p:spPr/>
+      </p:sp>
+      <p:sp>
+        <p:nvSpPr>
+          <p:cNvPr id="3" name="Notes Placeholder 2"/>
+          <p:cNvSpPr>
+            <a:spLocks noGrp="1"/>
+          </p:cNvSpPr>
+          <p:nvPr>
+            <p:ph type="body" idx="3" sz="quarter"/>
+          </p:nvPr>
+        </p:nvSpPr>
+        <p:spPr/>
+        <p:txBody>
+          <a:bodyPr/>
+          <a:lstStyle/>
+          <a:p>
+            <a:r>
+              <a:t>RETO 7 · Cinco palabras para el mercado — 🔓 puzzel &amp; escape</a:t>
+            </a:r>
+          </a:p>
+          <a:p>
+            <a:r>
+              <a:t>OPDRACHT: Krijg het product te pakken met maximaal vijf woorden per poging.</a:t>
+            </a:r>
+          </a:p>
+          <a:p>
+            <a:r>
+              <a:t>DE REGEL: Vijf woorden per poging, gebaren mogen niet, en de naam van het product mag niet vallen — ook niet in het Nederlands of het Engels.</a:t>
+            </a:r>
+          </a:p>
+          <a:p>
+            <a:r>
+              <a:t>VERLOOP: Coge una tarjeta de producto. No la enseñes. | Describe en cinco palabras. Cuenta en voz alta. | ¿No lo adivina? Otro intento, otras cinco. | Máximo tres intentos por producto.</a:t>
+            </a:r>
+          </a:p>
+          <a:p>
+            <a:r>
+              <a:t>SLEUTEL: Sterke omschrijvingen gebruiken kleur, smaak en gebruik — precies de woordenschat van §1 en §2.  ||  «El chile» en «el cilantro» zijn de moeilijkste: beide vragen om smaak in plaats van vorm.  ||  Vijf woorden dwingt tot ser en estar zonder franje: «es verde», «está en la sopa».</a:t>
+            </a:r>
+          </a:p>
+          <a:p>
+            <a:r>
+              <a:t>NOTA: Tel de woorden echt. Zonder tellen wordt het een gewone omschrijfoefening en verdwijnt de druk die de zinnen kort houdt.</a:t>
+            </a:r>
+          </a:p>
+        </p:txBody>
+      </p:sp>
+    </p:spTree>
+  </p:cSld>
+  <p:clrMapOvr>
+    <a:masterClrMapping/>
+  </p:clrMapOvr>
+</p:notes>
+</file>
+
+<file path=ppt/notesSlides/notesSlide3.xml><?xml version="1.0" encoding="utf-8"?>
+<p:notes xmlns:a="http://schemas.openxmlformats.org/drawingml/2006/main" xmlns:p="http://schemas.openxmlformats.org/presentationml/2006/main" xmlns:r="http://schemas.openxmlformats.org/officeDocument/2006/relationships">
+  <p:cSld>
+    <p:spTree>
+      <p:nvGrpSpPr>
+        <p:cNvPr id="1" name=""/>
+        <p:cNvGrpSpPr/>
+        <p:nvPr/>
+      </p:nvGrpSpPr>
+      <p:grpSpPr>
+        <a:xfrm>
+          <a:off x="0" y="0"/>
+          <a:ext cx="0" cy="0"/>
+          <a:chOff x="0" y="0"/>
+          <a:chExt cx="0" cy="0"/>
+        </a:xfrm>
+      </p:grpSpPr>
+      <p:sp>
+        <p:nvSpPr>
+          <p:cNvPr id="2" name="Slide Image Placeholder 1"/>
+          <p:cNvSpPr>
+            <a:spLocks noGrp="1"/>
+          </p:cNvSpPr>
+          <p:nvPr>
+            <p:ph type="sldImg" idx="2"/>
+          </p:nvPr>
+        </p:nvSpPr>
+        <p:spPr/>
+      </p:sp>
+      <p:sp>
+        <p:nvSpPr>
+          <p:cNvPr id="3" name="Notes Placeholder 2"/>
+          <p:cNvSpPr>
+            <a:spLocks noGrp="1"/>
+          </p:cNvSpPr>
+          <p:nvPr>
+            <p:ph type="body" idx="3" sz="quarter"/>
+          </p:nvPr>
+        </p:nvSpPr>
+        <p:spPr/>
+        <p:txBody>
+          <a:bodyPr/>
+          <a:lstStyle/>
+          <a:p>
+            <a:r>
+              <a:t>RETO 8 · La sobremesa — ⚖️ onderhandeling &amp; dilemma</a:t>
+            </a:r>
+          </a:p>
+          <a:p>
+            <a:r>
+              <a:t>OPDRACHT: Verdeel de rekening. Ieder heeft een geheime instructie.</a:t>
+            </a:r>
+          </a:p>
+          <a:p>
+            <a:r>
+              <a:t>DE REGEL: Je geheime instructie moet je volgen, maar je mag ze niet uitspreken. Wie zegt «ik heb weinig geld», heeft verloren — je moet het láten merken.</a:t>
+            </a:r>
+          </a:p>
+          <a:p>
+            <a:r>
+              <a:t>VERLOOP: Coge tu instrucción secreta. No la enseñes. | Mirad la cuenta juntos. | Negociad hasta que todos paguen algo. | Al final: ¿quién tenía qué instrucción?</a:t>
+            </a:r>
+          </a:p>
+          <a:p>
+            <a:r>
+              <a:t>SLEUTEL: Totaal: 415 pesos, ongeveer 21 euro. Eerlijk delen door vier is ruim 100 elk — precies wat de vier instructies onmogelijk maken.  ||  De spanning zit bij Nina en Diego: allebei willen minder betalen, maar om tegengestelde redenen.  ||  Toets of niemand zijn instructie heeft uitgesproken. Dat is de regel én de reden dat er echt onderhandeld wordt.</a:t>
+            </a:r>
+          </a:p>
+          <a:p>
+            <a:r>
+              <a:t>NOTA: «La sobremesa» is cultureel echt: in Mexico en Spanje blijft men na het eten aan tafel. Zeg dat erbij, dan is de scène niet alleen een rekensom.</a:t>
+            </a:r>
+          </a:p>
+        </p:txBody>
+      </p:sp>
+    </p:spTree>
+  </p:cSld>
+  <p:clrMapOvr>
+    <a:masterClrMapping/>
+  </p:clrMapOvr>
+</p:notes>
 </file>
 
 <file path=ppt/slideLayouts/slideLayout1.xml><?xml version="1.0" encoding="utf-8"?>
@@ -31840,6 +32092,8108 @@
 </p:sld>
 </file>
 
+<file path=ppt/slides/slide21.xml><?xml version="1.0" encoding="utf-8"?>
+<p:sld xmlns:a="http://schemas.openxmlformats.org/drawingml/2006/main" xmlns:p="http://schemas.openxmlformats.org/presentationml/2006/main" xmlns:r="http://schemas.openxmlformats.org/officeDocument/2006/relationships">
+  <p:cSld>
+    <p:spTree>
+      <p:nvGrpSpPr>
+        <p:cNvPr id="1" name=""/>
+        <p:cNvGrpSpPr/>
+        <p:nvPr/>
+      </p:nvGrpSpPr>
+      <p:grpSpPr/>
+      <p:sp>
+        <p:nvSpPr>
+          <p:cNvPr id="2" name="Fondo"/>
+          <p:cNvSpPr/>
+          <p:nvPr/>
+        </p:nvSpPr>
+        <p:spPr>
+          <a:xfrm>
+            <a:off x="0" y="0"/>
+            <a:ext cx="12191695" cy="6858000"/>
+          </a:xfrm>
+          <a:prstGeom prst="rect">
+            <a:avLst/>
+          </a:prstGeom>
+          <a:solidFill>
+            <a:srgbClr val="FCFBF8"/>
+          </a:solidFill>
+          <a:ln>
+            <a:noFill/>
+          </a:ln>
+          <a:effectLst/>
+        </p:spPr>
+        <p:style>
+          <a:lnRef idx="1">
+            <a:schemeClr val="accent1"/>
+          </a:lnRef>
+          <a:fillRef idx="3">
+            <a:schemeClr val="accent1"/>
+          </a:fillRef>
+          <a:effectRef idx="2">
+            <a:schemeClr val="accent1"/>
+          </a:effectRef>
+          <a:fontRef idx="minor">
+            <a:schemeClr val="lt1"/>
+          </a:fontRef>
+        </p:style>
+        <p:txBody>
+          <a:bodyPr rtlCol="0" anchor="ctr"/>
+          <a:lstStyle/>
+          <a:p/>
+        </p:txBody>
+      </p:sp>
+      <p:sp>
+        <p:nvSpPr>
+          <p:cNvPr id="3" name="Cabecera"/>
+          <p:cNvSpPr/>
+          <p:nvPr/>
+        </p:nvSpPr>
+        <p:spPr>
+          <a:xfrm>
+            <a:off x="0" y="0"/>
+            <a:ext cx="12191695" cy="1078992"/>
+          </a:xfrm>
+          <a:prstGeom prst="rect">
+            <a:avLst/>
+          </a:prstGeom>
+          <a:solidFill>
+            <a:srgbClr val="1E9E74"/>
+          </a:solidFill>
+          <a:ln>
+            <a:noFill/>
+          </a:ln>
+          <a:effectLst/>
+        </p:spPr>
+        <p:style>
+          <a:lnRef idx="1">
+            <a:schemeClr val="accent1"/>
+          </a:lnRef>
+          <a:fillRef idx="3">
+            <a:schemeClr val="accent1"/>
+          </a:fillRef>
+          <a:effectRef idx="2">
+            <a:schemeClr val="accent1"/>
+          </a:effectRef>
+          <a:fontRef idx="minor">
+            <a:schemeClr val="lt1"/>
+          </a:fontRef>
+        </p:style>
+        <p:txBody>
+          <a:bodyPr rtlCol="0" anchor="ctr"/>
+          <a:lstStyle/>
+          <a:p/>
+        </p:txBody>
+      </p:sp>
+      <p:sp>
+        <p:nvSpPr>
+          <p:cNvPr id="4" name="Chip"/>
+          <p:cNvSpPr/>
+          <p:nvPr/>
+        </p:nvSpPr>
+        <p:spPr>
+          <a:xfrm>
+            <a:off x="457200" y="182880"/>
+            <a:ext cx="3017520" cy="292608"/>
+          </a:xfrm>
+          <a:prstGeom prst="roundRect">
+            <a:avLst>
+              <a:gd name="adj" fmla="val 50000"/>
+            </a:avLst>
+          </a:prstGeom>
+          <a:solidFill>
+            <a:srgbClr val="FFFFFF"/>
+          </a:solidFill>
+          <a:ln>
+            <a:noFill/>
+          </a:ln>
+          <a:effectLst/>
+        </p:spPr>
+        <p:style>
+          <a:lnRef idx="1">
+            <a:schemeClr val="accent1"/>
+          </a:lnRef>
+          <a:fillRef idx="3">
+            <a:schemeClr val="accent1"/>
+          </a:fillRef>
+          <a:effectRef idx="2">
+            <a:schemeClr val="accent1"/>
+          </a:effectRef>
+          <a:fontRef idx="minor">
+            <a:schemeClr val="lt1"/>
+          </a:fontRef>
+        </p:style>
+        <p:txBody>
+          <a:bodyPr rtlCol="0" anchor="ctr"/>
+          <a:lstStyle/>
+          <a:p/>
+        </p:txBody>
+      </p:sp>
+      <p:sp>
+        <p:nvSpPr>
+          <p:cNvPr id="5" name="ChipTxt"/>
+          <p:cNvSpPr txBox="1"/>
+          <p:nvPr/>
+        </p:nvSpPr>
+        <p:spPr>
+          <a:xfrm>
+            <a:off x="457200" y="173736"/>
+            <a:ext cx="3017520" cy="310896"/>
+          </a:xfrm>
+          <a:prstGeom prst="rect">
+            <a:avLst/>
+          </a:prstGeom>
+          <a:noFill/>
+        </p:spPr>
+        <p:txBody>
+          <a:bodyPr wrap="square" anchor="ctr" lIns="45720" rIns="45720" tIns="27432" bIns="27432">
+            <a:normAutofit/>
+          </a:bodyPr>
+          <a:lstStyle/>
+          <a:p>
+            <a:pPr algn="ctr"/>
+            <a:r>
+              <a:rPr sz="950" b="1">
+                <a:solidFill>
+                  <a:srgbClr val="157355"/>
+                </a:solidFill>
+                <a:latin typeface="Inter"/>
+              </a:rPr>
+              <a:t>RETO 4 · SIMULATIE MET BEPERKING</a:t>
+            </a:r>
+          </a:p>
+        </p:txBody>
+      </p:sp>
+      <p:sp>
+        <p:nvSpPr>
+          <p:cNvPr id="6" name="Titulo"/>
+          <p:cNvSpPr txBox="1"/>
+          <p:nvPr/>
+        </p:nvSpPr>
+        <p:spPr>
+          <a:xfrm>
+            <a:off x="457200" y="502920"/>
+            <a:ext cx="8412480" cy="475488"/>
+          </a:xfrm>
+          <a:prstGeom prst="rect">
+            <a:avLst/>
+          </a:prstGeom>
+          <a:noFill/>
+        </p:spPr>
+        <p:txBody>
+          <a:bodyPr wrap="square" anchor="t" lIns="45720" rIns="45720" tIns="27432" bIns="27432">
+            <a:normAutofit/>
+          </a:bodyPr>
+          <a:lstStyle/>
+          <a:p>
+            <a:pPr algn="l"/>
+            <a:r>
+              <a:rPr sz="2700" b="1">
+                <a:solidFill>
+                  <a:srgbClr val="FFFFFF"/>
+                </a:solidFill>
+                <a:latin typeface="Bricolage Grotesque"/>
+              </a:rPr>
+              <a:t>El pedido imposible</a:t>
+            </a:r>
+          </a:p>
+        </p:txBody>
+      </p:sp>
+      <p:sp>
+        <p:nvSpPr>
+          <p:cNvPr id="7" name="Badges"/>
+          <p:cNvSpPr txBox="1"/>
+          <p:nvPr/>
+        </p:nvSpPr>
+        <p:spPr>
+          <a:xfrm>
+            <a:off x="9052560" y="256032"/>
+            <a:ext cx="2651760" cy="640080"/>
+          </a:xfrm>
+          <a:prstGeom prst="rect">
+            <a:avLst/>
+          </a:prstGeom>
+          <a:noFill/>
+        </p:spPr>
+        <p:txBody>
+          <a:bodyPr wrap="square" anchor="t" lIns="45720" rIns="45720" tIns="27432" bIns="27432">
+            <a:normAutofit/>
+          </a:bodyPr>
+          <a:lstStyle/>
+          <a:p>
+            <a:pPr algn="r"/>
+            <a:r>
+              <a:rPr sz="1000">
+                <a:solidFill>
+                  <a:srgbClr val="E4F4EE"/>
+                </a:solidFill>
+                <a:latin typeface="Inter"/>
+              </a:rPr>
+              <a:t>👥 En parejas</a:t>
+            </a:r>
+          </a:p>
+          <a:p>
+            <a:pPr algn="r"/>
+            <a:r>
+              <a:rPr sz="1000">
+                <a:solidFill>
+                  <a:srgbClr val="E4F4EE"/>
+                </a:solidFill>
+                <a:latin typeface="Inter"/>
+              </a:rPr>
+              <a:t>± 15 min · ★★★</a:t>
+            </a:r>
+          </a:p>
+        </p:txBody>
+      </p:sp>
+      <p:sp>
+        <p:nvSpPr>
+          <p:cNvPr id="8" name="Gancho"/>
+          <p:cNvSpPr txBox="1"/>
+          <p:nvPr/>
+        </p:nvSpPr>
+        <p:spPr>
+          <a:xfrm>
+            <a:off x="457200" y="1225296"/>
+            <a:ext cx="11274552" cy="566928"/>
+          </a:xfrm>
+          <a:prstGeom prst="rect">
+            <a:avLst/>
+          </a:prstGeom>
+          <a:noFill/>
+        </p:spPr>
+        <p:txBody>
+          <a:bodyPr wrap="square" anchor="t" lIns="45720" rIns="45720" tIns="27432" bIns="27432">
+            <a:normAutofit/>
+          </a:bodyPr>
+          <a:lstStyle/>
+          <a:p>
+            <a:pPr algn="l"/>
+            <a:r>
+              <a:rPr sz="1600" b="1">
+                <a:solidFill>
+                  <a:srgbClr val="157355"/>
+                </a:solidFill>
+                <a:latin typeface="Bricolage Grotesque"/>
+              </a:rPr>
+              <a:t>El camarero dice que no a casi todo. Tú tienes que cenar igual.</a:t>
+            </a:r>
+          </a:p>
+          <a:p>
+            <a:pPr algn="l"/>
+            <a:r>
+              <a:rPr sz="1100" i="1">
+                <a:solidFill>
+                  <a:srgbClr val="6A6E78"/>
+                </a:solidFill>
+                <a:latin typeface="Inter"/>
+              </a:rPr>
+              <a:t>De ober zegt op bijna alles nee. Jij moet tóch eten.</a:t>
+            </a:r>
+          </a:p>
+        </p:txBody>
+      </p:sp>
+      <p:sp>
+        <p:nvSpPr>
+          <p:cNvPr id="9" name="ReglaCaja"/>
+          <p:cNvSpPr/>
+          <p:nvPr/>
+        </p:nvSpPr>
+        <p:spPr>
+          <a:xfrm>
+            <a:off x="457200" y="1847088"/>
+            <a:ext cx="11274552" cy="658368"/>
+          </a:xfrm>
+          <a:prstGeom prst="roundRect">
+            <a:avLst>
+              <a:gd name="adj" fmla="val 5000"/>
+            </a:avLst>
+          </a:prstGeom>
+          <a:solidFill>
+            <a:srgbClr val="FBF3D6"/>
+          </a:solidFill>
+          <a:ln>
+            <a:noFill/>
+          </a:ln>
+          <a:effectLst/>
+        </p:spPr>
+        <p:style>
+          <a:lnRef idx="1">
+            <a:schemeClr val="accent1"/>
+          </a:lnRef>
+          <a:fillRef idx="3">
+            <a:schemeClr val="accent1"/>
+          </a:fillRef>
+          <a:effectRef idx="2">
+            <a:schemeClr val="accent1"/>
+          </a:effectRef>
+          <a:fontRef idx="minor">
+            <a:schemeClr val="lt1"/>
+          </a:fontRef>
+        </p:style>
+        <p:txBody>
+          <a:bodyPr rtlCol="0" anchor="ctr"/>
+          <a:lstStyle/>
+          <a:p/>
+        </p:txBody>
+      </p:sp>
+      <p:sp>
+        <p:nvSpPr>
+          <p:cNvPr id="10" name="ReglaTxt"/>
+          <p:cNvSpPr txBox="1"/>
+          <p:nvPr/>
+        </p:nvSpPr>
+        <p:spPr>
+          <a:xfrm>
+            <a:off x="603504" y="1883664"/>
+            <a:ext cx="10972800" cy="585216"/>
+          </a:xfrm>
+          <a:prstGeom prst="rect">
+            <a:avLst/>
+          </a:prstGeom>
+          <a:noFill/>
+        </p:spPr>
+        <p:txBody>
+          <a:bodyPr wrap="square" anchor="t" lIns="45720" rIns="45720" tIns="27432" bIns="27432">
+            <a:normAutofit/>
+          </a:bodyPr>
+          <a:lstStyle/>
+          <a:p>
+            <a:pPr algn="l"/>
+            <a:r>
+              <a:rPr sz="850" b="1">
+                <a:solidFill>
+                  <a:srgbClr val="B7860B"/>
+                </a:solidFill>
+                <a:latin typeface="Inter"/>
+              </a:rPr>
+              <a:t>LA REGLA DEL RETO</a:t>
+            </a:r>
+          </a:p>
+          <a:p>
+            <a:pPr algn="l"/>
+            <a:r>
+              <a:rPr sz="1100">
+                <a:solidFill>
+                  <a:srgbClr val="20242E"/>
+                </a:solidFill>
+                <a:latin typeface="Inter"/>
+              </a:rPr>
+              <a:t>Elke «lo siento» dwingt je tot een nieuw voorstel — en je mag nooit twee keer dezelfde beleefdheidsformule gebruiken.</a:t>
+            </a:r>
+          </a:p>
+        </p:txBody>
+      </p:sp>
+      <p:sp>
+        <p:nvSpPr>
+          <p:cNvPr id="11" name="Tarjeta 0"/>
+          <p:cNvSpPr/>
+          <p:nvPr/>
+        </p:nvSpPr>
+        <p:spPr>
+          <a:xfrm>
+            <a:off x="457200" y="2670048"/>
+            <a:ext cx="2708910" cy="1170432"/>
+          </a:xfrm>
+          <a:prstGeom prst="roundRect">
+            <a:avLst>
+              <a:gd name="adj" fmla="val 6000"/>
+            </a:avLst>
+          </a:prstGeom>
+          <a:solidFill>
+            <a:srgbClr val="FFFFFF"/>
+          </a:solidFill>
+          <a:ln w="12700">
+            <a:solidFill>
+              <a:srgbClr val="E4E3DE"/>
+            </a:solidFill>
+          </a:ln>
+          <a:effectLst/>
+        </p:spPr>
+        <p:style>
+          <a:lnRef idx="1">
+            <a:schemeClr val="accent1"/>
+          </a:lnRef>
+          <a:fillRef idx="3">
+            <a:schemeClr val="accent1"/>
+          </a:fillRef>
+          <a:effectRef idx="2">
+            <a:schemeClr val="accent1"/>
+          </a:effectRef>
+          <a:fontRef idx="minor">
+            <a:schemeClr val="lt1"/>
+          </a:fontRef>
+        </p:style>
+        <p:txBody>
+          <a:bodyPr rtlCol="0" anchor="ctr"/>
+          <a:lstStyle/>
+          <a:p/>
+        </p:txBody>
+      </p:sp>
+      <p:sp>
+        <p:nvSpPr>
+          <p:cNvPr id="12" name="TarjetaTxt 0"/>
+          <p:cNvSpPr txBox="1"/>
+          <p:nvPr/>
+        </p:nvSpPr>
+        <p:spPr>
+          <a:xfrm>
+            <a:off x="548640" y="2724912"/>
+            <a:ext cx="2526030" cy="1060704"/>
+          </a:xfrm>
+          <a:prstGeom prst="rect">
+            <a:avLst/>
+          </a:prstGeom>
+          <a:noFill/>
+        </p:spPr>
+        <p:txBody>
+          <a:bodyPr wrap="square" anchor="t" lIns="45720" rIns="45720" tIns="27432" bIns="27432">
+            <a:normAutofit/>
+          </a:bodyPr>
+          <a:lstStyle/>
+          <a:p>
+            <a:pPr algn="l"/>
+            <a:r>
+              <a:rPr sz="1100" b="1">
+                <a:solidFill>
+                  <a:srgbClr val="157355"/>
+                </a:solidFill>
+                <a:latin typeface="Bricolage Grotesque"/>
+              </a:rPr>
+              <a:t>La carta</a:t>
+            </a:r>
+          </a:p>
+          <a:p>
+            <a:pPr algn="l"/>
+            <a:r>
+              <a:rPr sz="1000">
+                <a:solidFill>
+                  <a:srgbClr val="20242E"/>
+                </a:solidFill>
+                <a:latin typeface="Inter"/>
+              </a:rPr>
+              <a:t>sopa de tortilla · quesadillas · tacos al pastor</a:t>
+            </a:r>
+          </a:p>
+        </p:txBody>
+      </p:sp>
+      <p:sp>
+        <p:nvSpPr>
+          <p:cNvPr id="13" name="Tarjeta 1"/>
+          <p:cNvSpPr/>
+          <p:nvPr/>
+        </p:nvSpPr>
+        <p:spPr>
+          <a:xfrm>
+            <a:off x="3312414" y="2670048"/>
+            <a:ext cx="2708910" cy="1170432"/>
+          </a:xfrm>
+          <a:prstGeom prst="roundRect">
+            <a:avLst>
+              <a:gd name="adj" fmla="val 6000"/>
+            </a:avLst>
+          </a:prstGeom>
+          <a:solidFill>
+            <a:srgbClr val="FFFFFF"/>
+          </a:solidFill>
+          <a:ln w="12700">
+            <a:solidFill>
+              <a:srgbClr val="E4E3DE"/>
+            </a:solidFill>
+          </a:ln>
+          <a:effectLst/>
+        </p:spPr>
+        <p:style>
+          <a:lnRef idx="1">
+            <a:schemeClr val="accent1"/>
+          </a:lnRef>
+          <a:fillRef idx="3">
+            <a:schemeClr val="accent1"/>
+          </a:fillRef>
+          <a:effectRef idx="2">
+            <a:schemeClr val="accent1"/>
+          </a:effectRef>
+          <a:fontRef idx="minor">
+            <a:schemeClr val="lt1"/>
+          </a:fontRef>
+        </p:style>
+        <p:txBody>
+          <a:bodyPr rtlCol="0" anchor="ctr"/>
+          <a:lstStyle/>
+          <a:p/>
+        </p:txBody>
+      </p:sp>
+      <p:sp>
+        <p:nvSpPr>
+          <p:cNvPr id="14" name="TarjetaTxt 1"/>
+          <p:cNvSpPr txBox="1"/>
+          <p:nvPr/>
+        </p:nvSpPr>
+        <p:spPr>
+          <a:xfrm>
+            <a:off x="3403854" y="2724912"/>
+            <a:ext cx="2526030" cy="1060704"/>
+          </a:xfrm>
+          <a:prstGeom prst="rect">
+            <a:avLst/>
+          </a:prstGeom>
+          <a:noFill/>
+        </p:spPr>
+        <p:txBody>
+          <a:bodyPr wrap="square" anchor="t" lIns="45720" rIns="45720" tIns="27432" bIns="27432">
+            <a:normAutofit/>
+          </a:bodyPr>
+          <a:lstStyle/>
+          <a:p>
+            <a:pPr algn="l"/>
+            <a:r>
+              <a:rPr sz="1100" b="1">
+                <a:solidFill>
+                  <a:srgbClr val="157355"/>
+                </a:solidFill>
+                <a:latin typeface="Bricolage Grotesque"/>
+              </a:rPr>
+              <a:t>La carta</a:t>
+            </a:r>
+          </a:p>
+          <a:p>
+            <a:pPr algn="l"/>
+            <a:r>
+              <a:rPr sz="1000">
+                <a:solidFill>
+                  <a:srgbClr val="20242E"/>
+                </a:solidFill>
+                <a:latin typeface="Inter"/>
+              </a:rPr>
+              <a:t>enchiladas · pozole · horchata</a:t>
+            </a:r>
+          </a:p>
+        </p:txBody>
+      </p:sp>
+      <p:sp>
+        <p:nvSpPr>
+          <p:cNvPr id="15" name="Tarjeta 2"/>
+          <p:cNvSpPr/>
+          <p:nvPr/>
+        </p:nvSpPr>
+        <p:spPr>
+          <a:xfrm>
+            <a:off x="6167628" y="2670048"/>
+            <a:ext cx="2708910" cy="1170432"/>
+          </a:xfrm>
+          <a:prstGeom prst="roundRect">
+            <a:avLst>
+              <a:gd name="adj" fmla="val 6000"/>
+            </a:avLst>
+          </a:prstGeom>
+          <a:solidFill>
+            <a:srgbClr val="FFFFFF"/>
+          </a:solidFill>
+          <a:ln w="12700">
+            <a:solidFill>
+              <a:srgbClr val="E4E3DE"/>
+            </a:solidFill>
+          </a:ln>
+          <a:effectLst/>
+        </p:spPr>
+        <p:style>
+          <a:lnRef idx="1">
+            <a:schemeClr val="accent1"/>
+          </a:lnRef>
+          <a:fillRef idx="3">
+            <a:schemeClr val="accent1"/>
+          </a:fillRef>
+          <a:effectRef idx="2">
+            <a:schemeClr val="accent1"/>
+          </a:effectRef>
+          <a:fontRef idx="minor">
+            <a:schemeClr val="lt1"/>
+          </a:fontRef>
+        </p:style>
+        <p:txBody>
+          <a:bodyPr rtlCol="0" anchor="ctr"/>
+          <a:lstStyle/>
+          <a:p/>
+        </p:txBody>
+      </p:sp>
+      <p:sp>
+        <p:nvSpPr>
+          <p:cNvPr id="16" name="TarjetaTxt 2"/>
+          <p:cNvSpPr txBox="1"/>
+          <p:nvPr/>
+        </p:nvSpPr>
+        <p:spPr>
+          <a:xfrm>
+            <a:off x="6259068" y="2724912"/>
+            <a:ext cx="2526030" cy="1060704"/>
+          </a:xfrm>
+          <a:prstGeom prst="rect">
+            <a:avLst/>
+          </a:prstGeom>
+          <a:noFill/>
+        </p:spPr>
+        <p:txBody>
+          <a:bodyPr wrap="square" anchor="t" lIns="45720" rIns="45720" tIns="27432" bIns="27432">
+            <a:normAutofit/>
+          </a:bodyPr>
+          <a:lstStyle/>
+          <a:p>
+            <a:pPr algn="l"/>
+            <a:r>
+              <a:rPr sz="1100" b="1">
+                <a:solidFill>
+                  <a:srgbClr val="157355"/>
+                </a:solidFill>
+                <a:latin typeface="Bricolage Grotesque"/>
+              </a:rPr>
+              <a:t>La carta</a:t>
+            </a:r>
+          </a:p>
+          <a:p>
+            <a:pPr algn="l"/>
+            <a:r>
+              <a:rPr sz="1000">
+                <a:solidFill>
+                  <a:srgbClr val="20242E"/>
+                </a:solidFill>
+                <a:latin typeface="Inter"/>
+              </a:rPr>
+              <a:t>agua de jamaica · flan · arroz con leche</a:t>
+            </a:r>
+          </a:p>
+        </p:txBody>
+      </p:sp>
+      <p:sp>
+        <p:nvSpPr>
+          <p:cNvPr id="17" name="Tarjeta 3"/>
+          <p:cNvSpPr/>
+          <p:nvPr/>
+        </p:nvSpPr>
+        <p:spPr>
+          <a:xfrm>
+            <a:off x="9022842" y="2670048"/>
+            <a:ext cx="2708910" cy="1170432"/>
+          </a:xfrm>
+          <a:prstGeom prst="roundRect">
+            <a:avLst>
+              <a:gd name="adj" fmla="val 6000"/>
+            </a:avLst>
+          </a:prstGeom>
+          <a:solidFill>
+            <a:srgbClr val="FFFFFF"/>
+          </a:solidFill>
+          <a:ln w="12700">
+            <a:solidFill>
+              <a:srgbClr val="E4E3DE"/>
+            </a:solidFill>
+          </a:ln>
+          <a:effectLst/>
+        </p:spPr>
+        <p:style>
+          <a:lnRef idx="1">
+            <a:schemeClr val="accent1"/>
+          </a:lnRef>
+          <a:fillRef idx="3">
+            <a:schemeClr val="accent1"/>
+          </a:fillRef>
+          <a:effectRef idx="2">
+            <a:schemeClr val="accent1"/>
+          </a:effectRef>
+          <a:fontRef idx="minor">
+            <a:schemeClr val="lt1"/>
+          </a:fontRef>
+        </p:style>
+        <p:txBody>
+          <a:bodyPr rtlCol="0" anchor="ctr"/>
+          <a:lstStyle/>
+          <a:p/>
+        </p:txBody>
+      </p:sp>
+      <p:sp>
+        <p:nvSpPr>
+          <p:cNvPr id="18" name="TarjetaTxt 3"/>
+          <p:cNvSpPr txBox="1"/>
+          <p:nvPr/>
+        </p:nvSpPr>
+        <p:spPr>
+          <a:xfrm>
+            <a:off x="9114282" y="2724912"/>
+            <a:ext cx="2526030" cy="1060704"/>
+          </a:xfrm>
+          <a:prstGeom prst="rect">
+            <a:avLst/>
+          </a:prstGeom>
+          <a:noFill/>
+        </p:spPr>
+        <p:txBody>
+          <a:bodyPr wrap="square" anchor="t" lIns="45720" rIns="45720" tIns="27432" bIns="27432">
+            <a:normAutofit/>
+          </a:bodyPr>
+          <a:lstStyle/>
+          <a:p>
+            <a:pPr algn="l"/>
+            <a:r>
+              <a:rPr sz="1100" b="1">
+                <a:solidFill>
+                  <a:srgbClr val="157355"/>
+                </a:solidFill>
+                <a:latin typeface="Bricolage Grotesque"/>
+              </a:rPr>
+              <a:t>Fórmulas</a:t>
+            </a:r>
+          </a:p>
+          <a:p>
+            <a:pPr algn="l"/>
+            <a:r>
+              <a:rPr sz="1000">
+                <a:solidFill>
+                  <a:srgbClr val="20242E"/>
+                </a:solidFill>
+                <a:latin typeface="Inter"/>
+              </a:rPr>
+              <a:t>Para mí, … · ¿Me pone …? · ¿Me trae …?</a:t>
+            </a:r>
+          </a:p>
+        </p:txBody>
+      </p:sp>
+      <p:sp>
+        <p:nvSpPr>
+          <p:cNvPr id="19" name="Tarjeta 4"/>
+          <p:cNvSpPr/>
+          <p:nvPr/>
+        </p:nvSpPr>
+        <p:spPr>
+          <a:xfrm>
+            <a:off x="457200" y="3968496"/>
+            <a:ext cx="2708910" cy="1170432"/>
+          </a:xfrm>
+          <a:prstGeom prst="roundRect">
+            <a:avLst>
+              <a:gd name="adj" fmla="val 6000"/>
+            </a:avLst>
+          </a:prstGeom>
+          <a:solidFill>
+            <a:srgbClr val="FFFFFF"/>
+          </a:solidFill>
+          <a:ln w="12700">
+            <a:solidFill>
+              <a:srgbClr val="E4E3DE"/>
+            </a:solidFill>
+          </a:ln>
+          <a:effectLst/>
+        </p:spPr>
+        <p:style>
+          <a:lnRef idx="1">
+            <a:schemeClr val="accent1"/>
+          </a:lnRef>
+          <a:fillRef idx="3">
+            <a:schemeClr val="accent1"/>
+          </a:fillRef>
+          <a:effectRef idx="2">
+            <a:schemeClr val="accent1"/>
+          </a:effectRef>
+          <a:fontRef idx="minor">
+            <a:schemeClr val="lt1"/>
+          </a:fontRef>
+        </p:style>
+        <p:txBody>
+          <a:bodyPr rtlCol="0" anchor="ctr"/>
+          <a:lstStyle/>
+          <a:p/>
+        </p:txBody>
+      </p:sp>
+      <p:sp>
+        <p:nvSpPr>
+          <p:cNvPr id="20" name="TarjetaTxt 4"/>
+          <p:cNvSpPr txBox="1"/>
+          <p:nvPr/>
+        </p:nvSpPr>
+        <p:spPr>
+          <a:xfrm>
+            <a:off x="548640" y="4023360"/>
+            <a:ext cx="2526030" cy="1060704"/>
+          </a:xfrm>
+          <a:prstGeom prst="rect">
+            <a:avLst/>
+          </a:prstGeom>
+          <a:noFill/>
+        </p:spPr>
+        <p:txBody>
+          <a:bodyPr wrap="square" anchor="t" lIns="45720" rIns="45720" tIns="27432" bIns="27432">
+            <a:normAutofit/>
+          </a:bodyPr>
+          <a:lstStyle/>
+          <a:p>
+            <a:pPr algn="l"/>
+            <a:r>
+              <a:rPr sz="1100" b="1">
+                <a:solidFill>
+                  <a:srgbClr val="157355"/>
+                </a:solidFill>
+                <a:latin typeface="Bricolage Grotesque"/>
+              </a:rPr>
+              <a:t>Fórmulas</a:t>
+            </a:r>
+          </a:p>
+          <a:p>
+            <a:pPr algn="l"/>
+            <a:r>
+              <a:rPr sz="1000">
+                <a:solidFill>
+                  <a:srgbClr val="20242E"/>
+                </a:solidFill>
+                <a:latin typeface="Inter"/>
+              </a:rPr>
+              <a:t>¿Y tienen …? · Entonces …, por favor. · ¿Qué me recomienda?</a:t>
+            </a:r>
+          </a:p>
+        </p:txBody>
+      </p:sp>
+      <p:sp>
+        <p:nvSpPr>
+          <p:cNvPr id="21" name="Tarjeta 5"/>
+          <p:cNvSpPr/>
+          <p:nvPr/>
+        </p:nvSpPr>
+        <p:spPr>
+          <a:xfrm>
+            <a:off x="3312414" y="3968496"/>
+            <a:ext cx="2708910" cy="1170432"/>
+          </a:xfrm>
+          <a:prstGeom prst="roundRect">
+            <a:avLst>
+              <a:gd name="adj" fmla="val 6000"/>
+            </a:avLst>
+          </a:prstGeom>
+          <a:solidFill>
+            <a:srgbClr val="FFFFFF"/>
+          </a:solidFill>
+          <a:ln w="12700">
+            <a:solidFill>
+              <a:srgbClr val="E4E3DE"/>
+            </a:solidFill>
+          </a:ln>
+          <a:effectLst/>
+        </p:spPr>
+        <p:style>
+          <a:lnRef idx="1">
+            <a:schemeClr val="accent1"/>
+          </a:lnRef>
+          <a:fillRef idx="3">
+            <a:schemeClr val="accent1"/>
+          </a:fillRef>
+          <a:effectRef idx="2">
+            <a:schemeClr val="accent1"/>
+          </a:effectRef>
+          <a:fontRef idx="minor">
+            <a:schemeClr val="lt1"/>
+          </a:fontRef>
+        </p:style>
+        <p:txBody>
+          <a:bodyPr rtlCol="0" anchor="ctr"/>
+          <a:lstStyle/>
+          <a:p/>
+        </p:txBody>
+      </p:sp>
+      <p:sp>
+        <p:nvSpPr>
+          <p:cNvPr id="22" name="TarjetaTxt 5"/>
+          <p:cNvSpPr txBox="1"/>
+          <p:nvPr/>
+        </p:nvSpPr>
+        <p:spPr>
+          <a:xfrm>
+            <a:off x="3403854" y="4023360"/>
+            <a:ext cx="2526030" cy="859536"/>
+          </a:xfrm>
+          <a:prstGeom prst="rect">
+            <a:avLst/>
+          </a:prstGeom>
+          <a:noFill/>
+        </p:spPr>
+        <p:txBody>
+          <a:bodyPr wrap="square" anchor="t" lIns="45720" rIns="45720" tIns="27432" bIns="27432">
+            <a:normAutofit/>
+          </a:bodyPr>
+          <a:lstStyle/>
+          <a:p>
+            <a:pPr algn="l"/>
+            <a:r>
+              <a:rPr sz="1100" b="1">
+                <a:solidFill>
+                  <a:srgbClr val="157355"/>
+                </a:solidFill>
+                <a:latin typeface="Bricolage Grotesque"/>
+              </a:rPr>
+              <a:t>El camarero</a:t>
+            </a:r>
+          </a:p>
+          <a:p>
+            <a:pPr algn="l"/>
+            <a:r>
+              <a:rPr sz="1000">
+                <a:solidFill>
+                  <a:srgbClr val="20242E"/>
+                </a:solidFill>
+                <a:latin typeface="Inter"/>
+              </a:rPr>
+              <a:t>No hay tacos de pollo.</a:t>
+            </a:r>
+          </a:p>
+        </p:txBody>
+      </p:sp>
+      <p:sp>
+        <p:nvSpPr>
+          <p:cNvPr id="23" name="Onthul 5"/>
+          <p:cNvSpPr/>
+          <p:nvPr/>
+        </p:nvSpPr>
+        <p:spPr>
+          <a:xfrm>
+            <a:off x="3403854" y="4846320"/>
+            <a:ext cx="2526030" cy="237744"/>
+          </a:xfrm>
+          <a:prstGeom prst="roundRect">
+            <a:avLst>
+              <a:gd name="adj" fmla="val 20000"/>
+            </a:avLst>
+          </a:prstGeom>
+          <a:solidFill>
+            <a:srgbClr val="E4F4EE"/>
+          </a:solidFill>
+          <a:ln>
+            <a:noFill/>
+          </a:ln>
+          <a:effectLst/>
+        </p:spPr>
+        <p:style>
+          <a:lnRef idx="1">
+            <a:schemeClr val="accent1"/>
+          </a:lnRef>
+          <a:fillRef idx="3">
+            <a:schemeClr val="accent1"/>
+          </a:fillRef>
+          <a:effectRef idx="2">
+            <a:schemeClr val="accent1"/>
+          </a:effectRef>
+          <a:fontRef idx="minor">
+            <a:schemeClr val="lt1"/>
+          </a:fontRef>
+        </p:style>
+        <p:txBody>
+          <a:bodyPr rtlCol="0" anchor="ctr"/>
+          <a:lstStyle/>
+          <a:p/>
+        </p:txBody>
+      </p:sp>
+      <p:sp>
+        <p:nvSpPr>
+          <p:cNvPr id="24" name="OnthulTxt 5"/>
+          <p:cNvSpPr txBox="1"/>
+          <p:nvPr/>
+        </p:nvSpPr>
+        <p:spPr>
+          <a:xfrm>
+            <a:off x="3422142" y="4846320"/>
+            <a:ext cx="2489454" cy="237744"/>
+          </a:xfrm>
+          <a:prstGeom prst="rect">
+            <a:avLst/>
+          </a:prstGeom>
+          <a:noFill/>
+        </p:spPr>
+        <p:txBody>
+          <a:bodyPr wrap="square" anchor="ctr" lIns="45720" rIns="45720" tIns="27432" bIns="27432">
+            <a:normAutofit/>
+          </a:bodyPr>
+          <a:lstStyle/>
+          <a:p>
+            <a:pPr algn="l"/>
+            <a:r>
+              <a:rPr sz="850" b="1">
+                <a:solidFill>
+                  <a:srgbClr val="157355"/>
+                </a:solidFill>
+                <a:latin typeface="Inter"/>
+              </a:rPr>
+              <a:t>cambia de plato y de fórmula</a:t>
+            </a:r>
+          </a:p>
+        </p:txBody>
+      </p:sp>
+      <p:sp>
+        <p:nvSpPr>
+          <p:cNvPr id="25" name="Tarjeta 6"/>
+          <p:cNvSpPr/>
+          <p:nvPr/>
+        </p:nvSpPr>
+        <p:spPr>
+          <a:xfrm>
+            <a:off x="6167628" y="3968496"/>
+            <a:ext cx="2708910" cy="1170432"/>
+          </a:xfrm>
+          <a:prstGeom prst="roundRect">
+            <a:avLst>
+              <a:gd name="adj" fmla="val 6000"/>
+            </a:avLst>
+          </a:prstGeom>
+          <a:solidFill>
+            <a:srgbClr val="FFFFFF"/>
+          </a:solidFill>
+          <a:ln w="12700">
+            <a:solidFill>
+              <a:srgbClr val="E4E3DE"/>
+            </a:solidFill>
+          </a:ln>
+          <a:effectLst/>
+        </p:spPr>
+        <p:style>
+          <a:lnRef idx="1">
+            <a:schemeClr val="accent1"/>
+          </a:lnRef>
+          <a:fillRef idx="3">
+            <a:schemeClr val="accent1"/>
+          </a:fillRef>
+          <a:effectRef idx="2">
+            <a:schemeClr val="accent1"/>
+          </a:effectRef>
+          <a:fontRef idx="minor">
+            <a:schemeClr val="lt1"/>
+          </a:fontRef>
+        </p:style>
+        <p:txBody>
+          <a:bodyPr rtlCol="0" anchor="ctr"/>
+          <a:lstStyle/>
+          <a:p/>
+        </p:txBody>
+      </p:sp>
+      <p:sp>
+        <p:nvSpPr>
+          <p:cNvPr id="26" name="TarjetaTxt 6"/>
+          <p:cNvSpPr txBox="1"/>
+          <p:nvPr/>
+        </p:nvSpPr>
+        <p:spPr>
+          <a:xfrm>
+            <a:off x="6259068" y="4023360"/>
+            <a:ext cx="2526030" cy="859536"/>
+          </a:xfrm>
+          <a:prstGeom prst="rect">
+            <a:avLst/>
+          </a:prstGeom>
+          <a:noFill/>
+        </p:spPr>
+        <p:txBody>
+          <a:bodyPr wrap="square" anchor="t" lIns="45720" rIns="45720" tIns="27432" bIns="27432">
+            <a:normAutofit/>
+          </a:bodyPr>
+          <a:lstStyle/>
+          <a:p>
+            <a:pPr algn="l"/>
+            <a:r>
+              <a:rPr sz="1100" b="1">
+                <a:solidFill>
+                  <a:srgbClr val="157355"/>
+                </a:solidFill>
+                <a:latin typeface="Bricolage Grotesque"/>
+              </a:rPr>
+              <a:t>El camarero</a:t>
+            </a:r>
+          </a:p>
+          <a:p>
+            <a:pPr algn="l"/>
+            <a:r>
+              <a:rPr sz="1000">
+                <a:solidFill>
+                  <a:srgbClr val="20242E"/>
+                </a:solidFill>
+                <a:latin typeface="Inter"/>
+              </a:rPr>
+              <a:t>Se acabó el pozole.</a:t>
+            </a:r>
+          </a:p>
+        </p:txBody>
+      </p:sp>
+      <p:sp>
+        <p:nvSpPr>
+          <p:cNvPr id="27" name="Onthul 6"/>
+          <p:cNvSpPr/>
+          <p:nvPr/>
+        </p:nvSpPr>
+        <p:spPr>
+          <a:xfrm>
+            <a:off x="6259068" y="4846320"/>
+            <a:ext cx="2526030" cy="237744"/>
+          </a:xfrm>
+          <a:prstGeom prst="roundRect">
+            <a:avLst>
+              <a:gd name="adj" fmla="val 20000"/>
+            </a:avLst>
+          </a:prstGeom>
+          <a:solidFill>
+            <a:srgbClr val="E4F4EE"/>
+          </a:solidFill>
+          <a:ln>
+            <a:noFill/>
+          </a:ln>
+          <a:effectLst/>
+        </p:spPr>
+        <p:style>
+          <a:lnRef idx="1">
+            <a:schemeClr val="accent1"/>
+          </a:lnRef>
+          <a:fillRef idx="3">
+            <a:schemeClr val="accent1"/>
+          </a:fillRef>
+          <a:effectRef idx="2">
+            <a:schemeClr val="accent1"/>
+          </a:effectRef>
+          <a:fontRef idx="minor">
+            <a:schemeClr val="lt1"/>
+          </a:fontRef>
+        </p:style>
+        <p:txBody>
+          <a:bodyPr rtlCol="0" anchor="ctr"/>
+          <a:lstStyle/>
+          <a:p/>
+        </p:txBody>
+      </p:sp>
+      <p:sp>
+        <p:nvSpPr>
+          <p:cNvPr id="28" name="OnthulTxt 6"/>
+          <p:cNvSpPr txBox="1"/>
+          <p:nvPr/>
+        </p:nvSpPr>
+        <p:spPr>
+          <a:xfrm>
+            <a:off x="6277356" y="4846320"/>
+            <a:ext cx="2489454" cy="237744"/>
+          </a:xfrm>
+          <a:prstGeom prst="rect">
+            <a:avLst/>
+          </a:prstGeom>
+          <a:noFill/>
+        </p:spPr>
+        <p:txBody>
+          <a:bodyPr wrap="square" anchor="ctr" lIns="45720" rIns="45720" tIns="27432" bIns="27432">
+            <a:normAutofit/>
+          </a:bodyPr>
+          <a:lstStyle/>
+          <a:p>
+            <a:pPr algn="l"/>
+            <a:r>
+              <a:rPr sz="850" b="1">
+                <a:solidFill>
+                  <a:srgbClr val="157355"/>
+                </a:solidFill>
+                <a:latin typeface="Inter"/>
+              </a:rPr>
+              <a:t>cambia de plato y de fórmula</a:t>
+            </a:r>
+          </a:p>
+        </p:txBody>
+      </p:sp>
+      <p:sp>
+        <p:nvSpPr>
+          <p:cNvPr id="29" name="Tarjeta 7"/>
+          <p:cNvSpPr/>
+          <p:nvPr/>
+        </p:nvSpPr>
+        <p:spPr>
+          <a:xfrm>
+            <a:off x="9022842" y="3968496"/>
+            <a:ext cx="2708910" cy="1170432"/>
+          </a:xfrm>
+          <a:prstGeom prst="roundRect">
+            <a:avLst>
+              <a:gd name="adj" fmla="val 6000"/>
+            </a:avLst>
+          </a:prstGeom>
+          <a:solidFill>
+            <a:srgbClr val="FFFFFF"/>
+          </a:solidFill>
+          <a:ln w="12700">
+            <a:solidFill>
+              <a:srgbClr val="E4E3DE"/>
+            </a:solidFill>
+          </a:ln>
+          <a:effectLst/>
+        </p:spPr>
+        <p:style>
+          <a:lnRef idx="1">
+            <a:schemeClr val="accent1"/>
+          </a:lnRef>
+          <a:fillRef idx="3">
+            <a:schemeClr val="accent1"/>
+          </a:fillRef>
+          <a:effectRef idx="2">
+            <a:schemeClr val="accent1"/>
+          </a:effectRef>
+          <a:fontRef idx="minor">
+            <a:schemeClr val="lt1"/>
+          </a:fontRef>
+        </p:style>
+        <p:txBody>
+          <a:bodyPr rtlCol="0" anchor="ctr"/>
+          <a:lstStyle/>
+          <a:p/>
+        </p:txBody>
+      </p:sp>
+      <p:sp>
+        <p:nvSpPr>
+          <p:cNvPr id="30" name="TarjetaTxt 7"/>
+          <p:cNvSpPr txBox="1"/>
+          <p:nvPr/>
+        </p:nvSpPr>
+        <p:spPr>
+          <a:xfrm>
+            <a:off x="9114282" y="4023360"/>
+            <a:ext cx="2526030" cy="859536"/>
+          </a:xfrm>
+          <a:prstGeom prst="rect">
+            <a:avLst/>
+          </a:prstGeom>
+          <a:noFill/>
+        </p:spPr>
+        <p:txBody>
+          <a:bodyPr wrap="square" anchor="t" lIns="45720" rIns="45720" tIns="27432" bIns="27432">
+            <a:normAutofit/>
+          </a:bodyPr>
+          <a:lstStyle/>
+          <a:p>
+            <a:pPr algn="l"/>
+            <a:r>
+              <a:rPr sz="1100" b="1">
+                <a:solidFill>
+                  <a:srgbClr val="157355"/>
+                </a:solidFill>
+                <a:latin typeface="Bricolage Grotesque"/>
+              </a:rPr>
+              <a:t>El camarero</a:t>
+            </a:r>
+          </a:p>
+          <a:p>
+            <a:pPr algn="l"/>
+            <a:r>
+              <a:rPr sz="1000">
+                <a:solidFill>
+                  <a:srgbClr val="20242E"/>
+                </a:solidFill>
+                <a:latin typeface="Inter"/>
+              </a:rPr>
+              <a:t>El flan está terminado.</a:t>
+            </a:r>
+          </a:p>
+        </p:txBody>
+      </p:sp>
+      <p:sp>
+        <p:nvSpPr>
+          <p:cNvPr id="31" name="Onthul 7"/>
+          <p:cNvSpPr/>
+          <p:nvPr/>
+        </p:nvSpPr>
+        <p:spPr>
+          <a:xfrm>
+            <a:off x="9114282" y="4846320"/>
+            <a:ext cx="2526030" cy="237744"/>
+          </a:xfrm>
+          <a:prstGeom prst="roundRect">
+            <a:avLst>
+              <a:gd name="adj" fmla="val 20000"/>
+            </a:avLst>
+          </a:prstGeom>
+          <a:solidFill>
+            <a:srgbClr val="E4F4EE"/>
+          </a:solidFill>
+          <a:ln>
+            <a:noFill/>
+          </a:ln>
+          <a:effectLst/>
+        </p:spPr>
+        <p:style>
+          <a:lnRef idx="1">
+            <a:schemeClr val="accent1"/>
+          </a:lnRef>
+          <a:fillRef idx="3">
+            <a:schemeClr val="accent1"/>
+          </a:fillRef>
+          <a:effectRef idx="2">
+            <a:schemeClr val="accent1"/>
+          </a:effectRef>
+          <a:fontRef idx="minor">
+            <a:schemeClr val="lt1"/>
+          </a:fontRef>
+        </p:style>
+        <p:txBody>
+          <a:bodyPr rtlCol="0" anchor="ctr"/>
+          <a:lstStyle/>
+          <a:p/>
+        </p:txBody>
+      </p:sp>
+      <p:sp>
+        <p:nvSpPr>
+          <p:cNvPr id="32" name="OnthulTxt 7"/>
+          <p:cNvSpPr txBox="1"/>
+          <p:nvPr/>
+        </p:nvSpPr>
+        <p:spPr>
+          <a:xfrm>
+            <a:off x="9132570" y="4846320"/>
+            <a:ext cx="2489454" cy="237744"/>
+          </a:xfrm>
+          <a:prstGeom prst="rect">
+            <a:avLst/>
+          </a:prstGeom>
+          <a:noFill/>
+        </p:spPr>
+        <p:txBody>
+          <a:bodyPr wrap="square" anchor="ctr" lIns="45720" rIns="45720" tIns="27432" bIns="27432">
+            <a:normAutofit/>
+          </a:bodyPr>
+          <a:lstStyle/>
+          <a:p>
+            <a:pPr algn="l"/>
+            <a:r>
+              <a:rPr sz="850" b="1">
+                <a:solidFill>
+                  <a:srgbClr val="157355"/>
+                </a:solidFill>
+                <a:latin typeface="Inter"/>
+              </a:rPr>
+              <a:t>cambia de plato y de fórmula</a:t>
+            </a:r>
+          </a:p>
+        </p:txBody>
+      </p:sp>
+      <p:sp>
+        <p:nvSpPr>
+          <p:cNvPr id="33" name="Tarjeta 8"/>
+          <p:cNvSpPr/>
+          <p:nvPr/>
+        </p:nvSpPr>
+        <p:spPr>
+          <a:xfrm>
+            <a:off x="457200" y="5266944"/>
+            <a:ext cx="2708910" cy="1170432"/>
+          </a:xfrm>
+          <a:prstGeom prst="roundRect">
+            <a:avLst>
+              <a:gd name="adj" fmla="val 6000"/>
+            </a:avLst>
+          </a:prstGeom>
+          <a:solidFill>
+            <a:srgbClr val="FFFFFF"/>
+          </a:solidFill>
+          <a:ln w="12700">
+            <a:solidFill>
+              <a:srgbClr val="E4E3DE"/>
+            </a:solidFill>
+          </a:ln>
+          <a:effectLst/>
+        </p:spPr>
+        <p:style>
+          <a:lnRef idx="1">
+            <a:schemeClr val="accent1"/>
+          </a:lnRef>
+          <a:fillRef idx="3">
+            <a:schemeClr val="accent1"/>
+          </a:fillRef>
+          <a:effectRef idx="2">
+            <a:schemeClr val="accent1"/>
+          </a:effectRef>
+          <a:fontRef idx="minor">
+            <a:schemeClr val="lt1"/>
+          </a:fontRef>
+        </p:style>
+        <p:txBody>
+          <a:bodyPr rtlCol="0" anchor="ctr"/>
+          <a:lstStyle/>
+          <a:p/>
+        </p:txBody>
+      </p:sp>
+      <p:sp>
+        <p:nvSpPr>
+          <p:cNvPr id="34" name="TarjetaTxt 8"/>
+          <p:cNvSpPr txBox="1"/>
+          <p:nvPr/>
+        </p:nvSpPr>
+        <p:spPr>
+          <a:xfrm>
+            <a:off x="548640" y="5321808"/>
+            <a:ext cx="2526030" cy="859536"/>
+          </a:xfrm>
+          <a:prstGeom prst="rect">
+            <a:avLst/>
+          </a:prstGeom>
+          <a:noFill/>
+        </p:spPr>
+        <p:txBody>
+          <a:bodyPr wrap="square" anchor="t" lIns="45720" rIns="45720" tIns="27432" bIns="27432">
+            <a:normAutofit/>
+          </a:bodyPr>
+          <a:lstStyle/>
+          <a:p>
+            <a:pPr algn="l"/>
+            <a:r>
+              <a:rPr sz="1100" b="1">
+                <a:solidFill>
+                  <a:srgbClr val="157355"/>
+                </a:solidFill>
+                <a:latin typeface="Bricolage Grotesque"/>
+              </a:rPr>
+              <a:t>El camarero</a:t>
+            </a:r>
+          </a:p>
+          <a:p>
+            <a:pPr algn="l"/>
+            <a:r>
+              <a:rPr sz="1000">
+                <a:solidFill>
+                  <a:srgbClr val="20242E"/>
+                </a:solidFill>
+                <a:latin typeface="Inter"/>
+              </a:rPr>
+              <a:t>No queda agua de jamaica.</a:t>
+            </a:r>
+          </a:p>
+        </p:txBody>
+      </p:sp>
+      <p:sp>
+        <p:nvSpPr>
+          <p:cNvPr id="35" name="Onthul 8"/>
+          <p:cNvSpPr/>
+          <p:nvPr/>
+        </p:nvSpPr>
+        <p:spPr>
+          <a:xfrm>
+            <a:off x="548640" y="6144768"/>
+            <a:ext cx="2526030" cy="237744"/>
+          </a:xfrm>
+          <a:prstGeom prst="roundRect">
+            <a:avLst>
+              <a:gd name="adj" fmla="val 20000"/>
+            </a:avLst>
+          </a:prstGeom>
+          <a:solidFill>
+            <a:srgbClr val="E4F4EE"/>
+          </a:solidFill>
+          <a:ln>
+            <a:noFill/>
+          </a:ln>
+          <a:effectLst/>
+        </p:spPr>
+        <p:style>
+          <a:lnRef idx="1">
+            <a:schemeClr val="accent1"/>
+          </a:lnRef>
+          <a:fillRef idx="3">
+            <a:schemeClr val="accent1"/>
+          </a:fillRef>
+          <a:effectRef idx="2">
+            <a:schemeClr val="accent1"/>
+          </a:effectRef>
+          <a:fontRef idx="minor">
+            <a:schemeClr val="lt1"/>
+          </a:fontRef>
+        </p:style>
+        <p:txBody>
+          <a:bodyPr rtlCol="0" anchor="ctr"/>
+          <a:lstStyle/>
+          <a:p/>
+        </p:txBody>
+      </p:sp>
+      <p:sp>
+        <p:nvSpPr>
+          <p:cNvPr id="36" name="OnthulTxt 8"/>
+          <p:cNvSpPr txBox="1"/>
+          <p:nvPr/>
+        </p:nvSpPr>
+        <p:spPr>
+          <a:xfrm>
+            <a:off x="566928" y="6144768"/>
+            <a:ext cx="2489454" cy="237744"/>
+          </a:xfrm>
+          <a:prstGeom prst="rect">
+            <a:avLst/>
+          </a:prstGeom>
+          <a:noFill/>
+        </p:spPr>
+        <p:txBody>
+          <a:bodyPr wrap="square" anchor="ctr" lIns="45720" rIns="45720" tIns="27432" bIns="27432">
+            <a:normAutofit/>
+          </a:bodyPr>
+          <a:lstStyle/>
+          <a:p>
+            <a:pPr algn="l"/>
+            <a:r>
+              <a:rPr sz="850" b="1">
+                <a:solidFill>
+                  <a:srgbClr val="157355"/>
+                </a:solidFill>
+                <a:latin typeface="Inter"/>
+              </a:rPr>
+              <a:t>cambia de plato y de fórmula</a:t>
+            </a:r>
+          </a:p>
+        </p:txBody>
+      </p:sp>
+      <p:sp>
+        <p:nvSpPr>
+          <p:cNvPr id="37" name="Tarjeta 9"/>
+          <p:cNvSpPr/>
+          <p:nvPr/>
+        </p:nvSpPr>
+        <p:spPr>
+          <a:xfrm>
+            <a:off x="3312414" y="5266944"/>
+            <a:ext cx="2708910" cy="1170432"/>
+          </a:xfrm>
+          <a:prstGeom prst="roundRect">
+            <a:avLst>
+              <a:gd name="adj" fmla="val 6000"/>
+            </a:avLst>
+          </a:prstGeom>
+          <a:solidFill>
+            <a:srgbClr val="FFFFFF"/>
+          </a:solidFill>
+          <a:ln w="12700">
+            <a:solidFill>
+              <a:srgbClr val="E4E3DE"/>
+            </a:solidFill>
+          </a:ln>
+          <a:effectLst/>
+        </p:spPr>
+        <p:style>
+          <a:lnRef idx="1">
+            <a:schemeClr val="accent1"/>
+          </a:lnRef>
+          <a:fillRef idx="3">
+            <a:schemeClr val="accent1"/>
+          </a:fillRef>
+          <a:effectRef idx="2">
+            <a:schemeClr val="accent1"/>
+          </a:effectRef>
+          <a:fontRef idx="minor">
+            <a:schemeClr val="lt1"/>
+          </a:fontRef>
+        </p:style>
+        <p:txBody>
+          <a:bodyPr rtlCol="0" anchor="ctr"/>
+          <a:lstStyle/>
+          <a:p/>
+        </p:txBody>
+      </p:sp>
+      <p:sp>
+        <p:nvSpPr>
+          <p:cNvPr id="38" name="TarjetaTxt 9"/>
+          <p:cNvSpPr txBox="1"/>
+          <p:nvPr/>
+        </p:nvSpPr>
+        <p:spPr>
+          <a:xfrm>
+            <a:off x="3403854" y="5321808"/>
+            <a:ext cx="2526030" cy="859536"/>
+          </a:xfrm>
+          <a:prstGeom prst="rect">
+            <a:avLst/>
+          </a:prstGeom>
+          <a:noFill/>
+        </p:spPr>
+        <p:txBody>
+          <a:bodyPr wrap="square" anchor="t" lIns="45720" rIns="45720" tIns="27432" bIns="27432">
+            <a:normAutofit/>
+          </a:bodyPr>
+          <a:lstStyle/>
+          <a:p>
+            <a:pPr algn="l"/>
+            <a:r>
+              <a:rPr sz="1100" b="1">
+                <a:solidFill>
+                  <a:srgbClr val="157355"/>
+                </a:solidFill>
+                <a:latin typeface="Bricolage Grotesque"/>
+              </a:rPr>
+              <a:t>El camarero</a:t>
+            </a:r>
+          </a:p>
+          <a:p>
+            <a:pPr algn="l"/>
+            <a:r>
+              <a:rPr sz="1000">
+                <a:solidFill>
+                  <a:srgbClr val="20242E"/>
+                </a:solidFill>
+                <a:latin typeface="Inter"/>
+              </a:rPr>
+              <a:t>Hoy no hacemos mole.</a:t>
+            </a:r>
+          </a:p>
+        </p:txBody>
+      </p:sp>
+      <p:sp>
+        <p:nvSpPr>
+          <p:cNvPr id="39" name="Onthul 9"/>
+          <p:cNvSpPr/>
+          <p:nvPr/>
+        </p:nvSpPr>
+        <p:spPr>
+          <a:xfrm>
+            <a:off x="3403854" y="6144768"/>
+            <a:ext cx="2526030" cy="237744"/>
+          </a:xfrm>
+          <a:prstGeom prst="roundRect">
+            <a:avLst>
+              <a:gd name="adj" fmla="val 20000"/>
+            </a:avLst>
+          </a:prstGeom>
+          <a:solidFill>
+            <a:srgbClr val="E4F4EE"/>
+          </a:solidFill>
+          <a:ln>
+            <a:noFill/>
+          </a:ln>
+          <a:effectLst/>
+        </p:spPr>
+        <p:style>
+          <a:lnRef idx="1">
+            <a:schemeClr val="accent1"/>
+          </a:lnRef>
+          <a:fillRef idx="3">
+            <a:schemeClr val="accent1"/>
+          </a:fillRef>
+          <a:effectRef idx="2">
+            <a:schemeClr val="accent1"/>
+          </a:effectRef>
+          <a:fontRef idx="minor">
+            <a:schemeClr val="lt1"/>
+          </a:fontRef>
+        </p:style>
+        <p:txBody>
+          <a:bodyPr rtlCol="0" anchor="ctr"/>
+          <a:lstStyle/>
+          <a:p/>
+        </p:txBody>
+      </p:sp>
+      <p:sp>
+        <p:nvSpPr>
+          <p:cNvPr id="40" name="OnthulTxt 9"/>
+          <p:cNvSpPr txBox="1"/>
+          <p:nvPr/>
+        </p:nvSpPr>
+        <p:spPr>
+          <a:xfrm>
+            <a:off x="3422142" y="6144768"/>
+            <a:ext cx="2489454" cy="237744"/>
+          </a:xfrm>
+          <a:prstGeom prst="rect">
+            <a:avLst/>
+          </a:prstGeom>
+          <a:noFill/>
+        </p:spPr>
+        <p:txBody>
+          <a:bodyPr wrap="square" anchor="ctr" lIns="45720" rIns="45720" tIns="27432" bIns="27432">
+            <a:normAutofit/>
+          </a:bodyPr>
+          <a:lstStyle/>
+          <a:p>
+            <a:pPr algn="l"/>
+            <a:r>
+              <a:rPr sz="850" b="1">
+                <a:solidFill>
+                  <a:srgbClr val="157355"/>
+                </a:solidFill>
+                <a:latin typeface="Inter"/>
+              </a:rPr>
+              <a:t>cambia de plato y de fórmula</a:t>
+            </a:r>
+          </a:p>
+        </p:txBody>
+      </p:sp>
+      <p:sp>
+        <p:nvSpPr>
+          <p:cNvPr id="41" name="Tarjeta 10"/>
+          <p:cNvSpPr/>
+          <p:nvPr/>
+        </p:nvSpPr>
+        <p:spPr>
+          <a:xfrm>
+            <a:off x="6167628" y="5266944"/>
+            <a:ext cx="2708910" cy="1170432"/>
+          </a:xfrm>
+          <a:prstGeom prst="roundRect">
+            <a:avLst>
+              <a:gd name="adj" fmla="val 6000"/>
+            </a:avLst>
+          </a:prstGeom>
+          <a:solidFill>
+            <a:srgbClr val="FFFFFF"/>
+          </a:solidFill>
+          <a:ln w="12700">
+            <a:solidFill>
+              <a:srgbClr val="E4E3DE"/>
+            </a:solidFill>
+          </a:ln>
+          <a:effectLst/>
+        </p:spPr>
+        <p:style>
+          <a:lnRef idx="1">
+            <a:schemeClr val="accent1"/>
+          </a:lnRef>
+          <a:fillRef idx="3">
+            <a:schemeClr val="accent1"/>
+          </a:fillRef>
+          <a:effectRef idx="2">
+            <a:schemeClr val="accent1"/>
+          </a:effectRef>
+          <a:fontRef idx="minor">
+            <a:schemeClr val="lt1"/>
+          </a:fontRef>
+        </p:style>
+        <p:txBody>
+          <a:bodyPr rtlCol="0" anchor="ctr"/>
+          <a:lstStyle/>
+          <a:p/>
+        </p:txBody>
+      </p:sp>
+      <p:sp>
+        <p:nvSpPr>
+          <p:cNvPr id="42" name="TarjetaTxt 10"/>
+          <p:cNvSpPr txBox="1"/>
+          <p:nvPr/>
+        </p:nvSpPr>
+        <p:spPr>
+          <a:xfrm>
+            <a:off x="6259068" y="5321808"/>
+            <a:ext cx="2526030" cy="859536"/>
+          </a:xfrm>
+          <a:prstGeom prst="rect">
+            <a:avLst/>
+          </a:prstGeom>
+          <a:noFill/>
+        </p:spPr>
+        <p:txBody>
+          <a:bodyPr wrap="square" anchor="t" lIns="45720" rIns="45720" tIns="27432" bIns="27432">
+            <a:normAutofit/>
+          </a:bodyPr>
+          <a:lstStyle/>
+          <a:p>
+            <a:pPr algn="l"/>
+            <a:r>
+              <a:rPr sz="1100" b="1">
+                <a:solidFill>
+                  <a:srgbClr val="157355"/>
+                </a:solidFill>
+                <a:latin typeface="Bricolage Grotesque"/>
+              </a:rPr>
+              <a:t>El camarero</a:t>
+            </a:r>
+          </a:p>
+          <a:p>
+            <a:pPr algn="l"/>
+            <a:r>
+              <a:rPr sz="1000">
+                <a:solidFill>
+                  <a:srgbClr val="20242E"/>
+                </a:solidFill>
+                <a:latin typeface="Inter"/>
+              </a:rPr>
+              <a:t>La sopa está fría.</a:t>
+            </a:r>
+          </a:p>
+        </p:txBody>
+      </p:sp>
+      <p:sp>
+        <p:nvSpPr>
+          <p:cNvPr id="43" name="Onthul 10"/>
+          <p:cNvSpPr/>
+          <p:nvPr/>
+        </p:nvSpPr>
+        <p:spPr>
+          <a:xfrm>
+            <a:off x="6259068" y="6144768"/>
+            <a:ext cx="2526030" cy="237744"/>
+          </a:xfrm>
+          <a:prstGeom prst="roundRect">
+            <a:avLst>
+              <a:gd name="adj" fmla="val 20000"/>
+            </a:avLst>
+          </a:prstGeom>
+          <a:solidFill>
+            <a:srgbClr val="E4F4EE"/>
+          </a:solidFill>
+          <a:ln>
+            <a:noFill/>
+          </a:ln>
+          <a:effectLst/>
+        </p:spPr>
+        <p:style>
+          <a:lnRef idx="1">
+            <a:schemeClr val="accent1"/>
+          </a:lnRef>
+          <a:fillRef idx="3">
+            <a:schemeClr val="accent1"/>
+          </a:fillRef>
+          <a:effectRef idx="2">
+            <a:schemeClr val="accent1"/>
+          </a:effectRef>
+          <a:fontRef idx="minor">
+            <a:schemeClr val="lt1"/>
+          </a:fontRef>
+        </p:style>
+        <p:txBody>
+          <a:bodyPr rtlCol="0" anchor="ctr"/>
+          <a:lstStyle/>
+          <a:p/>
+        </p:txBody>
+      </p:sp>
+      <p:sp>
+        <p:nvSpPr>
+          <p:cNvPr id="44" name="OnthulTxt 10"/>
+          <p:cNvSpPr txBox="1"/>
+          <p:nvPr/>
+        </p:nvSpPr>
+        <p:spPr>
+          <a:xfrm>
+            <a:off x="6277356" y="6144768"/>
+            <a:ext cx="2489454" cy="237744"/>
+          </a:xfrm>
+          <a:prstGeom prst="rect">
+            <a:avLst/>
+          </a:prstGeom>
+          <a:noFill/>
+        </p:spPr>
+        <p:txBody>
+          <a:bodyPr wrap="square" anchor="ctr" lIns="45720" rIns="45720" tIns="27432" bIns="27432">
+            <a:normAutofit/>
+          </a:bodyPr>
+          <a:lstStyle/>
+          <a:p>
+            <a:pPr algn="l"/>
+            <a:r>
+              <a:rPr sz="850" b="1">
+                <a:solidFill>
+                  <a:srgbClr val="157355"/>
+                </a:solidFill>
+                <a:latin typeface="Inter"/>
+              </a:rPr>
+              <a:t>cambia de plato y de fórmula</a:t>
+            </a:r>
+          </a:p>
+        </p:txBody>
+      </p:sp>
+    </p:spTree>
+  </p:cSld>
+  <p:clrMapOvr>
+    <a:masterClrMapping/>
+  </p:clrMapOvr>
+  <p:timing>
+    <p:tnLst>
+      <p:par>
+        <p:cTn id="1" dur="indefinite" restart="never" nodeType="tmRoot">
+          <p:childTnLst>
+            <p:seq concurrent="1" nextAc="seek">
+              <p:cTn id="2" dur="indefinite" nodeType="mainSeq">
+                <p:childTnLst>
+                  <p:par>
+                    <p:cTn id="5" fill="hold">
+                      <p:stCondLst>
+                        <p:cond delay="indefinite"/>
+                      </p:stCondLst>
+                      <p:childTnLst>
+                        <p:par>
+                          <p:cTn id="6" fill="hold">
+                            <p:stCondLst>
+                              <p:cond delay="0"/>
+                            </p:stCondLst>
+                            <p:childTnLst>
+                              <p:par>
+                                <p:cTn id="7" presetID="10" presetClass="entr" presetSubtype="0" fill="hold" grpId="0" nodeType="clickEffect">
+                                  <p:stCondLst>
+                                    <p:cond delay="0"/>
+                                  </p:stCondLst>
+                                  <p:childTnLst>
+                                    <p:set>
+                                      <p:cBhvr>
+                                        <p:cTn id="8" dur="1" fill="hold">
+                                          <p:stCondLst>
+                                            <p:cond delay="0"/>
+                                          </p:stCondLst>
+                                        </p:cTn>
+                                        <p:tgtEl>
+                                          <p:spTgt spid="23"/>
+                                        </p:tgtEl>
+                                        <p:attrNameLst>
+                                          <p:attrName>style.visibility</p:attrName>
+                                        </p:attrNameLst>
+                                      </p:cBhvr>
+                                      <p:to>
+                                        <p:strVal val="visible"/>
+                                      </p:to>
+                                    </p:set>
+                                    <p:animEffect transition="in" filter="fade">
+                                      <p:cBhvr>
+                                        <p:cTn id="9" dur="500"/>
+                                        <p:tgtEl>
+                                          <p:spTgt spid="23"/>
+                                        </p:tgtEl>
+                                      </p:cBhvr>
+                                    </p:animEffect>
+                                  </p:childTnLst>
+                                </p:cTn>
+                              </p:par>
+                            </p:childTnLst>
+                          </p:cTn>
+                        </p:par>
+                      </p:childTnLst>
+                    </p:cTn>
+                  </p:par>
+                  <p:par>
+                    <p:cTn id="10" fill="hold">
+                      <p:stCondLst>
+                        <p:cond delay="indefinite"/>
+                      </p:stCondLst>
+                      <p:childTnLst>
+                        <p:par>
+                          <p:cTn id="11" fill="hold">
+                            <p:stCondLst>
+                              <p:cond delay="0"/>
+                            </p:stCondLst>
+                            <p:childTnLst>
+                              <p:par>
+                                <p:cTn id="12" presetID="10" presetClass="entr" presetSubtype="0" fill="hold" grpId="0" nodeType="clickEffect">
+                                  <p:stCondLst>
+                                    <p:cond delay="0"/>
+                                  </p:stCondLst>
+                                  <p:childTnLst>
+                                    <p:set>
+                                      <p:cBhvr>
+                                        <p:cTn id="13" dur="1" fill="hold">
+                                          <p:stCondLst>
+                                            <p:cond delay="0"/>
+                                          </p:stCondLst>
+                                        </p:cTn>
+                                        <p:tgtEl>
+                                          <p:spTgt spid="24"/>
+                                        </p:tgtEl>
+                                        <p:attrNameLst>
+                                          <p:attrName>style.visibility</p:attrName>
+                                        </p:attrNameLst>
+                                      </p:cBhvr>
+                                      <p:to>
+                                        <p:strVal val="visible"/>
+                                      </p:to>
+                                    </p:set>
+                                    <p:animEffect transition="in" filter="fade">
+                                      <p:cBhvr>
+                                        <p:cTn id="14" dur="500"/>
+                                        <p:tgtEl>
+                                          <p:spTgt spid="24"/>
+                                        </p:tgtEl>
+                                      </p:cBhvr>
+                                    </p:animEffect>
+                                  </p:childTnLst>
+                                </p:cTn>
+                              </p:par>
+                            </p:childTnLst>
+                          </p:cTn>
+                        </p:par>
+                      </p:childTnLst>
+                    </p:cTn>
+                  </p:par>
+                  <p:par>
+                    <p:cTn id="15" fill="hold">
+                      <p:stCondLst>
+                        <p:cond delay="indefinite"/>
+                      </p:stCondLst>
+                      <p:childTnLst>
+                        <p:par>
+                          <p:cTn id="16" fill="hold">
+                            <p:stCondLst>
+                              <p:cond delay="0"/>
+                            </p:stCondLst>
+                            <p:childTnLst>
+                              <p:par>
+                                <p:cTn id="17" presetID="10" presetClass="entr" presetSubtype="0" fill="hold" grpId="0" nodeType="clickEffect">
+                                  <p:stCondLst>
+                                    <p:cond delay="0"/>
+                                  </p:stCondLst>
+                                  <p:childTnLst>
+                                    <p:set>
+                                      <p:cBhvr>
+                                        <p:cTn id="18" dur="1" fill="hold">
+                                          <p:stCondLst>
+                                            <p:cond delay="0"/>
+                                          </p:stCondLst>
+                                        </p:cTn>
+                                        <p:tgtEl>
+                                          <p:spTgt spid="27"/>
+                                        </p:tgtEl>
+                                        <p:attrNameLst>
+                                          <p:attrName>style.visibility</p:attrName>
+                                        </p:attrNameLst>
+                                      </p:cBhvr>
+                                      <p:to>
+                                        <p:strVal val="visible"/>
+                                      </p:to>
+                                    </p:set>
+                                    <p:animEffect transition="in" filter="fade">
+                                      <p:cBhvr>
+                                        <p:cTn id="19" dur="500"/>
+                                        <p:tgtEl>
+                                          <p:spTgt spid="27"/>
+                                        </p:tgtEl>
+                                      </p:cBhvr>
+                                    </p:animEffect>
+                                  </p:childTnLst>
+                                </p:cTn>
+                              </p:par>
+                            </p:childTnLst>
+                          </p:cTn>
+                        </p:par>
+                      </p:childTnLst>
+                    </p:cTn>
+                  </p:par>
+                  <p:par>
+                    <p:cTn id="20" fill="hold">
+                      <p:stCondLst>
+                        <p:cond delay="indefinite"/>
+                      </p:stCondLst>
+                      <p:childTnLst>
+                        <p:par>
+                          <p:cTn id="21" fill="hold">
+                            <p:stCondLst>
+                              <p:cond delay="0"/>
+                            </p:stCondLst>
+                            <p:childTnLst>
+                              <p:par>
+                                <p:cTn id="22" presetID="10" presetClass="entr" presetSubtype="0" fill="hold" grpId="0" nodeType="clickEffect">
+                                  <p:stCondLst>
+                                    <p:cond delay="0"/>
+                                  </p:stCondLst>
+                                  <p:childTnLst>
+                                    <p:set>
+                                      <p:cBhvr>
+                                        <p:cTn id="23" dur="1" fill="hold">
+                                          <p:stCondLst>
+                                            <p:cond delay="0"/>
+                                          </p:stCondLst>
+                                        </p:cTn>
+                                        <p:tgtEl>
+                                          <p:spTgt spid="28"/>
+                                        </p:tgtEl>
+                                        <p:attrNameLst>
+                                          <p:attrName>style.visibility</p:attrName>
+                                        </p:attrNameLst>
+                                      </p:cBhvr>
+                                      <p:to>
+                                        <p:strVal val="visible"/>
+                                      </p:to>
+                                    </p:set>
+                                    <p:animEffect transition="in" filter="fade">
+                                      <p:cBhvr>
+                                        <p:cTn id="24" dur="500"/>
+                                        <p:tgtEl>
+                                          <p:spTgt spid="28"/>
+                                        </p:tgtEl>
+                                      </p:cBhvr>
+                                    </p:animEffect>
+                                  </p:childTnLst>
+                                </p:cTn>
+                              </p:par>
+                            </p:childTnLst>
+                          </p:cTn>
+                        </p:par>
+                      </p:childTnLst>
+                    </p:cTn>
+                  </p:par>
+                  <p:par>
+                    <p:cTn id="25" fill="hold">
+                      <p:stCondLst>
+                        <p:cond delay="indefinite"/>
+                      </p:stCondLst>
+                      <p:childTnLst>
+                        <p:par>
+                          <p:cTn id="26" fill="hold">
+                            <p:stCondLst>
+                              <p:cond delay="0"/>
+                            </p:stCondLst>
+                            <p:childTnLst>
+                              <p:par>
+                                <p:cTn id="27" presetID="10" presetClass="entr" presetSubtype="0" fill="hold" grpId="0" nodeType="clickEffect">
+                                  <p:stCondLst>
+                                    <p:cond delay="0"/>
+                                  </p:stCondLst>
+                                  <p:childTnLst>
+                                    <p:set>
+                                      <p:cBhvr>
+                                        <p:cTn id="28" dur="1" fill="hold">
+                                          <p:stCondLst>
+                                            <p:cond delay="0"/>
+                                          </p:stCondLst>
+                                        </p:cTn>
+                                        <p:tgtEl>
+                                          <p:spTgt spid="31"/>
+                                        </p:tgtEl>
+                                        <p:attrNameLst>
+                                          <p:attrName>style.visibility</p:attrName>
+                                        </p:attrNameLst>
+                                      </p:cBhvr>
+                                      <p:to>
+                                        <p:strVal val="visible"/>
+                                      </p:to>
+                                    </p:set>
+                                    <p:animEffect transition="in" filter="fade">
+                                      <p:cBhvr>
+                                        <p:cTn id="29" dur="500"/>
+                                        <p:tgtEl>
+                                          <p:spTgt spid="31"/>
+                                        </p:tgtEl>
+                                      </p:cBhvr>
+                                    </p:animEffect>
+                                  </p:childTnLst>
+                                </p:cTn>
+                              </p:par>
+                            </p:childTnLst>
+                          </p:cTn>
+                        </p:par>
+                      </p:childTnLst>
+                    </p:cTn>
+                  </p:par>
+                  <p:par>
+                    <p:cTn id="30" fill="hold">
+                      <p:stCondLst>
+                        <p:cond delay="indefinite"/>
+                      </p:stCondLst>
+                      <p:childTnLst>
+                        <p:par>
+                          <p:cTn id="31" fill="hold">
+                            <p:stCondLst>
+                              <p:cond delay="0"/>
+                            </p:stCondLst>
+                            <p:childTnLst>
+                              <p:par>
+                                <p:cTn id="32" presetID="10" presetClass="entr" presetSubtype="0" fill="hold" grpId="0" nodeType="clickEffect">
+                                  <p:stCondLst>
+                                    <p:cond delay="0"/>
+                                  </p:stCondLst>
+                                  <p:childTnLst>
+                                    <p:set>
+                                      <p:cBhvr>
+                                        <p:cTn id="33" dur="1" fill="hold">
+                                          <p:stCondLst>
+                                            <p:cond delay="0"/>
+                                          </p:stCondLst>
+                                        </p:cTn>
+                                        <p:tgtEl>
+                                          <p:spTgt spid="32"/>
+                                        </p:tgtEl>
+                                        <p:attrNameLst>
+                                          <p:attrName>style.visibility</p:attrName>
+                                        </p:attrNameLst>
+                                      </p:cBhvr>
+                                      <p:to>
+                                        <p:strVal val="visible"/>
+                                      </p:to>
+                                    </p:set>
+                                    <p:animEffect transition="in" filter="fade">
+                                      <p:cBhvr>
+                                        <p:cTn id="34" dur="500"/>
+                                        <p:tgtEl>
+                                          <p:spTgt spid="32"/>
+                                        </p:tgtEl>
+                                      </p:cBhvr>
+                                    </p:animEffect>
+                                  </p:childTnLst>
+                                </p:cTn>
+                              </p:par>
+                            </p:childTnLst>
+                          </p:cTn>
+                        </p:par>
+                      </p:childTnLst>
+                    </p:cTn>
+                  </p:par>
+                  <p:par>
+                    <p:cTn id="35" fill="hold">
+                      <p:stCondLst>
+                        <p:cond delay="indefinite"/>
+                      </p:stCondLst>
+                      <p:childTnLst>
+                        <p:par>
+                          <p:cTn id="36" fill="hold">
+                            <p:stCondLst>
+                              <p:cond delay="0"/>
+                            </p:stCondLst>
+                            <p:childTnLst>
+                              <p:par>
+                                <p:cTn id="37" presetID="10" presetClass="entr" presetSubtype="0" fill="hold" grpId="0" nodeType="clickEffect">
+                                  <p:stCondLst>
+                                    <p:cond delay="0"/>
+                                  </p:stCondLst>
+                                  <p:childTnLst>
+                                    <p:set>
+                                      <p:cBhvr>
+                                        <p:cTn id="38" dur="1" fill="hold">
+                                          <p:stCondLst>
+                                            <p:cond delay="0"/>
+                                          </p:stCondLst>
+                                        </p:cTn>
+                                        <p:tgtEl>
+                                          <p:spTgt spid="35"/>
+                                        </p:tgtEl>
+                                        <p:attrNameLst>
+                                          <p:attrName>style.visibility</p:attrName>
+                                        </p:attrNameLst>
+                                      </p:cBhvr>
+                                      <p:to>
+                                        <p:strVal val="visible"/>
+                                      </p:to>
+                                    </p:set>
+                                    <p:animEffect transition="in" filter="fade">
+                                      <p:cBhvr>
+                                        <p:cTn id="39" dur="500"/>
+                                        <p:tgtEl>
+                                          <p:spTgt spid="35"/>
+                                        </p:tgtEl>
+                                      </p:cBhvr>
+                                    </p:animEffect>
+                                  </p:childTnLst>
+                                </p:cTn>
+                              </p:par>
+                            </p:childTnLst>
+                          </p:cTn>
+                        </p:par>
+                      </p:childTnLst>
+                    </p:cTn>
+                  </p:par>
+                  <p:par>
+                    <p:cTn id="40" fill="hold">
+                      <p:stCondLst>
+                        <p:cond delay="indefinite"/>
+                      </p:stCondLst>
+                      <p:childTnLst>
+                        <p:par>
+                          <p:cTn id="41" fill="hold">
+                            <p:stCondLst>
+                              <p:cond delay="0"/>
+                            </p:stCondLst>
+                            <p:childTnLst>
+                              <p:par>
+                                <p:cTn id="42" presetID="10" presetClass="entr" presetSubtype="0" fill="hold" grpId="0" nodeType="clickEffect">
+                                  <p:stCondLst>
+                                    <p:cond delay="0"/>
+                                  </p:stCondLst>
+                                  <p:childTnLst>
+                                    <p:set>
+                                      <p:cBhvr>
+                                        <p:cTn id="43" dur="1" fill="hold">
+                                          <p:stCondLst>
+                                            <p:cond delay="0"/>
+                                          </p:stCondLst>
+                                        </p:cTn>
+                                        <p:tgtEl>
+                                          <p:spTgt spid="36"/>
+                                        </p:tgtEl>
+                                        <p:attrNameLst>
+                                          <p:attrName>style.visibility</p:attrName>
+                                        </p:attrNameLst>
+                                      </p:cBhvr>
+                                      <p:to>
+                                        <p:strVal val="visible"/>
+                                      </p:to>
+                                    </p:set>
+                                    <p:animEffect transition="in" filter="fade">
+                                      <p:cBhvr>
+                                        <p:cTn id="44" dur="500"/>
+                                        <p:tgtEl>
+                                          <p:spTgt spid="36"/>
+                                        </p:tgtEl>
+                                      </p:cBhvr>
+                                    </p:animEffect>
+                                  </p:childTnLst>
+                                </p:cTn>
+                              </p:par>
+                            </p:childTnLst>
+                          </p:cTn>
+                        </p:par>
+                      </p:childTnLst>
+                    </p:cTn>
+                  </p:par>
+                  <p:par>
+                    <p:cTn id="45" fill="hold">
+                      <p:stCondLst>
+                        <p:cond delay="indefinite"/>
+                      </p:stCondLst>
+                      <p:childTnLst>
+                        <p:par>
+                          <p:cTn id="46" fill="hold">
+                            <p:stCondLst>
+                              <p:cond delay="0"/>
+                            </p:stCondLst>
+                            <p:childTnLst>
+                              <p:par>
+                                <p:cTn id="47" presetID="10" presetClass="entr" presetSubtype="0" fill="hold" grpId="0" nodeType="clickEffect">
+                                  <p:stCondLst>
+                                    <p:cond delay="0"/>
+                                  </p:stCondLst>
+                                  <p:childTnLst>
+                                    <p:set>
+                                      <p:cBhvr>
+                                        <p:cTn id="48" dur="1" fill="hold">
+                                          <p:stCondLst>
+                                            <p:cond delay="0"/>
+                                          </p:stCondLst>
+                                        </p:cTn>
+                                        <p:tgtEl>
+                                          <p:spTgt spid="39"/>
+                                        </p:tgtEl>
+                                        <p:attrNameLst>
+                                          <p:attrName>style.visibility</p:attrName>
+                                        </p:attrNameLst>
+                                      </p:cBhvr>
+                                      <p:to>
+                                        <p:strVal val="visible"/>
+                                      </p:to>
+                                    </p:set>
+                                    <p:animEffect transition="in" filter="fade">
+                                      <p:cBhvr>
+                                        <p:cTn id="49" dur="500"/>
+                                        <p:tgtEl>
+                                          <p:spTgt spid="39"/>
+                                        </p:tgtEl>
+                                      </p:cBhvr>
+                                    </p:animEffect>
+                                  </p:childTnLst>
+                                </p:cTn>
+                              </p:par>
+                            </p:childTnLst>
+                          </p:cTn>
+                        </p:par>
+                      </p:childTnLst>
+                    </p:cTn>
+                  </p:par>
+                  <p:par>
+                    <p:cTn id="50" fill="hold">
+                      <p:stCondLst>
+                        <p:cond delay="indefinite"/>
+                      </p:stCondLst>
+                      <p:childTnLst>
+                        <p:par>
+                          <p:cTn id="51" fill="hold">
+                            <p:stCondLst>
+                              <p:cond delay="0"/>
+                            </p:stCondLst>
+                            <p:childTnLst>
+                              <p:par>
+                                <p:cTn id="52" presetID="10" presetClass="entr" presetSubtype="0" fill="hold" grpId="0" nodeType="clickEffect">
+                                  <p:stCondLst>
+                                    <p:cond delay="0"/>
+                                  </p:stCondLst>
+                                  <p:childTnLst>
+                                    <p:set>
+                                      <p:cBhvr>
+                                        <p:cTn id="53" dur="1" fill="hold">
+                                          <p:stCondLst>
+                                            <p:cond delay="0"/>
+                                          </p:stCondLst>
+                                        </p:cTn>
+                                        <p:tgtEl>
+                                          <p:spTgt spid="40"/>
+                                        </p:tgtEl>
+                                        <p:attrNameLst>
+                                          <p:attrName>style.visibility</p:attrName>
+                                        </p:attrNameLst>
+                                      </p:cBhvr>
+                                      <p:to>
+                                        <p:strVal val="visible"/>
+                                      </p:to>
+                                    </p:set>
+                                    <p:animEffect transition="in" filter="fade">
+                                      <p:cBhvr>
+                                        <p:cTn id="54" dur="500"/>
+                                        <p:tgtEl>
+                                          <p:spTgt spid="40"/>
+                                        </p:tgtEl>
+                                      </p:cBhvr>
+                                    </p:animEffect>
+                                  </p:childTnLst>
+                                </p:cTn>
+                              </p:par>
+                            </p:childTnLst>
+                          </p:cTn>
+                        </p:par>
+                      </p:childTnLst>
+                    </p:cTn>
+                  </p:par>
+                  <p:par>
+                    <p:cTn id="55" fill="hold">
+                      <p:stCondLst>
+                        <p:cond delay="indefinite"/>
+                      </p:stCondLst>
+                      <p:childTnLst>
+                        <p:par>
+                          <p:cTn id="56" fill="hold">
+                            <p:stCondLst>
+                              <p:cond delay="0"/>
+                            </p:stCondLst>
+                            <p:childTnLst>
+                              <p:par>
+                                <p:cTn id="57" presetID="10" presetClass="entr" presetSubtype="0" fill="hold" grpId="0" nodeType="clickEffect">
+                                  <p:stCondLst>
+                                    <p:cond delay="0"/>
+                                  </p:stCondLst>
+                                  <p:childTnLst>
+                                    <p:set>
+                                      <p:cBhvr>
+                                        <p:cTn id="58" dur="1" fill="hold">
+                                          <p:stCondLst>
+                                            <p:cond delay="0"/>
+                                          </p:stCondLst>
+                                        </p:cTn>
+                                        <p:tgtEl>
+                                          <p:spTgt spid="43"/>
+                                        </p:tgtEl>
+                                        <p:attrNameLst>
+                                          <p:attrName>style.visibility</p:attrName>
+                                        </p:attrNameLst>
+                                      </p:cBhvr>
+                                      <p:to>
+                                        <p:strVal val="visible"/>
+                                      </p:to>
+                                    </p:set>
+                                    <p:animEffect transition="in" filter="fade">
+                                      <p:cBhvr>
+                                        <p:cTn id="59" dur="500"/>
+                                        <p:tgtEl>
+                                          <p:spTgt spid="43"/>
+                                        </p:tgtEl>
+                                      </p:cBhvr>
+                                    </p:animEffect>
+                                  </p:childTnLst>
+                                </p:cTn>
+                              </p:par>
+                            </p:childTnLst>
+                          </p:cTn>
+                        </p:par>
+                      </p:childTnLst>
+                    </p:cTn>
+                  </p:par>
+                  <p:par>
+                    <p:cTn id="60" fill="hold">
+                      <p:stCondLst>
+                        <p:cond delay="indefinite"/>
+                      </p:stCondLst>
+                      <p:childTnLst>
+                        <p:par>
+                          <p:cTn id="61" fill="hold">
+                            <p:stCondLst>
+                              <p:cond delay="0"/>
+                            </p:stCondLst>
+                            <p:childTnLst>
+                              <p:par>
+                                <p:cTn id="62" presetID="10" presetClass="entr" presetSubtype="0" fill="hold" grpId="0" nodeType="clickEffect">
+                                  <p:stCondLst>
+                                    <p:cond delay="0"/>
+                                  </p:stCondLst>
+                                  <p:childTnLst>
+                                    <p:set>
+                                      <p:cBhvr>
+                                        <p:cTn id="63" dur="1" fill="hold">
+                                          <p:stCondLst>
+                                            <p:cond delay="0"/>
+                                          </p:stCondLst>
+                                        </p:cTn>
+                                        <p:tgtEl>
+                                          <p:spTgt spid="44"/>
+                                        </p:tgtEl>
+                                        <p:attrNameLst>
+                                          <p:attrName>style.visibility</p:attrName>
+                                        </p:attrNameLst>
+                                      </p:cBhvr>
+                                      <p:to>
+                                        <p:strVal val="visible"/>
+                                      </p:to>
+                                    </p:set>
+                                    <p:animEffect transition="in" filter="fade">
+                                      <p:cBhvr>
+                                        <p:cTn id="64" dur="500"/>
+                                        <p:tgtEl>
+                                          <p:spTgt spid="44"/>
+                                        </p:tgtEl>
+                                      </p:cBhvr>
+                                    </p:animEffect>
+                                  </p:childTnLst>
+                                </p:cTn>
+                              </p:par>
+                            </p:childTnLst>
+                          </p:cTn>
+                        </p:par>
+                      </p:childTnLst>
+                    </p:cTn>
+                  </p:par>
+                </p:childTnLst>
+              </p:cTn>
+              <p:prevCondLst>
+                <p:cond evt="onPrev" delay="0">
+                  <p:tgtEl>
+                    <p:sldTgt/>
+                  </p:tgtEl>
+                </p:cond>
+              </p:prevCondLst>
+              <p:nextCondLst>
+                <p:cond evt="onNext" delay="0">
+                  <p:tgtEl>
+                    <p:sldTgt/>
+                  </p:tgtEl>
+                </p:cond>
+              </p:nextCondLst>
+            </p:seq>
+          </p:childTnLst>
+        </p:cTn>
+      </p:par>
+    </p:tnLst>
+  </p:timing>
+</p:sld>
+</file>
+
+<file path=ppt/slides/slide22.xml><?xml version="1.0" encoding="utf-8"?>
+<p:sld xmlns:a="http://schemas.openxmlformats.org/drawingml/2006/main" xmlns:p="http://schemas.openxmlformats.org/presentationml/2006/main" xmlns:r="http://schemas.openxmlformats.org/officeDocument/2006/relationships">
+  <p:cSld>
+    <p:spTree>
+      <p:nvGrpSpPr>
+        <p:cNvPr id="1" name=""/>
+        <p:cNvGrpSpPr/>
+        <p:nvPr/>
+      </p:nvGrpSpPr>
+      <p:grpSpPr/>
+      <p:sp>
+        <p:nvSpPr>
+          <p:cNvPr id="2" name="Fondo"/>
+          <p:cNvSpPr/>
+          <p:nvPr/>
+        </p:nvSpPr>
+        <p:spPr>
+          <a:xfrm>
+            <a:off x="0" y="0"/>
+            <a:ext cx="12191695" cy="6858000"/>
+          </a:xfrm>
+          <a:prstGeom prst="rect">
+            <a:avLst/>
+          </a:prstGeom>
+          <a:solidFill>
+            <a:srgbClr val="FCFBF8"/>
+          </a:solidFill>
+          <a:ln>
+            <a:noFill/>
+          </a:ln>
+          <a:effectLst/>
+        </p:spPr>
+        <p:style>
+          <a:lnRef idx="1">
+            <a:schemeClr val="accent1"/>
+          </a:lnRef>
+          <a:fillRef idx="3">
+            <a:schemeClr val="accent1"/>
+          </a:fillRef>
+          <a:effectRef idx="2">
+            <a:schemeClr val="accent1"/>
+          </a:effectRef>
+          <a:fontRef idx="minor">
+            <a:schemeClr val="lt1"/>
+          </a:fontRef>
+        </p:style>
+        <p:txBody>
+          <a:bodyPr rtlCol="0" anchor="ctr"/>
+          <a:lstStyle/>
+          <a:p/>
+        </p:txBody>
+      </p:sp>
+      <p:sp>
+        <p:nvSpPr>
+          <p:cNvPr id="3" name="Cabecera"/>
+          <p:cNvSpPr/>
+          <p:nvPr/>
+        </p:nvSpPr>
+        <p:spPr>
+          <a:xfrm>
+            <a:off x="0" y="0"/>
+            <a:ext cx="12191695" cy="1078992"/>
+          </a:xfrm>
+          <a:prstGeom prst="rect">
+            <a:avLst/>
+          </a:prstGeom>
+          <a:solidFill>
+            <a:srgbClr val="1E9E74"/>
+          </a:solidFill>
+          <a:ln>
+            <a:noFill/>
+          </a:ln>
+          <a:effectLst/>
+        </p:spPr>
+        <p:style>
+          <a:lnRef idx="1">
+            <a:schemeClr val="accent1"/>
+          </a:lnRef>
+          <a:fillRef idx="3">
+            <a:schemeClr val="accent1"/>
+          </a:fillRef>
+          <a:effectRef idx="2">
+            <a:schemeClr val="accent1"/>
+          </a:effectRef>
+          <a:fontRef idx="minor">
+            <a:schemeClr val="lt1"/>
+          </a:fontRef>
+        </p:style>
+        <p:txBody>
+          <a:bodyPr rtlCol="0" anchor="ctr"/>
+          <a:lstStyle/>
+          <a:p/>
+        </p:txBody>
+      </p:sp>
+      <p:sp>
+        <p:nvSpPr>
+          <p:cNvPr id="4" name="Chip"/>
+          <p:cNvSpPr/>
+          <p:nvPr/>
+        </p:nvSpPr>
+        <p:spPr>
+          <a:xfrm>
+            <a:off x="457200" y="182880"/>
+            <a:ext cx="3017520" cy="292608"/>
+          </a:xfrm>
+          <a:prstGeom prst="roundRect">
+            <a:avLst>
+              <a:gd name="adj" fmla="val 50000"/>
+            </a:avLst>
+          </a:prstGeom>
+          <a:solidFill>
+            <a:srgbClr val="FFFFFF"/>
+          </a:solidFill>
+          <a:ln>
+            <a:noFill/>
+          </a:ln>
+          <a:effectLst/>
+        </p:spPr>
+        <p:style>
+          <a:lnRef idx="1">
+            <a:schemeClr val="accent1"/>
+          </a:lnRef>
+          <a:fillRef idx="3">
+            <a:schemeClr val="accent1"/>
+          </a:fillRef>
+          <a:effectRef idx="2">
+            <a:schemeClr val="accent1"/>
+          </a:effectRef>
+          <a:fontRef idx="minor">
+            <a:schemeClr val="lt1"/>
+          </a:fontRef>
+        </p:style>
+        <p:txBody>
+          <a:bodyPr rtlCol="0" anchor="ctr"/>
+          <a:lstStyle/>
+          <a:p/>
+        </p:txBody>
+      </p:sp>
+      <p:sp>
+        <p:nvSpPr>
+          <p:cNvPr id="5" name="ChipTxt"/>
+          <p:cNvSpPr txBox="1"/>
+          <p:nvPr/>
+        </p:nvSpPr>
+        <p:spPr>
+          <a:xfrm>
+            <a:off x="457200" y="173736"/>
+            <a:ext cx="3017520" cy="310896"/>
+          </a:xfrm>
+          <a:prstGeom prst="rect">
+            <a:avLst/>
+          </a:prstGeom>
+          <a:noFill/>
+        </p:spPr>
+        <p:txBody>
+          <a:bodyPr wrap="square" anchor="ctr" lIns="45720" rIns="45720" tIns="27432" bIns="27432">
+            <a:normAutofit/>
+          </a:bodyPr>
+          <a:lstStyle/>
+          <a:p>
+            <a:pPr algn="ctr"/>
+            <a:r>
+              <a:rPr sz="950" b="1">
+                <a:solidFill>
+                  <a:srgbClr val="157355"/>
+                </a:solidFill>
+                <a:latin typeface="Inter"/>
+              </a:rPr>
+              <a:t>RETO 7 · PUZZEL &amp; ESCAPE</a:t>
+            </a:r>
+          </a:p>
+        </p:txBody>
+      </p:sp>
+      <p:sp>
+        <p:nvSpPr>
+          <p:cNvPr id="6" name="Titulo"/>
+          <p:cNvSpPr txBox="1"/>
+          <p:nvPr/>
+        </p:nvSpPr>
+        <p:spPr>
+          <a:xfrm>
+            <a:off x="457200" y="502920"/>
+            <a:ext cx="8412480" cy="475488"/>
+          </a:xfrm>
+          <a:prstGeom prst="rect">
+            <a:avLst/>
+          </a:prstGeom>
+          <a:noFill/>
+        </p:spPr>
+        <p:txBody>
+          <a:bodyPr wrap="square" anchor="t" lIns="45720" rIns="45720" tIns="27432" bIns="27432">
+            <a:normAutofit/>
+          </a:bodyPr>
+          <a:lstStyle/>
+          <a:p>
+            <a:pPr algn="l"/>
+            <a:r>
+              <a:rPr sz="2700" b="1">
+                <a:solidFill>
+                  <a:srgbClr val="FFFFFF"/>
+                </a:solidFill>
+                <a:latin typeface="Bricolage Grotesque"/>
+              </a:rPr>
+              <a:t>Cinco palabras para el mercado</a:t>
+            </a:r>
+          </a:p>
+        </p:txBody>
+      </p:sp>
+      <p:sp>
+        <p:nvSpPr>
+          <p:cNvPr id="7" name="Badges"/>
+          <p:cNvSpPr txBox="1"/>
+          <p:nvPr/>
+        </p:nvSpPr>
+        <p:spPr>
+          <a:xfrm>
+            <a:off x="9052560" y="256032"/>
+            <a:ext cx="2651760" cy="640080"/>
+          </a:xfrm>
+          <a:prstGeom prst="rect">
+            <a:avLst/>
+          </a:prstGeom>
+          <a:noFill/>
+        </p:spPr>
+        <p:txBody>
+          <a:bodyPr wrap="square" anchor="t" lIns="45720" rIns="45720" tIns="27432" bIns="27432">
+            <a:normAutofit/>
+          </a:bodyPr>
+          <a:lstStyle/>
+          <a:p>
+            <a:pPr algn="r"/>
+            <a:r>
+              <a:rPr sz="1000">
+                <a:solidFill>
+                  <a:srgbClr val="E4F4EE"/>
+                </a:solidFill>
+                <a:latin typeface="Inter"/>
+              </a:rPr>
+              <a:t>👥 En parejas</a:t>
+            </a:r>
+          </a:p>
+          <a:p>
+            <a:pPr algn="r"/>
+            <a:r>
+              <a:rPr sz="1000">
+                <a:solidFill>
+                  <a:srgbClr val="E4F4EE"/>
+                </a:solidFill>
+                <a:latin typeface="Inter"/>
+              </a:rPr>
+              <a:t>± 12 min · ★★★</a:t>
+            </a:r>
+          </a:p>
+        </p:txBody>
+      </p:sp>
+      <p:sp>
+        <p:nvSpPr>
+          <p:cNvPr id="8" name="Gancho"/>
+          <p:cNvSpPr txBox="1"/>
+          <p:nvPr/>
+        </p:nvSpPr>
+        <p:spPr>
+          <a:xfrm>
+            <a:off x="457200" y="1225296"/>
+            <a:ext cx="11274552" cy="566928"/>
+          </a:xfrm>
+          <a:prstGeom prst="rect">
+            <a:avLst/>
+          </a:prstGeom>
+          <a:noFill/>
+        </p:spPr>
+        <p:txBody>
+          <a:bodyPr wrap="square" anchor="t" lIns="45720" rIns="45720" tIns="27432" bIns="27432">
+            <a:normAutofit/>
+          </a:bodyPr>
+          <a:lstStyle/>
+          <a:p>
+            <a:pPr algn="l"/>
+            <a:r>
+              <a:rPr sz="1600" b="1">
+                <a:solidFill>
+                  <a:srgbClr val="157355"/>
+                </a:solidFill>
+                <a:latin typeface="Bricolage Grotesque"/>
+              </a:rPr>
+              <a:t>Quieres comprar algo cuyo nombre no sabes. Tienes cinco palabras.</a:t>
+            </a:r>
+          </a:p>
+          <a:p>
+            <a:pPr algn="l"/>
+            <a:r>
+              <a:rPr sz="1100" i="1">
+                <a:solidFill>
+                  <a:srgbClr val="6A6E78"/>
+                </a:solidFill>
+                <a:latin typeface="Inter"/>
+              </a:rPr>
+              <a:t>Je wil iets kopen waarvan je de naam niet kent. Je hebt vijf woorden.</a:t>
+            </a:r>
+          </a:p>
+        </p:txBody>
+      </p:sp>
+      <p:sp>
+        <p:nvSpPr>
+          <p:cNvPr id="9" name="ReglaCaja"/>
+          <p:cNvSpPr/>
+          <p:nvPr/>
+        </p:nvSpPr>
+        <p:spPr>
+          <a:xfrm>
+            <a:off x="457200" y="1847088"/>
+            <a:ext cx="11274552" cy="658368"/>
+          </a:xfrm>
+          <a:prstGeom prst="roundRect">
+            <a:avLst>
+              <a:gd name="adj" fmla="val 5000"/>
+            </a:avLst>
+          </a:prstGeom>
+          <a:solidFill>
+            <a:srgbClr val="FBF3D6"/>
+          </a:solidFill>
+          <a:ln>
+            <a:noFill/>
+          </a:ln>
+          <a:effectLst/>
+        </p:spPr>
+        <p:style>
+          <a:lnRef idx="1">
+            <a:schemeClr val="accent1"/>
+          </a:lnRef>
+          <a:fillRef idx="3">
+            <a:schemeClr val="accent1"/>
+          </a:fillRef>
+          <a:effectRef idx="2">
+            <a:schemeClr val="accent1"/>
+          </a:effectRef>
+          <a:fontRef idx="minor">
+            <a:schemeClr val="lt1"/>
+          </a:fontRef>
+        </p:style>
+        <p:txBody>
+          <a:bodyPr rtlCol="0" anchor="ctr"/>
+          <a:lstStyle/>
+          <a:p/>
+        </p:txBody>
+      </p:sp>
+      <p:sp>
+        <p:nvSpPr>
+          <p:cNvPr id="10" name="ReglaTxt"/>
+          <p:cNvSpPr txBox="1"/>
+          <p:nvPr/>
+        </p:nvSpPr>
+        <p:spPr>
+          <a:xfrm>
+            <a:off x="603504" y="1883664"/>
+            <a:ext cx="10972800" cy="585216"/>
+          </a:xfrm>
+          <a:prstGeom prst="rect">
+            <a:avLst/>
+          </a:prstGeom>
+          <a:noFill/>
+        </p:spPr>
+        <p:txBody>
+          <a:bodyPr wrap="square" anchor="t" lIns="45720" rIns="45720" tIns="27432" bIns="27432">
+            <a:normAutofit/>
+          </a:bodyPr>
+          <a:lstStyle/>
+          <a:p>
+            <a:pPr algn="l"/>
+            <a:r>
+              <a:rPr sz="850" b="1">
+                <a:solidFill>
+                  <a:srgbClr val="B7860B"/>
+                </a:solidFill>
+                <a:latin typeface="Inter"/>
+              </a:rPr>
+              <a:t>LA REGLA DEL RETO</a:t>
+            </a:r>
+          </a:p>
+          <a:p>
+            <a:pPr algn="l"/>
+            <a:r>
+              <a:rPr sz="1100">
+                <a:solidFill>
+                  <a:srgbClr val="20242E"/>
+                </a:solidFill>
+                <a:latin typeface="Inter"/>
+              </a:rPr>
+              <a:t>Vijf woorden per poging, gebaren mogen niet, en de naam van het product mag niet vallen — ook niet in het Nederlands of het Engels.</a:t>
+            </a:r>
+          </a:p>
+        </p:txBody>
+      </p:sp>
+      <p:sp>
+        <p:nvSpPr>
+          <p:cNvPr id="11" name="Tarjeta 0"/>
+          <p:cNvSpPr/>
+          <p:nvPr/>
+        </p:nvSpPr>
+        <p:spPr>
+          <a:xfrm>
+            <a:off x="457200" y="2670048"/>
+            <a:ext cx="2708910" cy="898398"/>
+          </a:xfrm>
+          <a:prstGeom prst="roundRect">
+            <a:avLst>
+              <a:gd name="adj" fmla="val 6000"/>
+            </a:avLst>
+          </a:prstGeom>
+          <a:solidFill>
+            <a:srgbClr val="FFFFFF"/>
+          </a:solidFill>
+          <a:ln w="12700">
+            <a:solidFill>
+              <a:srgbClr val="E4E3DE"/>
+            </a:solidFill>
+          </a:ln>
+          <a:effectLst/>
+        </p:spPr>
+        <p:style>
+          <a:lnRef idx="1">
+            <a:schemeClr val="accent1"/>
+          </a:lnRef>
+          <a:fillRef idx="3">
+            <a:schemeClr val="accent1"/>
+          </a:fillRef>
+          <a:effectRef idx="2">
+            <a:schemeClr val="accent1"/>
+          </a:effectRef>
+          <a:fontRef idx="minor">
+            <a:schemeClr val="lt1"/>
+          </a:fontRef>
+        </p:style>
+        <p:txBody>
+          <a:bodyPr rtlCol="0" anchor="ctr"/>
+          <a:lstStyle/>
+          <a:p/>
+        </p:txBody>
+      </p:sp>
+      <p:sp>
+        <p:nvSpPr>
+          <p:cNvPr id="12" name="TarjetaTxt 0"/>
+          <p:cNvSpPr txBox="1"/>
+          <p:nvPr/>
+        </p:nvSpPr>
+        <p:spPr>
+          <a:xfrm>
+            <a:off x="548640" y="2724912"/>
+            <a:ext cx="2526030" cy="587502"/>
+          </a:xfrm>
+          <a:prstGeom prst="rect">
+            <a:avLst/>
+          </a:prstGeom>
+          <a:noFill/>
+        </p:spPr>
+        <p:txBody>
+          <a:bodyPr wrap="square" anchor="t" lIns="45720" rIns="45720" tIns="27432" bIns="27432">
+            <a:normAutofit/>
+          </a:bodyPr>
+          <a:lstStyle/>
+          <a:p>
+            <a:pPr algn="l"/>
+            <a:r>
+              <a:rPr sz="1100" b="1">
+                <a:solidFill>
+                  <a:srgbClr val="157355"/>
+                </a:solidFill>
+                <a:latin typeface="Bricolage Grotesque"/>
+              </a:rPr>
+              <a:t>el aguacate</a:t>
+            </a:r>
+          </a:p>
+        </p:txBody>
+      </p:sp>
+      <p:sp>
+        <p:nvSpPr>
+          <p:cNvPr id="13" name="Onthul 0"/>
+          <p:cNvSpPr/>
+          <p:nvPr/>
+        </p:nvSpPr>
+        <p:spPr>
+          <a:xfrm>
+            <a:off x="548640" y="3275838"/>
+            <a:ext cx="2526030" cy="237744"/>
+          </a:xfrm>
+          <a:prstGeom prst="roundRect">
+            <a:avLst>
+              <a:gd name="adj" fmla="val 20000"/>
+            </a:avLst>
+          </a:prstGeom>
+          <a:solidFill>
+            <a:srgbClr val="E4F4EE"/>
+          </a:solidFill>
+          <a:ln>
+            <a:noFill/>
+          </a:ln>
+          <a:effectLst/>
+        </p:spPr>
+        <p:style>
+          <a:lnRef idx="1">
+            <a:schemeClr val="accent1"/>
+          </a:lnRef>
+          <a:fillRef idx="3">
+            <a:schemeClr val="accent1"/>
+          </a:fillRef>
+          <a:effectRef idx="2">
+            <a:schemeClr val="accent1"/>
+          </a:effectRef>
+          <a:fontRef idx="minor">
+            <a:schemeClr val="lt1"/>
+          </a:fontRef>
+        </p:style>
+        <p:txBody>
+          <a:bodyPr rtlCol="0" anchor="ctr"/>
+          <a:lstStyle/>
+          <a:p/>
+        </p:txBody>
+      </p:sp>
+      <p:sp>
+        <p:nvSpPr>
+          <p:cNvPr id="14" name="OnthulTxt 0"/>
+          <p:cNvSpPr txBox="1"/>
+          <p:nvPr/>
+        </p:nvSpPr>
+        <p:spPr>
+          <a:xfrm>
+            <a:off x="566928" y="3275838"/>
+            <a:ext cx="2489454" cy="237744"/>
+          </a:xfrm>
+          <a:prstGeom prst="rect">
+            <a:avLst/>
+          </a:prstGeom>
+          <a:noFill/>
+        </p:spPr>
+        <p:txBody>
+          <a:bodyPr wrap="square" anchor="ctr" lIns="45720" rIns="45720" tIns="27432" bIns="27432">
+            <a:normAutofit/>
+          </a:bodyPr>
+          <a:lstStyle/>
+          <a:p>
+            <a:pPr algn="l"/>
+            <a:r>
+              <a:rPr sz="850" b="1">
+                <a:solidFill>
+                  <a:srgbClr val="157355"/>
+                </a:solidFill>
+                <a:latin typeface="Inter"/>
+              </a:rPr>
+              <a:t>descrito ✓</a:t>
+            </a:r>
+          </a:p>
+        </p:txBody>
+      </p:sp>
+      <p:sp>
+        <p:nvSpPr>
+          <p:cNvPr id="15" name="Tarjeta 1"/>
+          <p:cNvSpPr/>
+          <p:nvPr/>
+        </p:nvSpPr>
+        <p:spPr>
+          <a:xfrm>
+            <a:off x="3312414" y="2670048"/>
+            <a:ext cx="2708910" cy="898398"/>
+          </a:xfrm>
+          <a:prstGeom prst="roundRect">
+            <a:avLst>
+              <a:gd name="adj" fmla="val 6000"/>
+            </a:avLst>
+          </a:prstGeom>
+          <a:solidFill>
+            <a:srgbClr val="FFFFFF"/>
+          </a:solidFill>
+          <a:ln w="12700">
+            <a:solidFill>
+              <a:srgbClr val="E4E3DE"/>
+            </a:solidFill>
+          </a:ln>
+          <a:effectLst/>
+        </p:spPr>
+        <p:style>
+          <a:lnRef idx="1">
+            <a:schemeClr val="accent1"/>
+          </a:lnRef>
+          <a:fillRef idx="3">
+            <a:schemeClr val="accent1"/>
+          </a:fillRef>
+          <a:effectRef idx="2">
+            <a:schemeClr val="accent1"/>
+          </a:effectRef>
+          <a:fontRef idx="minor">
+            <a:schemeClr val="lt1"/>
+          </a:fontRef>
+        </p:style>
+        <p:txBody>
+          <a:bodyPr rtlCol="0" anchor="ctr"/>
+          <a:lstStyle/>
+          <a:p/>
+        </p:txBody>
+      </p:sp>
+      <p:sp>
+        <p:nvSpPr>
+          <p:cNvPr id="16" name="TarjetaTxt 1"/>
+          <p:cNvSpPr txBox="1"/>
+          <p:nvPr/>
+        </p:nvSpPr>
+        <p:spPr>
+          <a:xfrm>
+            <a:off x="3403854" y="2724912"/>
+            <a:ext cx="2526030" cy="587502"/>
+          </a:xfrm>
+          <a:prstGeom prst="rect">
+            <a:avLst/>
+          </a:prstGeom>
+          <a:noFill/>
+        </p:spPr>
+        <p:txBody>
+          <a:bodyPr wrap="square" anchor="t" lIns="45720" rIns="45720" tIns="27432" bIns="27432">
+            <a:normAutofit/>
+          </a:bodyPr>
+          <a:lstStyle/>
+          <a:p>
+            <a:pPr algn="l"/>
+            <a:r>
+              <a:rPr sz="1100" b="1">
+                <a:solidFill>
+                  <a:srgbClr val="157355"/>
+                </a:solidFill>
+                <a:latin typeface="Bricolage Grotesque"/>
+              </a:rPr>
+              <a:t>la sandía</a:t>
+            </a:r>
+          </a:p>
+        </p:txBody>
+      </p:sp>
+      <p:sp>
+        <p:nvSpPr>
+          <p:cNvPr id="17" name="Onthul 1"/>
+          <p:cNvSpPr/>
+          <p:nvPr/>
+        </p:nvSpPr>
+        <p:spPr>
+          <a:xfrm>
+            <a:off x="3403854" y="3275838"/>
+            <a:ext cx="2526030" cy="237744"/>
+          </a:xfrm>
+          <a:prstGeom prst="roundRect">
+            <a:avLst>
+              <a:gd name="adj" fmla="val 20000"/>
+            </a:avLst>
+          </a:prstGeom>
+          <a:solidFill>
+            <a:srgbClr val="E4F4EE"/>
+          </a:solidFill>
+          <a:ln>
+            <a:noFill/>
+          </a:ln>
+          <a:effectLst/>
+        </p:spPr>
+        <p:style>
+          <a:lnRef idx="1">
+            <a:schemeClr val="accent1"/>
+          </a:lnRef>
+          <a:fillRef idx="3">
+            <a:schemeClr val="accent1"/>
+          </a:fillRef>
+          <a:effectRef idx="2">
+            <a:schemeClr val="accent1"/>
+          </a:effectRef>
+          <a:fontRef idx="minor">
+            <a:schemeClr val="lt1"/>
+          </a:fontRef>
+        </p:style>
+        <p:txBody>
+          <a:bodyPr rtlCol="0" anchor="ctr"/>
+          <a:lstStyle/>
+          <a:p/>
+        </p:txBody>
+      </p:sp>
+      <p:sp>
+        <p:nvSpPr>
+          <p:cNvPr id="18" name="OnthulTxt 1"/>
+          <p:cNvSpPr txBox="1"/>
+          <p:nvPr/>
+        </p:nvSpPr>
+        <p:spPr>
+          <a:xfrm>
+            <a:off x="3422142" y="3275838"/>
+            <a:ext cx="2489454" cy="237744"/>
+          </a:xfrm>
+          <a:prstGeom prst="rect">
+            <a:avLst/>
+          </a:prstGeom>
+          <a:noFill/>
+        </p:spPr>
+        <p:txBody>
+          <a:bodyPr wrap="square" anchor="ctr" lIns="45720" rIns="45720" tIns="27432" bIns="27432">
+            <a:normAutofit/>
+          </a:bodyPr>
+          <a:lstStyle/>
+          <a:p>
+            <a:pPr algn="l"/>
+            <a:r>
+              <a:rPr sz="850" b="1">
+                <a:solidFill>
+                  <a:srgbClr val="157355"/>
+                </a:solidFill>
+                <a:latin typeface="Inter"/>
+              </a:rPr>
+              <a:t>descrito ✓</a:t>
+            </a:r>
+          </a:p>
+        </p:txBody>
+      </p:sp>
+      <p:sp>
+        <p:nvSpPr>
+          <p:cNvPr id="19" name="Tarjeta 2"/>
+          <p:cNvSpPr/>
+          <p:nvPr/>
+        </p:nvSpPr>
+        <p:spPr>
+          <a:xfrm>
+            <a:off x="6167628" y="2670048"/>
+            <a:ext cx="2708910" cy="898398"/>
+          </a:xfrm>
+          <a:prstGeom prst="roundRect">
+            <a:avLst>
+              <a:gd name="adj" fmla="val 6000"/>
+            </a:avLst>
+          </a:prstGeom>
+          <a:solidFill>
+            <a:srgbClr val="FFFFFF"/>
+          </a:solidFill>
+          <a:ln w="12700">
+            <a:solidFill>
+              <a:srgbClr val="E4E3DE"/>
+            </a:solidFill>
+          </a:ln>
+          <a:effectLst/>
+        </p:spPr>
+        <p:style>
+          <a:lnRef idx="1">
+            <a:schemeClr val="accent1"/>
+          </a:lnRef>
+          <a:fillRef idx="3">
+            <a:schemeClr val="accent1"/>
+          </a:fillRef>
+          <a:effectRef idx="2">
+            <a:schemeClr val="accent1"/>
+          </a:effectRef>
+          <a:fontRef idx="minor">
+            <a:schemeClr val="lt1"/>
+          </a:fontRef>
+        </p:style>
+        <p:txBody>
+          <a:bodyPr rtlCol="0" anchor="ctr"/>
+          <a:lstStyle/>
+          <a:p/>
+        </p:txBody>
+      </p:sp>
+      <p:sp>
+        <p:nvSpPr>
+          <p:cNvPr id="20" name="TarjetaTxt 2"/>
+          <p:cNvSpPr txBox="1"/>
+          <p:nvPr/>
+        </p:nvSpPr>
+        <p:spPr>
+          <a:xfrm>
+            <a:off x="6259068" y="2724912"/>
+            <a:ext cx="2526030" cy="587502"/>
+          </a:xfrm>
+          <a:prstGeom prst="rect">
+            <a:avLst/>
+          </a:prstGeom>
+          <a:noFill/>
+        </p:spPr>
+        <p:txBody>
+          <a:bodyPr wrap="square" anchor="t" lIns="45720" rIns="45720" tIns="27432" bIns="27432">
+            <a:normAutofit/>
+          </a:bodyPr>
+          <a:lstStyle/>
+          <a:p>
+            <a:pPr algn="l"/>
+            <a:r>
+              <a:rPr sz="1100" b="1">
+                <a:solidFill>
+                  <a:srgbClr val="157355"/>
+                </a:solidFill>
+                <a:latin typeface="Bricolage Grotesque"/>
+              </a:rPr>
+              <a:t>el cilantro</a:t>
+            </a:r>
+          </a:p>
+        </p:txBody>
+      </p:sp>
+      <p:sp>
+        <p:nvSpPr>
+          <p:cNvPr id="21" name="Onthul 2"/>
+          <p:cNvSpPr/>
+          <p:nvPr/>
+        </p:nvSpPr>
+        <p:spPr>
+          <a:xfrm>
+            <a:off x="6259068" y="3275838"/>
+            <a:ext cx="2526030" cy="237744"/>
+          </a:xfrm>
+          <a:prstGeom prst="roundRect">
+            <a:avLst>
+              <a:gd name="adj" fmla="val 20000"/>
+            </a:avLst>
+          </a:prstGeom>
+          <a:solidFill>
+            <a:srgbClr val="E4F4EE"/>
+          </a:solidFill>
+          <a:ln>
+            <a:noFill/>
+          </a:ln>
+          <a:effectLst/>
+        </p:spPr>
+        <p:style>
+          <a:lnRef idx="1">
+            <a:schemeClr val="accent1"/>
+          </a:lnRef>
+          <a:fillRef idx="3">
+            <a:schemeClr val="accent1"/>
+          </a:fillRef>
+          <a:effectRef idx="2">
+            <a:schemeClr val="accent1"/>
+          </a:effectRef>
+          <a:fontRef idx="minor">
+            <a:schemeClr val="lt1"/>
+          </a:fontRef>
+        </p:style>
+        <p:txBody>
+          <a:bodyPr rtlCol="0" anchor="ctr"/>
+          <a:lstStyle/>
+          <a:p/>
+        </p:txBody>
+      </p:sp>
+      <p:sp>
+        <p:nvSpPr>
+          <p:cNvPr id="22" name="OnthulTxt 2"/>
+          <p:cNvSpPr txBox="1"/>
+          <p:nvPr/>
+        </p:nvSpPr>
+        <p:spPr>
+          <a:xfrm>
+            <a:off x="6277356" y="3275838"/>
+            <a:ext cx="2489454" cy="237744"/>
+          </a:xfrm>
+          <a:prstGeom prst="rect">
+            <a:avLst/>
+          </a:prstGeom>
+          <a:noFill/>
+        </p:spPr>
+        <p:txBody>
+          <a:bodyPr wrap="square" anchor="ctr" lIns="45720" rIns="45720" tIns="27432" bIns="27432">
+            <a:normAutofit/>
+          </a:bodyPr>
+          <a:lstStyle/>
+          <a:p>
+            <a:pPr algn="l"/>
+            <a:r>
+              <a:rPr sz="850" b="1">
+                <a:solidFill>
+                  <a:srgbClr val="157355"/>
+                </a:solidFill>
+                <a:latin typeface="Inter"/>
+              </a:rPr>
+              <a:t>descrito ✓</a:t>
+            </a:r>
+          </a:p>
+        </p:txBody>
+      </p:sp>
+      <p:sp>
+        <p:nvSpPr>
+          <p:cNvPr id="23" name="Tarjeta 3"/>
+          <p:cNvSpPr/>
+          <p:nvPr/>
+        </p:nvSpPr>
+        <p:spPr>
+          <a:xfrm>
+            <a:off x="9022842" y="2670048"/>
+            <a:ext cx="2708910" cy="898398"/>
+          </a:xfrm>
+          <a:prstGeom prst="roundRect">
+            <a:avLst>
+              <a:gd name="adj" fmla="val 6000"/>
+            </a:avLst>
+          </a:prstGeom>
+          <a:solidFill>
+            <a:srgbClr val="FFFFFF"/>
+          </a:solidFill>
+          <a:ln w="12700">
+            <a:solidFill>
+              <a:srgbClr val="E4E3DE"/>
+            </a:solidFill>
+          </a:ln>
+          <a:effectLst/>
+        </p:spPr>
+        <p:style>
+          <a:lnRef idx="1">
+            <a:schemeClr val="accent1"/>
+          </a:lnRef>
+          <a:fillRef idx="3">
+            <a:schemeClr val="accent1"/>
+          </a:fillRef>
+          <a:effectRef idx="2">
+            <a:schemeClr val="accent1"/>
+          </a:effectRef>
+          <a:fontRef idx="minor">
+            <a:schemeClr val="lt1"/>
+          </a:fontRef>
+        </p:style>
+        <p:txBody>
+          <a:bodyPr rtlCol="0" anchor="ctr"/>
+          <a:lstStyle/>
+          <a:p/>
+        </p:txBody>
+      </p:sp>
+      <p:sp>
+        <p:nvSpPr>
+          <p:cNvPr id="24" name="TarjetaTxt 3"/>
+          <p:cNvSpPr txBox="1"/>
+          <p:nvPr/>
+        </p:nvSpPr>
+        <p:spPr>
+          <a:xfrm>
+            <a:off x="9114282" y="2724912"/>
+            <a:ext cx="2526030" cy="587502"/>
+          </a:xfrm>
+          <a:prstGeom prst="rect">
+            <a:avLst/>
+          </a:prstGeom>
+          <a:noFill/>
+        </p:spPr>
+        <p:txBody>
+          <a:bodyPr wrap="square" anchor="t" lIns="45720" rIns="45720" tIns="27432" bIns="27432">
+            <a:normAutofit/>
+          </a:bodyPr>
+          <a:lstStyle/>
+          <a:p>
+            <a:pPr algn="l"/>
+            <a:r>
+              <a:rPr sz="1100" b="1">
+                <a:solidFill>
+                  <a:srgbClr val="157355"/>
+                </a:solidFill>
+                <a:latin typeface="Bricolage Grotesque"/>
+              </a:rPr>
+              <a:t>la calabaza</a:t>
+            </a:r>
+          </a:p>
+        </p:txBody>
+      </p:sp>
+      <p:sp>
+        <p:nvSpPr>
+          <p:cNvPr id="25" name="Onthul 3"/>
+          <p:cNvSpPr/>
+          <p:nvPr/>
+        </p:nvSpPr>
+        <p:spPr>
+          <a:xfrm>
+            <a:off x="9114282" y="3275838"/>
+            <a:ext cx="2526030" cy="237744"/>
+          </a:xfrm>
+          <a:prstGeom prst="roundRect">
+            <a:avLst>
+              <a:gd name="adj" fmla="val 20000"/>
+            </a:avLst>
+          </a:prstGeom>
+          <a:solidFill>
+            <a:srgbClr val="E4F4EE"/>
+          </a:solidFill>
+          <a:ln>
+            <a:noFill/>
+          </a:ln>
+          <a:effectLst/>
+        </p:spPr>
+        <p:style>
+          <a:lnRef idx="1">
+            <a:schemeClr val="accent1"/>
+          </a:lnRef>
+          <a:fillRef idx="3">
+            <a:schemeClr val="accent1"/>
+          </a:fillRef>
+          <a:effectRef idx="2">
+            <a:schemeClr val="accent1"/>
+          </a:effectRef>
+          <a:fontRef idx="minor">
+            <a:schemeClr val="lt1"/>
+          </a:fontRef>
+        </p:style>
+        <p:txBody>
+          <a:bodyPr rtlCol="0" anchor="ctr"/>
+          <a:lstStyle/>
+          <a:p/>
+        </p:txBody>
+      </p:sp>
+      <p:sp>
+        <p:nvSpPr>
+          <p:cNvPr id="26" name="OnthulTxt 3"/>
+          <p:cNvSpPr txBox="1"/>
+          <p:nvPr/>
+        </p:nvSpPr>
+        <p:spPr>
+          <a:xfrm>
+            <a:off x="9132570" y="3275838"/>
+            <a:ext cx="2489454" cy="237744"/>
+          </a:xfrm>
+          <a:prstGeom prst="rect">
+            <a:avLst/>
+          </a:prstGeom>
+          <a:noFill/>
+        </p:spPr>
+        <p:txBody>
+          <a:bodyPr wrap="square" anchor="ctr" lIns="45720" rIns="45720" tIns="27432" bIns="27432">
+            <a:normAutofit/>
+          </a:bodyPr>
+          <a:lstStyle/>
+          <a:p>
+            <a:pPr algn="l"/>
+            <a:r>
+              <a:rPr sz="850" b="1">
+                <a:solidFill>
+                  <a:srgbClr val="157355"/>
+                </a:solidFill>
+                <a:latin typeface="Inter"/>
+              </a:rPr>
+              <a:t>descrito ✓</a:t>
+            </a:r>
+          </a:p>
+        </p:txBody>
+      </p:sp>
+      <p:sp>
+        <p:nvSpPr>
+          <p:cNvPr id="27" name="Tarjeta 4"/>
+          <p:cNvSpPr/>
+          <p:nvPr/>
+        </p:nvSpPr>
+        <p:spPr>
+          <a:xfrm>
+            <a:off x="457200" y="3696462"/>
+            <a:ext cx="2708910" cy="898398"/>
+          </a:xfrm>
+          <a:prstGeom prst="roundRect">
+            <a:avLst>
+              <a:gd name="adj" fmla="val 6000"/>
+            </a:avLst>
+          </a:prstGeom>
+          <a:solidFill>
+            <a:srgbClr val="FFFFFF"/>
+          </a:solidFill>
+          <a:ln w="12700">
+            <a:solidFill>
+              <a:srgbClr val="E4E3DE"/>
+            </a:solidFill>
+          </a:ln>
+          <a:effectLst/>
+        </p:spPr>
+        <p:style>
+          <a:lnRef idx="1">
+            <a:schemeClr val="accent1"/>
+          </a:lnRef>
+          <a:fillRef idx="3">
+            <a:schemeClr val="accent1"/>
+          </a:fillRef>
+          <a:effectRef idx="2">
+            <a:schemeClr val="accent1"/>
+          </a:effectRef>
+          <a:fontRef idx="minor">
+            <a:schemeClr val="lt1"/>
+          </a:fontRef>
+        </p:style>
+        <p:txBody>
+          <a:bodyPr rtlCol="0" anchor="ctr"/>
+          <a:lstStyle/>
+          <a:p/>
+        </p:txBody>
+      </p:sp>
+      <p:sp>
+        <p:nvSpPr>
+          <p:cNvPr id="28" name="TarjetaTxt 4"/>
+          <p:cNvSpPr txBox="1"/>
+          <p:nvPr/>
+        </p:nvSpPr>
+        <p:spPr>
+          <a:xfrm>
+            <a:off x="548640" y="3751326"/>
+            <a:ext cx="2526030" cy="587502"/>
+          </a:xfrm>
+          <a:prstGeom prst="rect">
+            <a:avLst/>
+          </a:prstGeom>
+          <a:noFill/>
+        </p:spPr>
+        <p:txBody>
+          <a:bodyPr wrap="square" anchor="t" lIns="45720" rIns="45720" tIns="27432" bIns="27432">
+            <a:normAutofit/>
+          </a:bodyPr>
+          <a:lstStyle/>
+          <a:p>
+            <a:pPr algn="l"/>
+            <a:r>
+              <a:rPr sz="1100" b="1">
+                <a:solidFill>
+                  <a:srgbClr val="157355"/>
+                </a:solidFill>
+                <a:latin typeface="Bricolage Grotesque"/>
+              </a:rPr>
+              <a:t>el chile</a:t>
+            </a:r>
+          </a:p>
+        </p:txBody>
+      </p:sp>
+      <p:sp>
+        <p:nvSpPr>
+          <p:cNvPr id="29" name="Onthul 4"/>
+          <p:cNvSpPr/>
+          <p:nvPr/>
+        </p:nvSpPr>
+        <p:spPr>
+          <a:xfrm>
+            <a:off x="548640" y="4302252"/>
+            <a:ext cx="2526030" cy="237744"/>
+          </a:xfrm>
+          <a:prstGeom prst="roundRect">
+            <a:avLst>
+              <a:gd name="adj" fmla="val 20000"/>
+            </a:avLst>
+          </a:prstGeom>
+          <a:solidFill>
+            <a:srgbClr val="E4F4EE"/>
+          </a:solidFill>
+          <a:ln>
+            <a:noFill/>
+          </a:ln>
+          <a:effectLst/>
+        </p:spPr>
+        <p:style>
+          <a:lnRef idx="1">
+            <a:schemeClr val="accent1"/>
+          </a:lnRef>
+          <a:fillRef idx="3">
+            <a:schemeClr val="accent1"/>
+          </a:fillRef>
+          <a:effectRef idx="2">
+            <a:schemeClr val="accent1"/>
+          </a:effectRef>
+          <a:fontRef idx="minor">
+            <a:schemeClr val="lt1"/>
+          </a:fontRef>
+        </p:style>
+        <p:txBody>
+          <a:bodyPr rtlCol="0" anchor="ctr"/>
+          <a:lstStyle/>
+          <a:p/>
+        </p:txBody>
+      </p:sp>
+      <p:sp>
+        <p:nvSpPr>
+          <p:cNvPr id="30" name="OnthulTxt 4"/>
+          <p:cNvSpPr txBox="1"/>
+          <p:nvPr/>
+        </p:nvSpPr>
+        <p:spPr>
+          <a:xfrm>
+            <a:off x="566928" y="4302252"/>
+            <a:ext cx="2489454" cy="237744"/>
+          </a:xfrm>
+          <a:prstGeom prst="rect">
+            <a:avLst/>
+          </a:prstGeom>
+          <a:noFill/>
+        </p:spPr>
+        <p:txBody>
+          <a:bodyPr wrap="square" anchor="ctr" lIns="45720" rIns="45720" tIns="27432" bIns="27432">
+            <a:normAutofit/>
+          </a:bodyPr>
+          <a:lstStyle/>
+          <a:p>
+            <a:pPr algn="l"/>
+            <a:r>
+              <a:rPr sz="850" b="1">
+                <a:solidFill>
+                  <a:srgbClr val="157355"/>
+                </a:solidFill>
+                <a:latin typeface="Inter"/>
+              </a:rPr>
+              <a:t>descrito ✓</a:t>
+            </a:r>
+          </a:p>
+        </p:txBody>
+      </p:sp>
+      <p:sp>
+        <p:nvSpPr>
+          <p:cNvPr id="31" name="Tarjeta 5"/>
+          <p:cNvSpPr/>
+          <p:nvPr/>
+        </p:nvSpPr>
+        <p:spPr>
+          <a:xfrm>
+            <a:off x="3312414" y="3696462"/>
+            <a:ext cx="2708910" cy="898398"/>
+          </a:xfrm>
+          <a:prstGeom prst="roundRect">
+            <a:avLst>
+              <a:gd name="adj" fmla="val 6000"/>
+            </a:avLst>
+          </a:prstGeom>
+          <a:solidFill>
+            <a:srgbClr val="FFFFFF"/>
+          </a:solidFill>
+          <a:ln w="12700">
+            <a:solidFill>
+              <a:srgbClr val="E4E3DE"/>
+            </a:solidFill>
+          </a:ln>
+          <a:effectLst/>
+        </p:spPr>
+        <p:style>
+          <a:lnRef idx="1">
+            <a:schemeClr val="accent1"/>
+          </a:lnRef>
+          <a:fillRef idx="3">
+            <a:schemeClr val="accent1"/>
+          </a:fillRef>
+          <a:effectRef idx="2">
+            <a:schemeClr val="accent1"/>
+          </a:effectRef>
+          <a:fontRef idx="minor">
+            <a:schemeClr val="lt1"/>
+          </a:fontRef>
+        </p:style>
+        <p:txBody>
+          <a:bodyPr rtlCol="0" anchor="ctr"/>
+          <a:lstStyle/>
+          <a:p/>
+        </p:txBody>
+      </p:sp>
+      <p:sp>
+        <p:nvSpPr>
+          <p:cNvPr id="32" name="TarjetaTxt 5"/>
+          <p:cNvSpPr txBox="1"/>
+          <p:nvPr/>
+        </p:nvSpPr>
+        <p:spPr>
+          <a:xfrm>
+            <a:off x="3403854" y="3751326"/>
+            <a:ext cx="2526030" cy="587502"/>
+          </a:xfrm>
+          <a:prstGeom prst="rect">
+            <a:avLst/>
+          </a:prstGeom>
+          <a:noFill/>
+        </p:spPr>
+        <p:txBody>
+          <a:bodyPr wrap="square" anchor="t" lIns="45720" rIns="45720" tIns="27432" bIns="27432">
+            <a:normAutofit/>
+          </a:bodyPr>
+          <a:lstStyle/>
+          <a:p>
+            <a:pPr algn="l"/>
+            <a:r>
+              <a:rPr sz="1100" b="1">
+                <a:solidFill>
+                  <a:srgbClr val="157355"/>
+                </a:solidFill>
+                <a:latin typeface="Bricolage Grotesque"/>
+              </a:rPr>
+              <a:t>la piña</a:t>
+            </a:r>
+          </a:p>
+        </p:txBody>
+      </p:sp>
+      <p:sp>
+        <p:nvSpPr>
+          <p:cNvPr id="33" name="Onthul 5"/>
+          <p:cNvSpPr/>
+          <p:nvPr/>
+        </p:nvSpPr>
+        <p:spPr>
+          <a:xfrm>
+            <a:off x="3403854" y="4302252"/>
+            <a:ext cx="2526030" cy="237744"/>
+          </a:xfrm>
+          <a:prstGeom prst="roundRect">
+            <a:avLst>
+              <a:gd name="adj" fmla="val 20000"/>
+            </a:avLst>
+          </a:prstGeom>
+          <a:solidFill>
+            <a:srgbClr val="E4F4EE"/>
+          </a:solidFill>
+          <a:ln>
+            <a:noFill/>
+          </a:ln>
+          <a:effectLst/>
+        </p:spPr>
+        <p:style>
+          <a:lnRef idx="1">
+            <a:schemeClr val="accent1"/>
+          </a:lnRef>
+          <a:fillRef idx="3">
+            <a:schemeClr val="accent1"/>
+          </a:fillRef>
+          <a:effectRef idx="2">
+            <a:schemeClr val="accent1"/>
+          </a:effectRef>
+          <a:fontRef idx="minor">
+            <a:schemeClr val="lt1"/>
+          </a:fontRef>
+        </p:style>
+        <p:txBody>
+          <a:bodyPr rtlCol="0" anchor="ctr"/>
+          <a:lstStyle/>
+          <a:p/>
+        </p:txBody>
+      </p:sp>
+      <p:sp>
+        <p:nvSpPr>
+          <p:cNvPr id="34" name="OnthulTxt 5"/>
+          <p:cNvSpPr txBox="1"/>
+          <p:nvPr/>
+        </p:nvSpPr>
+        <p:spPr>
+          <a:xfrm>
+            <a:off x="3422142" y="4302252"/>
+            <a:ext cx="2489454" cy="237744"/>
+          </a:xfrm>
+          <a:prstGeom prst="rect">
+            <a:avLst/>
+          </a:prstGeom>
+          <a:noFill/>
+        </p:spPr>
+        <p:txBody>
+          <a:bodyPr wrap="square" anchor="ctr" lIns="45720" rIns="45720" tIns="27432" bIns="27432">
+            <a:normAutofit/>
+          </a:bodyPr>
+          <a:lstStyle/>
+          <a:p>
+            <a:pPr algn="l"/>
+            <a:r>
+              <a:rPr sz="850" b="1">
+                <a:solidFill>
+                  <a:srgbClr val="157355"/>
+                </a:solidFill>
+                <a:latin typeface="Inter"/>
+              </a:rPr>
+              <a:t>descrito ✓</a:t>
+            </a:r>
+          </a:p>
+        </p:txBody>
+      </p:sp>
+      <p:sp>
+        <p:nvSpPr>
+          <p:cNvPr id="35" name="Tarjeta 6"/>
+          <p:cNvSpPr/>
+          <p:nvPr/>
+        </p:nvSpPr>
+        <p:spPr>
+          <a:xfrm>
+            <a:off x="6167628" y="3696462"/>
+            <a:ext cx="2708910" cy="898398"/>
+          </a:xfrm>
+          <a:prstGeom prst="roundRect">
+            <a:avLst>
+              <a:gd name="adj" fmla="val 6000"/>
+            </a:avLst>
+          </a:prstGeom>
+          <a:solidFill>
+            <a:srgbClr val="FFFFFF"/>
+          </a:solidFill>
+          <a:ln w="12700">
+            <a:solidFill>
+              <a:srgbClr val="E4E3DE"/>
+            </a:solidFill>
+          </a:ln>
+          <a:effectLst/>
+        </p:spPr>
+        <p:style>
+          <a:lnRef idx="1">
+            <a:schemeClr val="accent1"/>
+          </a:lnRef>
+          <a:fillRef idx="3">
+            <a:schemeClr val="accent1"/>
+          </a:fillRef>
+          <a:effectRef idx="2">
+            <a:schemeClr val="accent1"/>
+          </a:effectRef>
+          <a:fontRef idx="minor">
+            <a:schemeClr val="lt1"/>
+          </a:fontRef>
+        </p:style>
+        <p:txBody>
+          <a:bodyPr rtlCol="0" anchor="ctr"/>
+          <a:lstStyle/>
+          <a:p/>
+        </p:txBody>
+      </p:sp>
+      <p:sp>
+        <p:nvSpPr>
+          <p:cNvPr id="36" name="TarjetaTxt 6"/>
+          <p:cNvSpPr txBox="1"/>
+          <p:nvPr/>
+        </p:nvSpPr>
+        <p:spPr>
+          <a:xfrm>
+            <a:off x="6259068" y="3751326"/>
+            <a:ext cx="2526030" cy="587502"/>
+          </a:xfrm>
+          <a:prstGeom prst="rect">
+            <a:avLst/>
+          </a:prstGeom>
+          <a:noFill/>
+        </p:spPr>
+        <p:txBody>
+          <a:bodyPr wrap="square" anchor="t" lIns="45720" rIns="45720" tIns="27432" bIns="27432">
+            <a:normAutofit/>
+          </a:bodyPr>
+          <a:lstStyle/>
+          <a:p>
+            <a:pPr algn="l"/>
+            <a:r>
+              <a:rPr sz="1100" b="1">
+                <a:solidFill>
+                  <a:srgbClr val="157355"/>
+                </a:solidFill>
+                <a:latin typeface="Bricolage Grotesque"/>
+              </a:rPr>
+              <a:t>el maíz</a:t>
+            </a:r>
+          </a:p>
+        </p:txBody>
+      </p:sp>
+      <p:sp>
+        <p:nvSpPr>
+          <p:cNvPr id="37" name="Onthul 6"/>
+          <p:cNvSpPr/>
+          <p:nvPr/>
+        </p:nvSpPr>
+        <p:spPr>
+          <a:xfrm>
+            <a:off x="6259068" y="4302252"/>
+            <a:ext cx="2526030" cy="237744"/>
+          </a:xfrm>
+          <a:prstGeom prst="roundRect">
+            <a:avLst>
+              <a:gd name="adj" fmla="val 20000"/>
+            </a:avLst>
+          </a:prstGeom>
+          <a:solidFill>
+            <a:srgbClr val="E4F4EE"/>
+          </a:solidFill>
+          <a:ln>
+            <a:noFill/>
+          </a:ln>
+          <a:effectLst/>
+        </p:spPr>
+        <p:style>
+          <a:lnRef idx="1">
+            <a:schemeClr val="accent1"/>
+          </a:lnRef>
+          <a:fillRef idx="3">
+            <a:schemeClr val="accent1"/>
+          </a:fillRef>
+          <a:effectRef idx="2">
+            <a:schemeClr val="accent1"/>
+          </a:effectRef>
+          <a:fontRef idx="minor">
+            <a:schemeClr val="lt1"/>
+          </a:fontRef>
+        </p:style>
+        <p:txBody>
+          <a:bodyPr rtlCol="0" anchor="ctr"/>
+          <a:lstStyle/>
+          <a:p/>
+        </p:txBody>
+      </p:sp>
+      <p:sp>
+        <p:nvSpPr>
+          <p:cNvPr id="38" name="OnthulTxt 6"/>
+          <p:cNvSpPr txBox="1"/>
+          <p:nvPr/>
+        </p:nvSpPr>
+        <p:spPr>
+          <a:xfrm>
+            <a:off x="6277356" y="4302252"/>
+            <a:ext cx="2489454" cy="237744"/>
+          </a:xfrm>
+          <a:prstGeom prst="rect">
+            <a:avLst/>
+          </a:prstGeom>
+          <a:noFill/>
+        </p:spPr>
+        <p:txBody>
+          <a:bodyPr wrap="square" anchor="ctr" lIns="45720" rIns="45720" tIns="27432" bIns="27432">
+            <a:normAutofit/>
+          </a:bodyPr>
+          <a:lstStyle/>
+          <a:p>
+            <a:pPr algn="l"/>
+            <a:r>
+              <a:rPr sz="850" b="1">
+                <a:solidFill>
+                  <a:srgbClr val="157355"/>
+                </a:solidFill>
+                <a:latin typeface="Inter"/>
+              </a:rPr>
+              <a:t>descrito ✓</a:t>
+            </a:r>
+          </a:p>
+        </p:txBody>
+      </p:sp>
+      <p:sp>
+        <p:nvSpPr>
+          <p:cNvPr id="39" name="Tarjeta 7"/>
+          <p:cNvSpPr/>
+          <p:nvPr/>
+        </p:nvSpPr>
+        <p:spPr>
+          <a:xfrm>
+            <a:off x="9022842" y="3696462"/>
+            <a:ext cx="2708910" cy="898398"/>
+          </a:xfrm>
+          <a:prstGeom prst="roundRect">
+            <a:avLst>
+              <a:gd name="adj" fmla="val 6000"/>
+            </a:avLst>
+          </a:prstGeom>
+          <a:solidFill>
+            <a:srgbClr val="FFFFFF"/>
+          </a:solidFill>
+          <a:ln w="12700">
+            <a:solidFill>
+              <a:srgbClr val="E4E3DE"/>
+            </a:solidFill>
+          </a:ln>
+          <a:effectLst/>
+        </p:spPr>
+        <p:style>
+          <a:lnRef idx="1">
+            <a:schemeClr val="accent1"/>
+          </a:lnRef>
+          <a:fillRef idx="3">
+            <a:schemeClr val="accent1"/>
+          </a:fillRef>
+          <a:effectRef idx="2">
+            <a:schemeClr val="accent1"/>
+          </a:effectRef>
+          <a:fontRef idx="minor">
+            <a:schemeClr val="lt1"/>
+          </a:fontRef>
+        </p:style>
+        <p:txBody>
+          <a:bodyPr rtlCol="0" anchor="ctr"/>
+          <a:lstStyle/>
+          <a:p/>
+        </p:txBody>
+      </p:sp>
+      <p:sp>
+        <p:nvSpPr>
+          <p:cNvPr id="40" name="TarjetaTxt 7"/>
+          <p:cNvSpPr txBox="1"/>
+          <p:nvPr/>
+        </p:nvSpPr>
+        <p:spPr>
+          <a:xfrm>
+            <a:off x="9114282" y="3751326"/>
+            <a:ext cx="2526030" cy="587502"/>
+          </a:xfrm>
+          <a:prstGeom prst="rect">
+            <a:avLst/>
+          </a:prstGeom>
+          <a:noFill/>
+        </p:spPr>
+        <p:txBody>
+          <a:bodyPr wrap="square" anchor="t" lIns="45720" rIns="45720" tIns="27432" bIns="27432">
+            <a:normAutofit/>
+          </a:bodyPr>
+          <a:lstStyle/>
+          <a:p>
+            <a:pPr algn="l"/>
+            <a:r>
+              <a:rPr sz="1100" b="1">
+                <a:solidFill>
+                  <a:srgbClr val="157355"/>
+                </a:solidFill>
+                <a:latin typeface="Bricolage Grotesque"/>
+              </a:rPr>
+              <a:t>la cebolla</a:t>
+            </a:r>
+          </a:p>
+        </p:txBody>
+      </p:sp>
+      <p:sp>
+        <p:nvSpPr>
+          <p:cNvPr id="41" name="Onthul 7"/>
+          <p:cNvSpPr/>
+          <p:nvPr/>
+        </p:nvSpPr>
+        <p:spPr>
+          <a:xfrm>
+            <a:off x="9114282" y="4302252"/>
+            <a:ext cx="2526030" cy="237744"/>
+          </a:xfrm>
+          <a:prstGeom prst="roundRect">
+            <a:avLst>
+              <a:gd name="adj" fmla="val 20000"/>
+            </a:avLst>
+          </a:prstGeom>
+          <a:solidFill>
+            <a:srgbClr val="E4F4EE"/>
+          </a:solidFill>
+          <a:ln>
+            <a:noFill/>
+          </a:ln>
+          <a:effectLst/>
+        </p:spPr>
+        <p:style>
+          <a:lnRef idx="1">
+            <a:schemeClr val="accent1"/>
+          </a:lnRef>
+          <a:fillRef idx="3">
+            <a:schemeClr val="accent1"/>
+          </a:fillRef>
+          <a:effectRef idx="2">
+            <a:schemeClr val="accent1"/>
+          </a:effectRef>
+          <a:fontRef idx="minor">
+            <a:schemeClr val="lt1"/>
+          </a:fontRef>
+        </p:style>
+        <p:txBody>
+          <a:bodyPr rtlCol="0" anchor="ctr"/>
+          <a:lstStyle/>
+          <a:p/>
+        </p:txBody>
+      </p:sp>
+      <p:sp>
+        <p:nvSpPr>
+          <p:cNvPr id="42" name="OnthulTxt 7"/>
+          <p:cNvSpPr txBox="1"/>
+          <p:nvPr/>
+        </p:nvSpPr>
+        <p:spPr>
+          <a:xfrm>
+            <a:off x="9132570" y="4302252"/>
+            <a:ext cx="2489454" cy="237744"/>
+          </a:xfrm>
+          <a:prstGeom prst="rect">
+            <a:avLst/>
+          </a:prstGeom>
+          <a:noFill/>
+        </p:spPr>
+        <p:txBody>
+          <a:bodyPr wrap="square" anchor="ctr" lIns="45720" rIns="45720" tIns="27432" bIns="27432">
+            <a:normAutofit/>
+          </a:bodyPr>
+          <a:lstStyle/>
+          <a:p>
+            <a:pPr algn="l"/>
+            <a:r>
+              <a:rPr sz="850" b="1">
+                <a:solidFill>
+                  <a:srgbClr val="157355"/>
+                </a:solidFill>
+                <a:latin typeface="Inter"/>
+              </a:rPr>
+              <a:t>descrito ✓</a:t>
+            </a:r>
+          </a:p>
+        </p:txBody>
+      </p:sp>
+      <p:sp>
+        <p:nvSpPr>
+          <p:cNvPr id="43" name="Tarjeta 8"/>
+          <p:cNvSpPr/>
+          <p:nvPr/>
+        </p:nvSpPr>
+        <p:spPr>
+          <a:xfrm>
+            <a:off x="457200" y="4722876"/>
+            <a:ext cx="2708910" cy="898398"/>
+          </a:xfrm>
+          <a:prstGeom prst="roundRect">
+            <a:avLst>
+              <a:gd name="adj" fmla="val 6000"/>
+            </a:avLst>
+          </a:prstGeom>
+          <a:solidFill>
+            <a:srgbClr val="FFFFFF"/>
+          </a:solidFill>
+          <a:ln w="12700">
+            <a:solidFill>
+              <a:srgbClr val="E4E3DE"/>
+            </a:solidFill>
+          </a:ln>
+          <a:effectLst/>
+        </p:spPr>
+        <p:style>
+          <a:lnRef idx="1">
+            <a:schemeClr val="accent1"/>
+          </a:lnRef>
+          <a:fillRef idx="3">
+            <a:schemeClr val="accent1"/>
+          </a:fillRef>
+          <a:effectRef idx="2">
+            <a:schemeClr val="accent1"/>
+          </a:effectRef>
+          <a:fontRef idx="minor">
+            <a:schemeClr val="lt1"/>
+          </a:fontRef>
+        </p:style>
+        <p:txBody>
+          <a:bodyPr rtlCol="0" anchor="ctr"/>
+          <a:lstStyle/>
+          <a:p/>
+        </p:txBody>
+      </p:sp>
+      <p:sp>
+        <p:nvSpPr>
+          <p:cNvPr id="44" name="TarjetaTxt 8"/>
+          <p:cNvSpPr txBox="1"/>
+          <p:nvPr/>
+        </p:nvSpPr>
+        <p:spPr>
+          <a:xfrm>
+            <a:off x="548640" y="4777740"/>
+            <a:ext cx="2526030" cy="587502"/>
+          </a:xfrm>
+          <a:prstGeom prst="rect">
+            <a:avLst/>
+          </a:prstGeom>
+          <a:noFill/>
+        </p:spPr>
+        <p:txBody>
+          <a:bodyPr wrap="square" anchor="t" lIns="45720" rIns="45720" tIns="27432" bIns="27432">
+            <a:normAutofit/>
+          </a:bodyPr>
+          <a:lstStyle/>
+          <a:p>
+            <a:pPr algn="l"/>
+            <a:r>
+              <a:rPr sz="1100" b="1">
+                <a:solidFill>
+                  <a:srgbClr val="157355"/>
+                </a:solidFill>
+                <a:latin typeface="Bricolage Grotesque"/>
+              </a:rPr>
+              <a:t>el limón</a:t>
+            </a:r>
+          </a:p>
+        </p:txBody>
+      </p:sp>
+      <p:sp>
+        <p:nvSpPr>
+          <p:cNvPr id="45" name="Onthul 8"/>
+          <p:cNvSpPr/>
+          <p:nvPr/>
+        </p:nvSpPr>
+        <p:spPr>
+          <a:xfrm>
+            <a:off x="548640" y="5328666"/>
+            <a:ext cx="2526030" cy="237744"/>
+          </a:xfrm>
+          <a:prstGeom prst="roundRect">
+            <a:avLst>
+              <a:gd name="adj" fmla="val 20000"/>
+            </a:avLst>
+          </a:prstGeom>
+          <a:solidFill>
+            <a:srgbClr val="E4F4EE"/>
+          </a:solidFill>
+          <a:ln>
+            <a:noFill/>
+          </a:ln>
+          <a:effectLst/>
+        </p:spPr>
+        <p:style>
+          <a:lnRef idx="1">
+            <a:schemeClr val="accent1"/>
+          </a:lnRef>
+          <a:fillRef idx="3">
+            <a:schemeClr val="accent1"/>
+          </a:fillRef>
+          <a:effectRef idx="2">
+            <a:schemeClr val="accent1"/>
+          </a:effectRef>
+          <a:fontRef idx="minor">
+            <a:schemeClr val="lt1"/>
+          </a:fontRef>
+        </p:style>
+        <p:txBody>
+          <a:bodyPr rtlCol="0" anchor="ctr"/>
+          <a:lstStyle/>
+          <a:p/>
+        </p:txBody>
+      </p:sp>
+      <p:sp>
+        <p:nvSpPr>
+          <p:cNvPr id="46" name="OnthulTxt 8"/>
+          <p:cNvSpPr txBox="1"/>
+          <p:nvPr/>
+        </p:nvSpPr>
+        <p:spPr>
+          <a:xfrm>
+            <a:off x="566928" y="5328666"/>
+            <a:ext cx="2489454" cy="237744"/>
+          </a:xfrm>
+          <a:prstGeom prst="rect">
+            <a:avLst/>
+          </a:prstGeom>
+          <a:noFill/>
+        </p:spPr>
+        <p:txBody>
+          <a:bodyPr wrap="square" anchor="ctr" lIns="45720" rIns="45720" tIns="27432" bIns="27432">
+            <a:normAutofit/>
+          </a:bodyPr>
+          <a:lstStyle/>
+          <a:p>
+            <a:pPr algn="l"/>
+            <a:r>
+              <a:rPr sz="850" b="1">
+                <a:solidFill>
+                  <a:srgbClr val="157355"/>
+                </a:solidFill>
+                <a:latin typeface="Inter"/>
+              </a:rPr>
+              <a:t>descrito ✓</a:t>
+            </a:r>
+          </a:p>
+        </p:txBody>
+      </p:sp>
+      <p:sp>
+        <p:nvSpPr>
+          <p:cNvPr id="47" name="Tarjeta 9"/>
+          <p:cNvSpPr/>
+          <p:nvPr/>
+        </p:nvSpPr>
+        <p:spPr>
+          <a:xfrm>
+            <a:off x="3312414" y="4722876"/>
+            <a:ext cx="2708910" cy="898398"/>
+          </a:xfrm>
+          <a:prstGeom prst="roundRect">
+            <a:avLst>
+              <a:gd name="adj" fmla="val 6000"/>
+            </a:avLst>
+          </a:prstGeom>
+          <a:solidFill>
+            <a:srgbClr val="FFFFFF"/>
+          </a:solidFill>
+          <a:ln w="12700">
+            <a:solidFill>
+              <a:srgbClr val="E4E3DE"/>
+            </a:solidFill>
+          </a:ln>
+          <a:effectLst/>
+        </p:spPr>
+        <p:style>
+          <a:lnRef idx="1">
+            <a:schemeClr val="accent1"/>
+          </a:lnRef>
+          <a:fillRef idx="3">
+            <a:schemeClr val="accent1"/>
+          </a:fillRef>
+          <a:effectRef idx="2">
+            <a:schemeClr val="accent1"/>
+          </a:effectRef>
+          <a:fontRef idx="minor">
+            <a:schemeClr val="lt1"/>
+          </a:fontRef>
+        </p:style>
+        <p:txBody>
+          <a:bodyPr rtlCol="0" anchor="ctr"/>
+          <a:lstStyle/>
+          <a:p/>
+        </p:txBody>
+      </p:sp>
+      <p:sp>
+        <p:nvSpPr>
+          <p:cNvPr id="48" name="TarjetaTxt 9"/>
+          <p:cNvSpPr txBox="1"/>
+          <p:nvPr/>
+        </p:nvSpPr>
+        <p:spPr>
+          <a:xfrm>
+            <a:off x="3403854" y="4777740"/>
+            <a:ext cx="2526030" cy="587502"/>
+          </a:xfrm>
+          <a:prstGeom prst="rect">
+            <a:avLst/>
+          </a:prstGeom>
+          <a:noFill/>
+        </p:spPr>
+        <p:txBody>
+          <a:bodyPr wrap="square" anchor="t" lIns="45720" rIns="45720" tIns="27432" bIns="27432">
+            <a:normAutofit/>
+          </a:bodyPr>
+          <a:lstStyle/>
+          <a:p>
+            <a:pPr algn="l"/>
+            <a:r>
+              <a:rPr sz="1100" b="1">
+                <a:solidFill>
+                  <a:srgbClr val="157355"/>
+                </a:solidFill>
+                <a:latin typeface="Bricolage Grotesque"/>
+              </a:rPr>
+              <a:t>la tortilla</a:t>
+            </a:r>
+          </a:p>
+        </p:txBody>
+      </p:sp>
+      <p:sp>
+        <p:nvSpPr>
+          <p:cNvPr id="49" name="Onthul 9"/>
+          <p:cNvSpPr/>
+          <p:nvPr/>
+        </p:nvSpPr>
+        <p:spPr>
+          <a:xfrm>
+            <a:off x="3403854" y="5328666"/>
+            <a:ext cx="2526030" cy="237744"/>
+          </a:xfrm>
+          <a:prstGeom prst="roundRect">
+            <a:avLst>
+              <a:gd name="adj" fmla="val 20000"/>
+            </a:avLst>
+          </a:prstGeom>
+          <a:solidFill>
+            <a:srgbClr val="E4F4EE"/>
+          </a:solidFill>
+          <a:ln>
+            <a:noFill/>
+          </a:ln>
+          <a:effectLst/>
+        </p:spPr>
+        <p:style>
+          <a:lnRef idx="1">
+            <a:schemeClr val="accent1"/>
+          </a:lnRef>
+          <a:fillRef idx="3">
+            <a:schemeClr val="accent1"/>
+          </a:fillRef>
+          <a:effectRef idx="2">
+            <a:schemeClr val="accent1"/>
+          </a:effectRef>
+          <a:fontRef idx="minor">
+            <a:schemeClr val="lt1"/>
+          </a:fontRef>
+        </p:style>
+        <p:txBody>
+          <a:bodyPr rtlCol="0" anchor="ctr"/>
+          <a:lstStyle/>
+          <a:p/>
+        </p:txBody>
+      </p:sp>
+      <p:sp>
+        <p:nvSpPr>
+          <p:cNvPr id="50" name="OnthulTxt 9"/>
+          <p:cNvSpPr txBox="1"/>
+          <p:nvPr/>
+        </p:nvSpPr>
+        <p:spPr>
+          <a:xfrm>
+            <a:off x="3422142" y="5328666"/>
+            <a:ext cx="2489454" cy="237744"/>
+          </a:xfrm>
+          <a:prstGeom prst="rect">
+            <a:avLst/>
+          </a:prstGeom>
+          <a:noFill/>
+        </p:spPr>
+        <p:txBody>
+          <a:bodyPr wrap="square" anchor="ctr" lIns="45720" rIns="45720" tIns="27432" bIns="27432">
+            <a:normAutofit/>
+          </a:bodyPr>
+          <a:lstStyle/>
+          <a:p>
+            <a:pPr algn="l"/>
+            <a:r>
+              <a:rPr sz="850" b="1">
+                <a:solidFill>
+                  <a:srgbClr val="157355"/>
+                </a:solidFill>
+                <a:latin typeface="Inter"/>
+              </a:rPr>
+              <a:t>descrito ✓</a:t>
+            </a:r>
+          </a:p>
+        </p:txBody>
+      </p:sp>
+      <p:sp>
+        <p:nvSpPr>
+          <p:cNvPr id="51" name="Tarjeta 10"/>
+          <p:cNvSpPr/>
+          <p:nvPr/>
+        </p:nvSpPr>
+        <p:spPr>
+          <a:xfrm>
+            <a:off x="6167628" y="4722876"/>
+            <a:ext cx="2708910" cy="898398"/>
+          </a:xfrm>
+          <a:prstGeom prst="roundRect">
+            <a:avLst>
+              <a:gd name="adj" fmla="val 6000"/>
+            </a:avLst>
+          </a:prstGeom>
+          <a:solidFill>
+            <a:srgbClr val="FFFFFF"/>
+          </a:solidFill>
+          <a:ln w="12700">
+            <a:solidFill>
+              <a:srgbClr val="E4E3DE"/>
+            </a:solidFill>
+          </a:ln>
+          <a:effectLst/>
+        </p:spPr>
+        <p:style>
+          <a:lnRef idx="1">
+            <a:schemeClr val="accent1"/>
+          </a:lnRef>
+          <a:fillRef idx="3">
+            <a:schemeClr val="accent1"/>
+          </a:fillRef>
+          <a:effectRef idx="2">
+            <a:schemeClr val="accent1"/>
+          </a:effectRef>
+          <a:fontRef idx="minor">
+            <a:schemeClr val="lt1"/>
+          </a:fontRef>
+        </p:style>
+        <p:txBody>
+          <a:bodyPr rtlCol="0" anchor="ctr"/>
+          <a:lstStyle/>
+          <a:p/>
+        </p:txBody>
+      </p:sp>
+      <p:sp>
+        <p:nvSpPr>
+          <p:cNvPr id="52" name="TarjetaTxt 10"/>
+          <p:cNvSpPr txBox="1"/>
+          <p:nvPr/>
+        </p:nvSpPr>
+        <p:spPr>
+          <a:xfrm>
+            <a:off x="6259068" y="4777740"/>
+            <a:ext cx="2526030" cy="788670"/>
+          </a:xfrm>
+          <a:prstGeom prst="rect">
+            <a:avLst/>
+          </a:prstGeom>
+          <a:noFill/>
+        </p:spPr>
+        <p:txBody>
+          <a:bodyPr wrap="square" anchor="t" lIns="45720" rIns="45720" tIns="27432" bIns="27432">
+            <a:normAutofit/>
+          </a:bodyPr>
+          <a:lstStyle/>
+          <a:p>
+            <a:pPr algn="l"/>
+            <a:r>
+              <a:rPr sz="1100" b="1">
+                <a:solidFill>
+                  <a:srgbClr val="157355"/>
+                </a:solidFill>
+                <a:latin typeface="Bricolage Grotesque"/>
+              </a:rPr>
+              <a:t>marco</a:t>
+            </a:r>
+          </a:p>
+          <a:p>
+            <a:pPr algn="l"/>
+            <a:r>
+              <a:rPr sz="1000">
+                <a:solidFill>
+                  <a:srgbClr val="20242E"/>
+                </a:solidFill>
+                <a:latin typeface="Inter"/>
+              </a:rPr>
+              <a:t>Es verde y grande.</a:t>
+            </a:r>
+          </a:p>
+        </p:txBody>
+      </p:sp>
+      <p:sp>
+        <p:nvSpPr>
+          <p:cNvPr id="53" name="Tarjeta 11"/>
+          <p:cNvSpPr/>
+          <p:nvPr/>
+        </p:nvSpPr>
+        <p:spPr>
+          <a:xfrm>
+            <a:off x="9022842" y="4722876"/>
+            <a:ext cx="2708910" cy="898398"/>
+          </a:xfrm>
+          <a:prstGeom prst="roundRect">
+            <a:avLst>
+              <a:gd name="adj" fmla="val 6000"/>
+            </a:avLst>
+          </a:prstGeom>
+          <a:solidFill>
+            <a:srgbClr val="FFFFFF"/>
+          </a:solidFill>
+          <a:ln w="12700">
+            <a:solidFill>
+              <a:srgbClr val="E4E3DE"/>
+            </a:solidFill>
+          </a:ln>
+          <a:effectLst/>
+        </p:spPr>
+        <p:style>
+          <a:lnRef idx="1">
+            <a:schemeClr val="accent1"/>
+          </a:lnRef>
+          <a:fillRef idx="3">
+            <a:schemeClr val="accent1"/>
+          </a:fillRef>
+          <a:effectRef idx="2">
+            <a:schemeClr val="accent1"/>
+          </a:effectRef>
+          <a:fontRef idx="minor">
+            <a:schemeClr val="lt1"/>
+          </a:fontRef>
+        </p:style>
+        <p:txBody>
+          <a:bodyPr rtlCol="0" anchor="ctr"/>
+          <a:lstStyle/>
+          <a:p/>
+        </p:txBody>
+      </p:sp>
+      <p:sp>
+        <p:nvSpPr>
+          <p:cNvPr id="54" name="TarjetaTxt 11"/>
+          <p:cNvSpPr txBox="1"/>
+          <p:nvPr/>
+        </p:nvSpPr>
+        <p:spPr>
+          <a:xfrm>
+            <a:off x="9114282" y="4777740"/>
+            <a:ext cx="2526030" cy="788670"/>
+          </a:xfrm>
+          <a:prstGeom prst="rect">
+            <a:avLst/>
+          </a:prstGeom>
+          <a:noFill/>
+        </p:spPr>
+        <p:txBody>
+          <a:bodyPr wrap="square" anchor="t" lIns="45720" rIns="45720" tIns="27432" bIns="27432">
+            <a:normAutofit/>
+          </a:bodyPr>
+          <a:lstStyle/>
+          <a:p>
+            <a:pPr algn="l"/>
+            <a:r>
+              <a:rPr sz="1100" b="1">
+                <a:solidFill>
+                  <a:srgbClr val="157355"/>
+                </a:solidFill>
+                <a:latin typeface="Bricolage Grotesque"/>
+              </a:rPr>
+              <a:t>marco</a:t>
+            </a:r>
+          </a:p>
+          <a:p>
+            <a:pPr algn="l"/>
+            <a:r>
+              <a:rPr sz="1000">
+                <a:solidFill>
+                  <a:srgbClr val="20242E"/>
+                </a:solidFill>
+                <a:latin typeface="Inter"/>
+              </a:rPr>
+              <a:t>Se come con sal.</a:t>
+            </a:r>
+          </a:p>
+        </p:txBody>
+      </p:sp>
+      <p:sp>
+        <p:nvSpPr>
+          <p:cNvPr id="55" name="Tarjeta 12"/>
+          <p:cNvSpPr/>
+          <p:nvPr/>
+        </p:nvSpPr>
+        <p:spPr>
+          <a:xfrm>
+            <a:off x="457200" y="5749290"/>
+            <a:ext cx="2708910" cy="898398"/>
+          </a:xfrm>
+          <a:prstGeom prst="roundRect">
+            <a:avLst>
+              <a:gd name="adj" fmla="val 6000"/>
+            </a:avLst>
+          </a:prstGeom>
+          <a:solidFill>
+            <a:srgbClr val="FFFFFF"/>
+          </a:solidFill>
+          <a:ln w="12700">
+            <a:solidFill>
+              <a:srgbClr val="E4E3DE"/>
+            </a:solidFill>
+          </a:ln>
+          <a:effectLst/>
+        </p:spPr>
+        <p:style>
+          <a:lnRef idx="1">
+            <a:schemeClr val="accent1"/>
+          </a:lnRef>
+          <a:fillRef idx="3">
+            <a:schemeClr val="accent1"/>
+          </a:fillRef>
+          <a:effectRef idx="2">
+            <a:schemeClr val="accent1"/>
+          </a:effectRef>
+          <a:fontRef idx="minor">
+            <a:schemeClr val="lt1"/>
+          </a:fontRef>
+        </p:style>
+        <p:txBody>
+          <a:bodyPr rtlCol="0" anchor="ctr"/>
+          <a:lstStyle/>
+          <a:p/>
+        </p:txBody>
+      </p:sp>
+      <p:sp>
+        <p:nvSpPr>
+          <p:cNvPr id="56" name="TarjetaTxt 12"/>
+          <p:cNvSpPr txBox="1"/>
+          <p:nvPr/>
+        </p:nvSpPr>
+        <p:spPr>
+          <a:xfrm>
+            <a:off x="548640" y="5804154"/>
+            <a:ext cx="2526030" cy="788670"/>
+          </a:xfrm>
+          <a:prstGeom prst="rect">
+            <a:avLst/>
+          </a:prstGeom>
+          <a:noFill/>
+        </p:spPr>
+        <p:txBody>
+          <a:bodyPr wrap="square" anchor="t" lIns="45720" rIns="45720" tIns="27432" bIns="27432">
+            <a:normAutofit/>
+          </a:bodyPr>
+          <a:lstStyle/>
+          <a:p>
+            <a:pPr algn="l"/>
+            <a:r>
+              <a:rPr sz="1100" b="1">
+                <a:solidFill>
+                  <a:srgbClr val="157355"/>
+                </a:solidFill>
+                <a:latin typeface="Bricolage Grotesque"/>
+              </a:rPr>
+              <a:t>marco</a:t>
+            </a:r>
+          </a:p>
+          <a:p>
+            <a:pPr algn="l"/>
+            <a:r>
+              <a:rPr sz="1000">
+                <a:solidFill>
+                  <a:srgbClr val="20242E"/>
+                </a:solidFill>
+                <a:latin typeface="Inter"/>
+              </a:rPr>
+              <a:t>Es de color …</a:t>
+            </a:r>
+          </a:p>
+        </p:txBody>
+      </p:sp>
+      <p:sp>
+        <p:nvSpPr>
+          <p:cNvPr id="57" name="Tarjeta 13"/>
+          <p:cNvSpPr/>
+          <p:nvPr/>
+        </p:nvSpPr>
+        <p:spPr>
+          <a:xfrm>
+            <a:off x="3312414" y="5749290"/>
+            <a:ext cx="2708910" cy="898398"/>
+          </a:xfrm>
+          <a:prstGeom prst="roundRect">
+            <a:avLst>
+              <a:gd name="adj" fmla="val 6000"/>
+            </a:avLst>
+          </a:prstGeom>
+          <a:solidFill>
+            <a:srgbClr val="FFFFFF"/>
+          </a:solidFill>
+          <a:ln w="12700">
+            <a:solidFill>
+              <a:srgbClr val="E4E3DE"/>
+            </a:solidFill>
+          </a:ln>
+          <a:effectLst/>
+        </p:spPr>
+        <p:style>
+          <a:lnRef idx="1">
+            <a:schemeClr val="accent1"/>
+          </a:lnRef>
+          <a:fillRef idx="3">
+            <a:schemeClr val="accent1"/>
+          </a:fillRef>
+          <a:effectRef idx="2">
+            <a:schemeClr val="accent1"/>
+          </a:effectRef>
+          <a:fontRef idx="minor">
+            <a:schemeClr val="lt1"/>
+          </a:fontRef>
+        </p:style>
+        <p:txBody>
+          <a:bodyPr rtlCol="0" anchor="ctr"/>
+          <a:lstStyle/>
+          <a:p/>
+        </p:txBody>
+      </p:sp>
+      <p:sp>
+        <p:nvSpPr>
+          <p:cNvPr id="58" name="TarjetaTxt 13"/>
+          <p:cNvSpPr txBox="1"/>
+          <p:nvPr/>
+        </p:nvSpPr>
+        <p:spPr>
+          <a:xfrm>
+            <a:off x="3403854" y="5804154"/>
+            <a:ext cx="2526030" cy="788670"/>
+          </a:xfrm>
+          <a:prstGeom prst="rect">
+            <a:avLst/>
+          </a:prstGeom>
+          <a:noFill/>
+        </p:spPr>
+        <p:txBody>
+          <a:bodyPr wrap="square" anchor="t" lIns="45720" rIns="45720" tIns="27432" bIns="27432">
+            <a:normAutofit/>
+          </a:bodyPr>
+          <a:lstStyle/>
+          <a:p>
+            <a:pPr algn="l"/>
+            <a:r>
+              <a:rPr sz="1100" b="1">
+                <a:solidFill>
+                  <a:srgbClr val="157355"/>
+                </a:solidFill>
+                <a:latin typeface="Bricolage Grotesque"/>
+              </a:rPr>
+              <a:t>marco</a:t>
+            </a:r>
+          </a:p>
+          <a:p>
+            <a:pPr algn="l"/>
+            <a:r>
+              <a:rPr sz="1000">
+                <a:solidFill>
+                  <a:srgbClr val="20242E"/>
+                </a:solidFill>
+                <a:latin typeface="Inter"/>
+              </a:rPr>
+              <a:t>Está en la sopa.</a:t>
+            </a:r>
+          </a:p>
+        </p:txBody>
+      </p:sp>
+      <p:sp>
+        <p:nvSpPr>
+          <p:cNvPr id="59" name="Tarjeta 14"/>
+          <p:cNvSpPr/>
+          <p:nvPr/>
+        </p:nvSpPr>
+        <p:spPr>
+          <a:xfrm>
+            <a:off x="6167628" y="5749290"/>
+            <a:ext cx="2708910" cy="898398"/>
+          </a:xfrm>
+          <a:prstGeom prst="roundRect">
+            <a:avLst>
+              <a:gd name="adj" fmla="val 6000"/>
+            </a:avLst>
+          </a:prstGeom>
+          <a:solidFill>
+            <a:srgbClr val="FFFFFF"/>
+          </a:solidFill>
+          <a:ln w="12700">
+            <a:solidFill>
+              <a:srgbClr val="E4E3DE"/>
+            </a:solidFill>
+          </a:ln>
+          <a:effectLst/>
+        </p:spPr>
+        <p:style>
+          <a:lnRef idx="1">
+            <a:schemeClr val="accent1"/>
+          </a:lnRef>
+          <a:fillRef idx="3">
+            <a:schemeClr val="accent1"/>
+          </a:fillRef>
+          <a:effectRef idx="2">
+            <a:schemeClr val="accent1"/>
+          </a:effectRef>
+          <a:fontRef idx="minor">
+            <a:schemeClr val="lt1"/>
+          </a:fontRef>
+        </p:style>
+        <p:txBody>
+          <a:bodyPr rtlCol="0" anchor="ctr"/>
+          <a:lstStyle/>
+          <a:p/>
+        </p:txBody>
+      </p:sp>
+      <p:sp>
+        <p:nvSpPr>
+          <p:cNvPr id="60" name="TarjetaTxt 14"/>
+          <p:cNvSpPr txBox="1"/>
+          <p:nvPr/>
+        </p:nvSpPr>
+        <p:spPr>
+          <a:xfrm>
+            <a:off x="6259068" y="5804154"/>
+            <a:ext cx="2526030" cy="788670"/>
+          </a:xfrm>
+          <a:prstGeom prst="rect">
+            <a:avLst/>
+          </a:prstGeom>
+          <a:noFill/>
+        </p:spPr>
+        <p:txBody>
+          <a:bodyPr wrap="square" anchor="t" lIns="45720" rIns="45720" tIns="27432" bIns="27432">
+            <a:normAutofit/>
+          </a:bodyPr>
+          <a:lstStyle/>
+          <a:p>
+            <a:pPr algn="l"/>
+            <a:r>
+              <a:rPr sz="1100" b="1">
+                <a:solidFill>
+                  <a:srgbClr val="157355"/>
+                </a:solidFill>
+                <a:latin typeface="Bricolage Grotesque"/>
+              </a:rPr>
+              <a:t>marco</a:t>
+            </a:r>
+          </a:p>
+          <a:p>
+            <a:pPr algn="l"/>
+            <a:r>
+              <a:rPr sz="1000">
+                <a:solidFill>
+                  <a:srgbClr val="20242E"/>
+                </a:solidFill>
+                <a:latin typeface="Inter"/>
+              </a:rPr>
+              <a:t>Cuesta poco.</a:t>
+            </a:r>
+          </a:p>
+        </p:txBody>
+      </p:sp>
+      <p:sp>
+        <p:nvSpPr>
+          <p:cNvPr id="61" name="Tarjeta 15"/>
+          <p:cNvSpPr/>
+          <p:nvPr/>
+        </p:nvSpPr>
+        <p:spPr>
+          <a:xfrm>
+            <a:off x="9022842" y="5749290"/>
+            <a:ext cx="2708910" cy="898398"/>
+          </a:xfrm>
+          <a:prstGeom prst="roundRect">
+            <a:avLst>
+              <a:gd name="adj" fmla="val 6000"/>
+            </a:avLst>
+          </a:prstGeom>
+          <a:solidFill>
+            <a:srgbClr val="FFFFFF"/>
+          </a:solidFill>
+          <a:ln w="12700">
+            <a:solidFill>
+              <a:srgbClr val="E4E3DE"/>
+            </a:solidFill>
+          </a:ln>
+          <a:effectLst/>
+        </p:spPr>
+        <p:style>
+          <a:lnRef idx="1">
+            <a:schemeClr val="accent1"/>
+          </a:lnRef>
+          <a:fillRef idx="3">
+            <a:schemeClr val="accent1"/>
+          </a:fillRef>
+          <a:effectRef idx="2">
+            <a:schemeClr val="accent1"/>
+          </a:effectRef>
+          <a:fontRef idx="minor">
+            <a:schemeClr val="lt1"/>
+          </a:fontRef>
+        </p:style>
+        <p:txBody>
+          <a:bodyPr rtlCol="0" anchor="ctr"/>
+          <a:lstStyle/>
+          <a:p/>
+        </p:txBody>
+      </p:sp>
+      <p:sp>
+        <p:nvSpPr>
+          <p:cNvPr id="62" name="TarjetaTxt 15"/>
+          <p:cNvSpPr txBox="1"/>
+          <p:nvPr/>
+        </p:nvSpPr>
+        <p:spPr>
+          <a:xfrm>
+            <a:off x="9114282" y="5804154"/>
+            <a:ext cx="2526030" cy="788670"/>
+          </a:xfrm>
+          <a:prstGeom prst="rect">
+            <a:avLst/>
+          </a:prstGeom>
+          <a:noFill/>
+        </p:spPr>
+        <p:txBody>
+          <a:bodyPr wrap="square" anchor="t" lIns="45720" rIns="45720" tIns="27432" bIns="27432">
+            <a:normAutofit/>
+          </a:bodyPr>
+          <a:lstStyle/>
+          <a:p>
+            <a:pPr algn="l"/>
+            <a:r>
+              <a:rPr sz="1100" b="1">
+                <a:solidFill>
+                  <a:srgbClr val="157355"/>
+                </a:solidFill>
+                <a:latin typeface="Bricolage Grotesque"/>
+              </a:rPr>
+              <a:t>marco</a:t>
+            </a:r>
+          </a:p>
+          <a:p>
+            <a:pPr algn="l"/>
+            <a:r>
+              <a:rPr sz="1000">
+                <a:solidFill>
+                  <a:srgbClr val="20242E"/>
+                </a:solidFill>
+                <a:latin typeface="Inter"/>
+              </a:rPr>
+              <a:t>Es dulce, no salado.</a:t>
+            </a:r>
+          </a:p>
+        </p:txBody>
+      </p:sp>
+    </p:spTree>
+  </p:cSld>
+  <p:clrMapOvr>
+    <a:masterClrMapping/>
+  </p:clrMapOvr>
+  <p:timing>
+    <p:tnLst>
+      <p:par>
+        <p:cTn id="1" dur="indefinite" restart="never" nodeType="tmRoot">
+          <p:childTnLst>
+            <p:seq concurrent="1" nextAc="seek">
+              <p:cTn id="2" dur="indefinite" nodeType="mainSeq">
+                <p:childTnLst>
+                  <p:par>
+                    <p:cTn id="5" fill="hold">
+                      <p:stCondLst>
+                        <p:cond delay="indefinite"/>
+                      </p:stCondLst>
+                      <p:childTnLst>
+                        <p:par>
+                          <p:cTn id="6" fill="hold">
+                            <p:stCondLst>
+                              <p:cond delay="0"/>
+                            </p:stCondLst>
+                            <p:childTnLst>
+                              <p:par>
+                                <p:cTn id="7" presetID="10" presetClass="entr" presetSubtype="0" fill="hold" grpId="0" nodeType="clickEffect">
+                                  <p:stCondLst>
+                                    <p:cond delay="0"/>
+                                  </p:stCondLst>
+                                  <p:childTnLst>
+                                    <p:set>
+                                      <p:cBhvr>
+                                        <p:cTn id="8" dur="1" fill="hold">
+                                          <p:stCondLst>
+                                            <p:cond delay="0"/>
+                                          </p:stCondLst>
+                                        </p:cTn>
+                                        <p:tgtEl>
+                                          <p:spTgt spid="13"/>
+                                        </p:tgtEl>
+                                        <p:attrNameLst>
+                                          <p:attrName>style.visibility</p:attrName>
+                                        </p:attrNameLst>
+                                      </p:cBhvr>
+                                      <p:to>
+                                        <p:strVal val="visible"/>
+                                      </p:to>
+                                    </p:set>
+                                    <p:animEffect transition="in" filter="fade">
+                                      <p:cBhvr>
+                                        <p:cTn id="9" dur="500"/>
+                                        <p:tgtEl>
+                                          <p:spTgt spid="13"/>
+                                        </p:tgtEl>
+                                      </p:cBhvr>
+                                    </p:animEffect>
+                                  </p:childTnLst>
+                                </p:cTn>
+                              </p:par>
+                            </p:childTnLst>
+                          </p:cTn>
+                        </p:par>
+                      </p:childTnLst>
+                    </p:cTn>
+                  </p:par>
+                  <p:par>
+                    <p:cTn id="10" fill="hold">
+                      <p:stCondLst>
+                        <p:cond delay="indefinite"/>
+                      </p:stCondLst>
+                      <p:childTnLst>
+                        <p:par>
+                          <p:cTn id="11" fill="hold">
+                            <p:stCondLst>
+                              <p:cond delay="0"/>
+                            </p:stCondLst>
+                            <p:childTnLst>
+                              <p:par>
+                                <p:cTn id="12" presetID="10" presetClass="entr" presetSubtype="0" fill="hold" grpId="0" nodeType="clickEffect">
+                                  <p:stCondLst>
+                                    <p:cond delay="0"/>
+                                  </p:stCondLst>
+                                  <p:childTnLst>
+                                    <p:set>
+                                      <p:cBhvr>
+                                        <p:cTn id="13" dur="1" fill="hold">
+                                          <p:stCondLst>
+                                            <p:cond delay="0"/>
+                                          </p:stCondLst>
+                                        </p:cTn>
+                                        <p:tgtEl>
+                                          <p:spTgt spid="14"/>
+                                        </p:tgtEl>
+                                        <p:attrNameLst>
+                                          <p:attrName>style.visibility</p:attrName>
+                                        </p:attrNameLst>
+                                      </p:cBhvr>
+                                      <p:to>
+                                        <p:strVal val="visible"/>
+                                      </p:to>
+                                    </p:set>
+                                    <p:animEffect transition="in" filter="fade">
+                                      <p:cBhvr>
+                                        <p:cTn id="14" dur="500"/>
+                                        <p:tgtEl>
+                                          <p:spTgt spid="14"/>
+                                        </p:tgtEl>
+                                      </p:cBhvr>
+                                    </p:animEffect>
+                                  </p:childTnLst>
+                                </p:cTn>
+                              </p:par>
+                            </p:childTnLst>
+                          </p:cTn>
+                        </p:par>
+                      </p:childTnLst>
+                    </p:cTn>
+                  </p:par>
+                  <p:par>
+                    <p:cTn id="15" fill="hold">
+                      <p:stCondLst>
+                        <p:cond delay="indefinite"/>
+                      </p:stCondLst>
+                      <p:childTnLst>
+                        <p:par>
+                          <p:cTn id="16" fill="hold">
+                            <p:stCondLst>
+                              <p:cond delay="0"/>
+                            </p:stCondLst>
+                            <p:childTnLst>
+                              <p:par>
+                                <p:cTn id="17" presetID="10" presetClass="entr" presetSubtype="0" fill="hold" grpId="0" nodeType="clickEffect">
+                                  <p:stCondLst>
+                                    <p:cond delay="0"/>
+                                  </p:stCondLst>
+                                  <p:childTnLst>
+                                    <p:set>
+                                      <p:cBhvr>
+                                        <p:cTn id="18" dur="1" fill="hold">
+                                          <p:stCondLst>
+                                            <p:cond delay="0"/>
+                                          </p:stCondLst>
+                                        </p:cTn>
+                                        <p:tgtEl>
+                                          <p:spTgt spid="17"/>
+                                        </p:tgtEl>
+                                        <p:attrNameLst>
+                                          <p:attrName>style.visibility</p:attrName>
+                                        </p:attrNameLst>
+                                      </p:cBhvr>
+                                      <p:to>
+                                        <p:strVal val="visible"/>
+                                      </p:to>
+                                    </p:set>
+                                    <p:animEffect transition="in" filter="fade">
+                                      <p:cBhvr>
+                                        <p:cTn id="19" dur="500"/>
+                                        <p:tgtEl>
+                                          <p:spTgt spid="17"/>
+                                        </p:tgtEl>
+                                      </p:cBhvr>
+                                    </p:animEffect>
+                                  </p:childTnLst>
+                                </p:cTn>
+                              </p:par>
+                            </p:childTnLst>
+                          </p:cTn>
+                        </p:par>
+                      </p:childTnLst>
+                    </p:cTn>
+                  </p:par>
+                  <p:par>
+                    <p:cTn id="20" fill="hold">
+                      <p:stCondLst>
+                        <p:cond delay="indefinite"/>
+                      </p:stCondLst>
+                      <p:childTnLst>
+                        <p:par>
+                          <p:cTn id="21" fill="hold">
+                            <p:stCondLst>
+                              <p:cond delay="0"/>
+                            </p:stCondLst>
+                            <p:childTnLst>
+                              <p:par>
+                                <p:cTn id="22" presetID="10" presetClass="entr" presetSubtype="0" fill="hold" grpId="0" nodeType="clickEffect">
+                                  <p:stCondLst>
+                                    <p:cond delay="0"/>
+                                  </p:stCondLst>
+                                  <p:childTnLst>
+                                    <p:set>
+                                      <p:cBhvr>
+                                        <p:cTn id="23" dur="1" fill="hold">
+                                          <p:stCondLst>
+                                            <p:cond delay="0"/>
+                                          </p:stCondLst>
+                                        </p:cTn>
+                                        <p:tgtEl>
+                                          <p:spTgt spid="18"/>
+                                        </p:tgtEl>
+                                        <p:attrNameLst>
+                                          <p:attrName>style.visibility</p:attrName>
+                                        </p:attrNameLst>
+                                      </p:cBhvr>
+                                      <p:to>
+                                        <p:strVal val="visible"/>
+                                      </p:to>
+                                    </p:set>
+                                    <p:animEffect transition="in" filter="fade">
+                                      <p:cBhvr>
+                                        <p:cTn id="24" dur="500"/>
+                                        <p:tgtEl>
+                                          <p:spTgt spid="18"/>
+                                        </p:tgtEl>
+                                      </p:cBhvr>
+                                    </p:animEffect>
+                                  </p:childTnLst>
+                                </p:cTn>
+                              </p:par>
+                            </p:childTnLst>
+                          </p:cTn>
+                        </p:par>
+                      </p:childTnLst>
+                    </p:cTn>
+                  </p:par>
+                  <p:par>
+                    <p:cTn id="25" fill="hold">
+                      <p:stCondLst>
+                        <p:cond delay="indefinite"/>
+                      </p:stCondLst>
+                      <p:childTnLst>
+                        <p:par>
+                          <p:cTn id="26" fill="hold">
+                            <p:stCondLst>
+                              <p:cond delay="0"/>
+                            </p:stCondLst>
+                            <p:childTnLst>
+                              <p:par>
+                                <p:cTn id="27" presetID="10" presetClass="entr" presetSubtype="0" fill="hold" grpId="0" nodeType="clickEffect">
+                                  <p:stCondLst>
+                                    <p:cond delay="0"/>
+                                  </p:stCondLst>
+                                  <p:childTnLst>
+                                    <p:set>
+                                      <p:cBhvr>
+                                        <p:cTn id="28" dur="1" fill="hold">
+                                          <p:stCondLst>
+                                            <p:cond delay="0"/>
+                                          </p:stCondLst>
+                                        </p:cTn>
+                                        <p:tgtEl>
+                                          <p:spTgt spid="21"/>
+                                        </p:tgtEl>
+                                        <p:attrNameLst>
+                                          <p:attrName>style.visibility</p:attrName>
+                                        </p:attrNameLst>
+                                      </p:cBhvr>
+                                      <p:to>
+                                        <p:strVal val="visible"/>
+                                      </p:to>
+                                    </p:set>
+                                    <p:animEffect transition="in" filter="fade">
+                                      <p:cBhvr>
+                                        <p:cTn id="29" dur="500"/>
+                                        <p:tgtEl>
+                                          <p:spTgt spid="21"/>
+                                        </p:tgtEl>
+                                      </p:cBhvr>
+                                    </p:animEffect>
+                                  </p:childTnLst>
+                                </p:cTn>
+                              </p:par>
+                            </p:childTnLst>
+                          </p:cTn>
+                        </p:par>
+                      </p:childTnLst>
+                    </p:cTn>
+                  </p:par>
+                  <p:par>
+                    <p:cTn id="30" fill="hold">
+                      <p:stCondLst>
+                        <p:cond delay="indefinite"/>
+                      </p:stCondLst>
+                      <p:childTnLst>
+                        <p:par>
+                          <p:cTn id="31" fill="hold">
+                            <p:stCondLst>
+                              <p:cond delay="0"/>
+                            </p:stCondLst>
+                            <p:childTnLst>
+                              <p:par>
+                                <p:cTn id="32" presetID="10" presetClass="entr" presetSubtype="0" fill="hold" grpId="0" nodeType="clickEffect">
+                                  <p:stCondLst>
+                                    <p:cond delay="0"/>
+                                  </p:stCondLst>
+                                  <p:childTnLst>
+                                    <p:set>
+                                      <p:cBhvr>
+                                        <p:cTn id="33" dur="1" fill="hold">
+                                          <p:stCondLst>
+                                            <p:cond delay="0"/>
+                                          </p:stCondLst>
+                                        </p:cTn>
+                                        <p:tgtEl>
+                                          <p:spTgt spid="22"/>
+                                        </p:tgtEl>
+                                        <p:attrNameLst>
+                                          <p:attrName>style.visibility</p:attrName>
+                                        </p:attrNameLst>
+                                      </p:cBhvr>
+                                      <p:to>
+                                        <p:strVal val="visible"/>
+                                      </p:to>
+                                    </p:set>
+                                    <p:animEffect transition="in" filter="fade">
+                                      <p:cBhvr>
+                                        <p:cTn id="34" dur="500"/>
+                                        <p:tgtEl>
+                                          <p:spTgt spid="22"/>
+                                        </p:tgtEl>
+                                      </p:cBhvr>
+                                    </p:animEffect>
+                                  </p:childTnLst>
+                                </p:cTn>
+                              </p:par>
+                            </p:childTnLst>
+                          </p:cTn>
+                        </p:par>
+                      </p:childTnLst>
+                    </p:cTn>
+                  </p:par>
+                  <p:par>
+                    <p:cTn id="35" fill="hold">
+                      <p:stCondLst>
+                        <p:cond delay="indefinite"/>
+                      </p:stCondLst>
+                      <p:childTnLst>
+                        <p:par>
+                          <p:cTn id="36" fill="hold">
+                            <p:stCondLst>
+                              <p:cond delay="0"/>
+                            </p:stCondLst>
+                            <p:childTnLst>
+                              <p:par>
+                                <p:cTn id="37" presetID="10" presetClass="entr" presetSubtype="0" fill="hold" grpId="0" nodeType="clickEffect">
+                                  <p:stCondLst>
+                                    <p:cond delay="0"/>
+                                  </p:stCondLst>
+                                  <p:childTnLst>
+                                    <p:set>
+                                      <p:cBhvr>
+                                        <p:cTn id="38" dur="1" fill="hold">
+                                          <p:stCondLst>
+                                            <p:cond delay="0"/>
+                                          </p:stCondLst>
+                                        </p:cTn>
+                                        <p:tgtEl>
+                                          <p:spTgt spid="25"/>
+                                        </p:tgtEl>
+                                        <p:attrNameLst>
+                                          <p:attrName>style.visibility</p:attrName>
+                                        </p:attrNameLst>
+                                      </p:cBhvr>
+                                      <p:to>
+                                        <p:strVal val="visible"/>
+                                      </p:to>
+                                    </p:set>
+                                    <p:animEffect transition="in" filter="fade">
+                                      <p:cBhvr>
+                                        <p:cTn id="39" dur="500"/>
+                                        <p:tgtEl>
+                                          <p:spTgt spid="25"/>
+                                        </p:tgtEl>
+                                      </p:cBhvr>
+                                    </p:animEffect>
+                                  </p:childTnLst>
+                                </p:cTn>
+                              </p:par>
+                            </p:childTnLst>
+                          </p:cTn>
+                        </p:par>
+                      </p:childTnLst>
+                    </p:cTn>
+                  </p:par>
+                  <p:par>
+                    <p:cTn id="40" fill="hold">
+                      <p:stCondLst>
+                        <p:cond delay="indefinite"/>
+                      </p:stCondLst>
+                      <p:childTnLst>
+                        <p:par>
+                          <p:cTn id="41" fill="hold">
+                            <p:stCondLst>
+                              <p:cond delay="0"/>
+                            </p:stCondLst>
+                            <p:childTnLst>
+                              <p:par>
+                                <p:cTn id="42" presetID="10" presetClass="entr" presetSubtype="0" fill="hold" grpId="0" nodeType="clickEffect">
+                                  <p:stCondLst>
+                                    <p:cond delay="0"/>
+                                  </p:stCondLst>
+                                  <p:childTnLst>
+                                    <p:set>
+                                      <p:cBhvr>
+                                        <p:cTn id="43" dur="1" fill="hold">
+                                          <p:stCondLst>
+                                            <p:cond delay="0"/>
+                                          </p:stCondLst>
+                                        </p:cTn>
+                                        <p:tgtEl>
+                                          <p:spTgt spid="26"/>
+                                        </p:tgtEl>
+                                        <p:attrNameLst>
+                                          <p:attrName>style.visibility</p:attrName>
+                                        </p:attrNameLst>
+                                      </p:cBhvr>
+                                      <p:to>
+                                        <p:strVal val="visible"/>
+                                      </p:to>
+                                    </p:set>
+                                    <p:animEffect transition="in" filter="fade">
+                                      <p:cBhvr>
+                                        <p:cTn id="44" dur="500"/>
+                                        <p:tgtEl>
+                                          <p:spTgt spid="26"/>
+                                        </p:tgtEl>
+                                      </p:cBhvr>
+                                    </p:animEffect>
+                                  </p:childTnLst>
+                                </p:cTn>
+                              </p:par>
+                            </p:childTnLst>
+                          </p:cTn>
+                        </p:par>
+                      </p:childTnLst>
+                    </p:cTn>
+                  </p:par>
+                  <p:par>
+                    <p:cTn id="45" fill="hold">
+                      <p:stCondLst>
+                        <p:cond delay="indefinite"/>
+                      </p:stCondLst>
+                      <p:childTnLst>
+                        <p:par>
+                          <p:cTn id="46" fill="hold">
+                            <p:stCondLst>
+                              <p:cond delay="0"/>
+                            </p:stCondLst>
+                            <p:childTnLst>
+                              <p:par>
+                                <p:cTn id="47" presetID="10" presetClass="entr" presetSubtype="0" fill="hold" grpId="0" nodeType="clickEffect">
+                                  <p:stCondLst>
+                                    <p:cond delay="0"/>
+                                  </p:stCondLst>
+                                  <p:childTnLst>
+                                    <p:set>
+                                      <p:cBhvr>
+                                        <p:cTn id="48" dur="1" fill="hold">
+                                          <p:stCondLst>
+                                            <p:cond delay="0"/>
+                                          </p:stCondLst>
+                                        </p:cTn>
+                                        <p:tgtEl>
+                                          <p:spTgt spid="29"/>
+                                        </p:tgtEl>
+                                        <p:attrNameLst>
+                                          <p:attrName>style.visibility</p:attrName>
+                                        </p:attrNameLst>
+                                      </p:cBhvr>
+                                      <p:to>
+                                        <p:strVal val="visible"/>
+                                      </p:to>
+                                    </p:set>
+                                    <p:animEffect transition="in" filter="fade">
+                                      <p:cBhvr>
+                                        <p:cTn id="49" dur="500"/>
+                                        <p:tgtEl>
+                                          <p:spTgt spid="29"/>
+                                        </p:tgtEl>
+                                      </p:cBhvr>
+                                    </p:animEffect>
+                                  </p:childTnLst>
+                                </p:cTn>
+                              </p:par>
+                            </p:childTnLst>
+                          </p:cTn>
+                        </p:par>
+                      </p:childTnLst>
+                    </p:cTn>
+                  </p:par>
+                  <p:par>
+                    <p:cTn id="50" fill="hold">
+                      <p:stCondLst>
+                        <p:cond delay="indefinite"/>
+                      </p:stCondLst>
+                      <p:childTnLst>
+                        <p:par>
+                          <p:cTn id="51" fill="hold">
+                            <p:stCondLst>
+                              <p:cond delay="0"/>
+                            </p:stCondLst>
+                            <p:childTnLst>
+                              <p:par>
+                                <p:cTn id="52" presetID="10" presetClass="entr" presetSubtype="0" fill="hold" grpId="0" nodeType="clickEffect">
+                                  <p:stCondLst>
+                                    <p:cond delay="0"/>
+                                  </p:stCondLst>
+                                  <p:childTnLst>
+                                    <p:set>
+                                      <p:cBhvr>
+                                        <p:cTn id="53" dur="1" fill="hold">
+                                          <p:stCondLst>
+                                            <p:cond delay="0"/>
+                                          </p:stCondLst>
+                                        </p:cTn>
+                                        <p:tgtEl>
+                                          <p:spTgt spid="30"/>
+                                        </p:tgtEl>
+                                        <p:attrNameLst>
+                                          <p:attrName>style.visibility</p:attrName>
+                                        </p:attrNameLst>
+                                      </p:cBhvr>
+                                      <p:to>
+                                        <p:strVal val="visible"/>
+                                      </p:to>
+                                    </p:set>
+                                    <p:animEffect transition="in" filter="fade">
+                                      <p:cBhvr>
+                                        <p:cTn id="54" dur="500"/>
+                                        <p:tgtEl>
+                                          <p:spTgt spid="30"/>
+                                        </p:tgtEl>
+                                      </p:cBhvr>
+                                    </p:animEffect>
+                                  </p:childTnLst>
+                                </p:cTn>
+                              </p:par>
+                            </p:childTnLst>
+                          </p:cTn>
+                        </p:par>
+                      </p:childTnLst>
+                    </p:cTn>
+                  </p:par>
+                  <p:par>
+                    <p:cTn id="55" fill="hold">
+                      <p:stCondLst>
+                        <p:cond delay="indefinite"/>
+                      </p:stCondLst>
+                      <p:childTnLst>
+                        <p:par>
+                          <p:cTn id="56" fill="hold">
+                            <p:stCondLst>
+                              <p:cond delay="0"/>
+                            </p:stCondLst>
+                            <p:childTnLst>
+                              <p:par>
+                                <p:cTn id="57" presetID="10" presetClass="entr" presetSubtype="0" fill="hold" grpId="0" nodeType="clickEffect">
+                                  <p:stCondLst>
+                                    <p:cond delay="0"/>
+                                  </p:stCondLst>
+                                  <p:childTnLst>
+                                    <p:set>
+                                      <p:cBhvr>
+                                        <p:cTn id="58" dur="1" fill="hold">
+                                          <p:stCondLst>
+                                            <p:cond delay="0"/>
+                                          </p:stCondLst>
+                                        </p:cTn>
+                                        <p:tgtEl>
+                                          <p:spTgt spid="33"/>
+                                        </p:tgtEl>
+                                        <p:attrNameLst>
+                                          <p:attrName>style.visibility</p:attrName>
+                                        </p:attrNameLst>
+                                      </p:cBhvr>
+                                      <p:to>
+                                        <p:strVal val="visible"/>
+                                      </p:to>
+                                    </p:set>
+                                    <p:animEffect transition="in" filter="fade">
+                                      <p:cBhvr>
+                                        <p:cTn id="59" dur="500"/>
+                                        <p:tgtEl>
+                                          <p:spTgt spid="33"/>
+                                        </p:tgtEl>
+                                      </p:cBhvr>
+                                    </p:animEffect>
+                                  </p:childTnLst>
+                                </p:cTn>
+                              </p:par>
+                            </p:childTnLst>
+                          </p:cTn>
+                        </p:par>
+                      </p:childTnLst>
+                    </p:cTn>
+                  </p:par>
+                  <p:par>
+                    <p:cTn id="60" fill="hold">
+                      <p:stCondLst>
+                        <p:cond delay="indefinite"/>
+                      </p:stCondLst>
+                      <p:childTnLst>
+                        <p:par>
+                          <p:cTn id="61" fill="hold">
+                            <p:stCondLst>
+                              <p:cond delay="0"/>
+                            </p:stCondLst>
+                            <p:childTnLst>
+                              <p:par>
+                                <p:cTn id="62" presetID="10" presetClass="entr" presetSubtype="0" fill="hold" grpId="0" nodeType="clickEffect">
+                                  <p:stCondLst>
+                                    <p:cond delay="0"/>
+                                  </p:stCondLst>
+                                  <p:childTnLst>
+                                    <p:set>
+                                      <p:cBhvr>
+                                        <p:cTn id="63" dur="1" fill="hold">
+                                          <p:stCondLst>
+                                            <p:cond delay="0"/>
+                                          </p:stCondLst>
+                                        </p:cTn>
+                                        <p:tgtEl>
+                                          <p:spTgt spid="34"/>
+                                        </p:tgtEl>
+                                        <p:attrNameLst>
+                                          <p:attrName>style.visibility</p:attrName>
+                                        </p:attrNameLst>
+                                      </p:cBhvr>
+                                      <p:to>
+                                        <p:strVal val="visible"/>
+                                      </p:to>
+                                    </p:set>
+                                    <p:animEffect transition="in" filter="fade">
+                                      <p:cBhvr>
+                                        <p:cTn id="64" dur="500"/>
+                                        <p:tgtEl>
+                                          <p:spTgt spid="34"/>
+                                        </p:tgtEl>
+                                      </p:cBhvr>
+                                    </p:animEffect>
+                                  </p:childTnLst>
+                                </p:cTn>
+                              </p:par>
+                            </p:childTnLst>
+                          </p:cTn>
+                        </p:par>
+                      </p:childTnLst>
+                    </p:cTn>
+                  </p:par>
+                  <p:par>
+                    <p:cTn id="65" fill="hold">
+                      <p:stCondLst>
+                        <p:cond delay="indefinite"/>
+                      </p:stCondLst>
+                      <p:childTnLst>
+                        <p:par>
+                          <p:cTn id="66" fill="hold">
+                            <p:stCondLst>
+                              <p:cond delay="0"/>
+                            </p:stCondLst>
+                            <p:childTnLst>
+                              <p:par>
+                                <p:cTn id="67" presetID="10" presetClass="entr" presetSubtype="0" fill="hold" grpId="0" nodeType="clickEffect">
+                                  <p:stCondLst>
+                                    <p:cond delay="0"/>
+                                  </p:stCondLst>
+                                  <p:childTnLst>
+                                    <p:set>
+                                      <p:cBhvr>
+                                        <p:cTn id="68" dur="1" fill="hold">
+                                          <p:stCondLst>
+                                            <p:cond delay="0"/>
+                                          </p:stCondLst>
+                                        </p:cTn>
+                                        <p:tgtEl>
+                                          <p:spTgt spid="37"/>
+                                        </p:tgtEl>
+                                        <p:attrNameLst>
+                                          <p:attrName>style.visibility</p:attrName>
+                                        </p:attrNameLst>
+                                      </p:cBhvr>
+                                      <p:to>
+                                        <p:strVal val="visible"/>
+                                      </p:to>
+                                    </p:set>
+                                    <p:animEffect transition="in" filter="fade">
+                                      <p:cBhvr>
+                                        <p:cTn id="69" dur="500"/>
+                                        <p:tgtEl>
+                                          <p:spTgt spid="37"/>
+                                        </p:tgtEl>
+                                      </p:cBhvr>
+                                    </p:animEffect>
+                                  </p:childTnLst>
+                                </p:cTn>
+                              </p:par>
+                            </p:childTnLst>
+                          </p:cTn>
+                        </p:par>
+                      </p:childTnLst>
+                    </p:cTn>
+                  </p:par>
+                  <p:par>
+                    <p:cTn id="70" fill="hold">
+                      <p:stCondLst>
+                        <p:cond delay="indefinite"/>
+                      </p:stCondLst>
+                      <p:childTnLst>
+                        <p:par>
+                          <p:cTn id="71" fill="hold">
+                            <p:stCondLst>
+                              <p:cond delay="0"/>
+                            </p:stCondLst>
+                            <p:childTnLst>
+                              <p:par>
+                                <p:cTn id="72" presetID="10" presetClass="entr" presetSubtype="0" fill="hold" grpId="0" nodeType="clickEffect">
+                                  <p:stCondLst>
+                                    <p:cond delay="0"/>
+                                  </p:stCondLst>
+                                  <p:childTnLst>
+                                    <p:set>
+                                      <p:cBhvr>
+                                        <p:cTn id="73" dur="1" fill="hold">
+                                          <p:stCondLst>
+                                            <p:cond delay="0"/>
+                                          </p:stCondLst>
+                                        </p:cTn>
+                                        <p:tgtEl>
+                                          <p:spTgt spid="38"/>
+                                        </p:tgtEl>
+                                        <p:attrNameLst>
+                                          <p:attrName>style.visibility</p:attrName>
+                                        </p:attrNameLst>
+                                      </p:cBhvr>
+                                      <p:to>
+                                        <p:strVal val="visible"/>
+                                      </p:to>
+                                    </p:set>
+                                    <p:animEffect transition="in" filter="fade">
+                                      <p:cBhvr>
+                                        <p:cTn id="74" dur="500"/>
+                                        <p:tgtEl>
+                                          <p:spTgt spid="38"/>
+                                        </p:tgtEl>
+                                      </p:cBhvr>
+                                    </p:animEffect>
+                                  </p:childTnLst>
+                                </p:cTn>
+                              </p:par>
+                            </p:childTnLst>
+                          </p:cTn>
+                        </p:par>
+                      </p:childTnLst>
+                    </p:cTn>
+                  </p:par>
+                  <p:par>
+                    <p:cTn id="75" fill="hold">
+                      <p:stCondLst>
+                        <p:cond delay="indefinite"/>
+                      </p:stCondLst>
+                      <p:childTnLst>
+                        <p:par>
+                          <p:cTn id="76" fill="hold">
+                            <p:stCondLst>
+                              <p:cond delay="0"/>
+                            </p:stCondLst>
+                            <p:childTnLst>
+                              <p:par>
+                                <p:cTn id="77" presetID="10" presetClass="entr" presetSubtype="0" fill="hold" grpId="0" nodeType="clickEffect">
+                                  <p:stCondLst>
+                                    <p:cond delay="0"/>
+                                  </p:stCondLst>
+                                  <p:childTnLst>
+                                    <p:set>
+                                      <p:cBhvr>
+                                        <p:cTn id="78" dur="1" fill="hold">
+                                          <p:stCondLst>
+                                            <p:cond delay="0"/>
+                                          </p:stCondLst>
+                                        </p:cTn>
+                                        <p:tgtEl>
+                                          <p:spTgt spid="41"/>
+                                        </p:tgtEl>
+                                        <p:attrNameLst>
+                                          <p:attrName>style.visibility</p:attrName>
+                                        </p:attrNameLst>
+                                      </p:cBhvr>
+                                      <p:to>
+                                        <p:strVal val="visible"/>
+                                      </p:to>
+                                    </p:set>
+                                    <p:animEffect transition="in" filter="fade">
+                                      <p:cBhvr>
+                                        <p:cTn id="79" dur="500"/>
+                                        <p:tgtEl>
+                                          <p:spTgt spid="41"/>
+                                        </p:tgtEl>
+                                      </p:cBhvr>
+                                    </p:animEffect>
+                                  </p:childTnLst>
+                                </p:cTn>
+                              </p:par>
+                            </p:childTnLst>
+                          </p:cTn>
+                        </p:par>
+                      </p:childTnLst>
+                    </p:cTn>
+                  </p:par>
+                  <p:par>
+                    <p:cTn id="80" fill="hold">
+                      <p:stCondLst>
+                        <p:cond delay="indefinite"/>
+                      </p:stCondLst>
+                      <p:childTnLst>
+                        <p:par>
+                          <p:cTn id="81" fill="hold">
+                            <p:stCondLst>
+                              <p:cond delay="0"/>
+                            </p:stCondLst>
+                            <p:childTnLst>
+                              <p:par>
+                                <p:cTn id="82" presetID="10" presetClass="entr" presetSubtype="0" fill="hold" grpId="0" nodeType="clickEffect">
+                                  <p:stCondLst>
+                                    <p:cond delay="0"/>
+                                  </p:stCondLst>
+                                  <p:childTnLst>
+                                    <p:set>
+                                      <p:cBhvr>
+                                        <p:cTn id="83" dur="1" fill="hold">
+                                          <p:stCondLst>
+                                            <p:cond delay="0"/>
+                                          </p:stCondLst>
+                                        </p:cTn>
+                                        <p:tgtEl>
+                                          <p:spTgt spid="42"/>
+                                        </p:tgtEl>
+                                        <p:attrNameLst>
+                                          <p:attrName>style.visibility</p:attrName>
+                                        </p:attrNameLst>
+                                      </p:cBhvr>
+                                      <p:to>
+                                        <p:strVal val="visible"/>
+                                      </p:to>
+                                    </p:set>
+                                    <p:animEffect transition="in" filter="fade">
+                                      <p:cBhvr>
+                                        <p:cTn id="84" dur="500"/>
+                                        <p:tgtEl>
+                                          <p:spTgt spid="42"/>
+                                        </p:tgtEl>
+                                      </p:cBhvr>
+                                    </p:animEffect>
+                                  </p:childTnLst>
+                                </p:cTn>
+                              </p:par>
+                            </p:childTnLst>
+                          </p:cTn>
+                        </p:par>
+                      </p:childTnLst>
+                    </p:cTn>
+                  </p:par>
+                  <p:par>
+                    <p:cTn id="85" fill="hold">
+                      <p:stCondLst>
+                        <p:cond delay="indefinite"/>
+                      </p:stCondLst>
+                      <p:childTnLst>
+                        <p:par>
+                          <p:cTn id="86" fill="hold">
+                            <p:stCondLst>
+                              <p:cond delay="0"/>
+                            </p:stCondLst>
+                            <p:childTnLst>
+                              <p:par>
+                                <p:cTn id="87" presetID="10" presetClass="entr" presetSubtype="0" fill="hold" grpId="0" nodeType="clickEffect">
+                                  <p:stCondLst>
+                                    <p:cond delay="0"/>
+                                  </p:stCondLst>
+                                  <p:childTnLst>
+                                    <p:set>
+                                      <p:cBhvr>
+                                        <p:cTn id="88" dur="1" fill="hold">
+                                          <p:stCondLst>
+                                            <p:cond delay="0"/>
+                                          </p:stCondLst>
+                                        </p:cTn>
+                                        <p:tgtEl>
+                                          <p:spTgt spid="45"/>
+                                        </p:tgtEl>
+                                        <p:attrNameLst>
+                                          <p:attrName>style.visibility</p:attrName>
+                                        </p:attrNameLst>
+                                      </p:cBhvr>
+                                      <p:to>
+                                        <p:strVal val="visible"/>
+                                      </p:to>
+                                    </p:set>
+                                    <p:animEffect transition="in" filter="fade">
+                                      <p:cBhvr>
+                                        <p:cTn id="89" dur="500"/>
+                                        <p:tgtEl>
+                                          <p:spTgt spid="45"/>
+                                        </p:tgtEl>
+                                      </p:cBhvr>
+                                    </p:animEffect>
+                                  </p:childTnLst>
+                                </p:cTn>
+                              </p:par>
+                            </p:childTnLst>
+                          </p:cTn>
+                        </p:par>
+                      </p:childTnLst>
+                    </p:cTn>
+                  </p:par>
+                  <p:par>
+                    <p:cTn id="90" fill="hold">
+                      <p:stCondLst>
+                        <p:cond delay="indefinite"/>
+                      </p:stCondLst>
+                      <p:childTnLst>
+                        <p:par>
+                          <p:cTn id="91" fill="hold">
+                            <p:stCondLst>
+                              <p:cond delay="0"/>
+                            </p:stCondLst>
+                            <p:childTnLst>
+                              <p:par>
+                                <p:cTn id="92" presetID="10" presetClass="entr" presetSubtype="0" fill="hold" grpId="0" nodeType="clickEffect">
+                                  <p:stCondLst>
+                                    <p:cond delay="0"/>
+                                  </p:stCondLst>
+                                  <p:childTnLst>
+                                    <p:set>
+                                      <p:cBhvr>
+                                        <p:cTn id="93" dur="1" fill="hold">
+                                          <p:stCondLst>
+                                            <p:cond delay="0"/>
+                                          </p:stCondLst>
+                                        </p:cTn>
+                                        <p:tgtEl>
+                                          <p:spTgt spid="46"/>
+                                        </p:tgtEl>
+                                        <p:attrNameLst>
+                                          <p:attrName>style.visibility</p:attrName>
+                                        </p:attrNameLst>
+                                      </p:cBhvr>
+                                      <p:to>
+                                        <p:strVal val="visible"/>
+                                      </p:to>
+                                    </p:set>
+                                    <p:animEffect transition="in" filter="fade">
+                                      <p:cBhvr>
+                                        <p:cTn id="94" dur="500"/>
+                                        <p:tgtEl>
+                                          <p:spTgt spid="46"/>
+                                        </p:tgtEl>
+                                      </p:cBhvr>
+                                    </p:animEffect>
+                                  </p:childTnLst>
+                                </p:cTn>
+                              </p:par>
+                            </p:childTnLst>
+                          </p:cTn>
+                        </p:par>
+                      </p:childTnLst>
+                    </p:cTn>
+                  </p:par>
+                  <p:par>
+                    <p:cTn id="95" fill="hold">
+                      <p:stCondLst>
+                        <p:cond delay="indefinite"/>
+                      </p:stCondLst>
+                      <p:childTnLst>
+                        <p:par>
+                          <p:cTn id="96" fill="hold">
+                            <p:stCondLst>
+                              <p:cond delay="0"/>
+                            </p:stCondLst>
+                            <p:childTnLst>
+                              <p:par>
+                                <p:cTn id="97" presetID="10" presetClass="entr" presetSubtype="0" fill="hold" grpId="0" nodeType="clickEffect">
+                                  <p:stCondLst>
+                                    <p:cond delay="0"/>
+                                  </p:stCondLst>
+                                  <p:childTnLst>
+                                    <p:set>
+                                      <p:cBhvr>
+                                        <p:cTn id="98" dur="1" fill="hold">
+                                          <p:stCondLst>
+                                            <p:cond delay="0"/>
+                                          </p:stCondLst>
+                                        </p:cTn>
+                                        <p:tgtEl>
+                                          <p:spTgt spid="49"/>
+                                        </p:tgtEl>
+                                        <p:attrNameLst>
+                                          <p:attrName>style.visibility</p:attrName>
+                                        </p:attrNameLst>
+                                      </p:cBhvr>
+                                      <p:to>
+                                        <p:strVal val="visible"/>
+                                      </p:to>
+                                    </p:set>
+                                    <p:animEffect transition="in" filter="fade">
+                                      <p:cBhvr>
+                                        <p:cTn id="99" dur="500"/>
+                                        <p:tgtEl>
+                                          <p:spTgt spid="49"/>
+                                        </p:tgtEl>
+                                      </p:cBhvr>
+                                    </p:animEffect>
+                                  </p:childTnLst>
+                                </p:cTn>
+                              </p:par>
+                            </p:childTnLst>
+                          </p:cTn>
+                        </p:par>
+                      </p:childTnLst>
+                    </p:cTn>
+                  </p:par>
+                  <p:par>
+                    <p:cTn id="100" fill="hold">
+                      <p:stCondLst>
+                        <p:cond delay="indefinite"/>
+                      </p:stCondLst>
+                      <p:childTnLst>
+                        <p:par>
+                          <p:cTn id="101" fill="hold">
+                            <p:stCondLst>
+                              <p:cond delay="0"/>
+                            </p:stCondLst>
+                            <p:childTnLst>
+                              <p:par>
+                                <p:cTn id="102" presetID="10" presetClass="entr" presetSubtype="0" fill="hold" grpId="0" nodeType="clickEffect">
+                                  <p:stCondLst>
+                                    <p:cond delay="0"/>
+                                  </p:stCondLst>
+                                  <p:childTnLst>
+                                    <p:set>
+                                      <p:cBhvr>
+                                        <p:cTn id="103" dur="1" fill="hold">
+                                          <p:stCondLst>
+                                            <p:cond delay="0"/>
+                                          </p:stCondLst>
+                                        </p:cTn>
+                                        <p:tgtEl>
+                                          <p:spTgt spid="50"/>
+                                        </p:tgtEl>
+                                        <p:attrNameLst>
+                                          <p:attrName>style.visibility</p:attrName>
+                                        </p:attrNameLst>
+                                      </p:cBhvr>
+                                      <p:to>
+                                        <p:strVal val="visible"/>
+                                      </p:to>
+                                    </p:set>
+                                    <p:animEffect transition="in" filter="fade">
+                                      <p:cBhvr>
+                                        <p:cTn id="104" dur="500"/>
+                                        <p:tgtEl>
+                                          <p:spTgt spid="50"/>
+                                        </p:tgtEl>
+                                      </p:cBhvr>
+                                    </p:animEffect>
+                                  </p:childTnLst>
+                                </p:cTn>
+                              </p:par>
+                            </p:childTnLst>
+                          </p:cTn>
+                        </p:par>
+                      </p:childTnLst>
+                    </p:cTn>
+                  </p:par>
+                </p:childTnLst>
+              </p:cTn>
+              <p:prevCondLst>
+                <p:cond evt="onPrev" delay="0">
+                  <p:tgtEl>
+                    <p:sldTgt/>
+                  </p:tgtEl>
+                </p:cond>
+              </p:prevCondLst>
+              <p:nextCondLst>
+                <p:cond evt="onNext" delay="0">
+                  <p:tgtEl>
+                    <p:sldTgt/>
+                  </p:tgtEl>
+                </p:cond>
+              </p:nextCondLst>
+            </p:seq>
+          </p:childTnLst>
+        </p:cTn>
+      </p:par>
+    </p:tnLst>
+  </p:timing>
+</p:sld>
+</file>
+
+<file path=ppt/slides/slide23.xml><?xml version="1.0" encoding="utf-8"?>
+<p:sld xmlns:a="http://schemas.openxmlformats.org/drawingml/2006/main" xmlns:p="http://schemas.openxmlformats.org/presentationml/2006/main" xmlns:r="http://schemas.openxmlformats.org/officeDocument/2006/relationships">
+  <p:cSld>
+    <p:spTree>
+      <p:nvGrpSpPr>
+        <p:cNvPr id="1" name=""/>
+        <p:cNvGrpSpPr/>
+        <p:nvPr/>
+      </p:nvGrpSpPr>
+      <p:grpSpPr/>
+      <p:sp>
+        <p:nvSpPr>
+          <p:cNvPr id="2" name="Fondo"/>
+          <p:cNvSpPr/>
+          <p:nvPr/>
+        </p:nvSpPr>
+        <p:spPr>
+          <a:xfrm>
+            <a:off x="0" y="0"/>
+            <a:ext cx="12191695" cy="6858000"/>
+          </a:xfrm>
+          <a:prstGeom prst="rect">
+            <a:avLst/>
+          </a:prstGeom>
+          <a:solidFill>
+            <a:srgbClr val="FCFBF8"/>
+          </a:solidFill>
+          <a:ln>
+            <a:noFill/>
+          </a:ln>
+          <a:effectLst/>
+        </p:spPr>
+        <p:style>
+          <a:lnRef idx="1">
+            <a:schemeClr val="accent1"/>
+          </a:lnRef>
+          <a:fillRef idx="3">
+            <a:schemeClr val="accent1"/>
+          </a:fillRef>
+          <a:effectRef idx="2">
+            <a:schemeClr val="accent1"/>
+          </a:effectRef>
+          <a:fontRef idx="minor">
+            <a:schemeClr val="lt1"/>
+          </a:fontRef>
+        </p:style>
+        <p:txBody>
+          <a:bodyPr rtlCol="0" anchor="ctr"/>
+          <a:lstStyle/>
+          <a:p/>
+        </p:txBody>
+      </p:sp>
+      <p:sp>
+        <p:nvSpPr>
+          <p:cNvPr id="3" name="Cabecera"/>
+          <p:cNvSpPr/>
+          <p:nvPr/>
+        </p:nvSpPr>
+        <p:spPr>
+          <a:xfrm>
+            <a:off x="0" y="0"/>
+            <a:ext cx="12191695" cy="1078992"/>
+          </a:xfrm>
+          <a:prstGeom prst="rect">
+            <a:avLst/>
+          </a:prstGeom>
+          <a:solidFill>
+            <a:srgbClr val="1E9E74"/>
+          </a:solidFill>
+          <a:ln>
+            <a:noFill/>
+          </a:ln>
+          <a:effectLst/>
+        </p:spPr>
+        <p:style>
+          <a:lnRef idx="1">
+            <a:schemeClr val="accent1"/>
+          </a:lnRef>
+          <a:fillRef idx="3">
+            <a:schemeClr val="accent1"/>
+          </a:fillRef>
+          <a:effectRef idx="2">
+            <a:schemeClr val="accent1"/>
+          </a:effectRef>
+          <a:fontRef idx="minor">
+            <a:schemeClr val="lt1"/>
+          </a:fontRef>
+        </p:style>
+        <p:txBody>
+          <a:bodyPr rtlCol="0" anchor="ctr"/>
+          <a:lstStyle/>
+          <a:p/>
+        </p:txBody>
+      </p:sp>
+      <p:sp>
+        <p:nvSpPr>
+          <p:cNvPr id="4" name="Chip"/>
+          <p:cNvSpPr/>
+          <p:nvPr/>
+        </p:nvSpPr>
+        <p:spPr>
+          <a:xfrm>
+            <a:off x="457200" y="182880"/>
+            <a:ext cx="3017520" cy="292608"/>
+          </a:xfrm>
+          <a:prstGeom prst="roundRect">
+            <a:avLst>
+              <a:gd name="adj" fmla="val 50000"/>
+            </a:avLst>
+          </a:prstGeom>
+          <a:solidFill>
+            <a:srgbClr val="FFFFFF"/>
+          </a:solidFill>
+          <a:ln>
+            <a:noFill/>
+          </a:ln>
+          <a:effectLst/>
+        </p:spPr>
+        <p:style>
+          <a:lnRef idx="1">
+            <a:schemeClr val="accent1"/>
+          </a:lnRef>
+          <a:fillRef idx="3">
+            <a:schemeClr val="accent1"/>
+          </a:fillRef>
+          <a:effectRef idx="2">
+            <a:schemeClr val="accent1"/>
+          </a:effectRef>
+          <a:fontRef idx="minor">
+            <a:schemeClr val="lt1"/>
+          </a:fontRef>
+        </p:style>
+        <p:txBody>
+          <a:bodyPr rtlCol="0" anchor="ctr"/>
+          <a:lstStyle/>
+          <a:p/>
+        </p:txBody>
+      </p:sp>
+      <p:sp>
+        <p:nvSpPr>
+          <p:cNvPr id="5" name="ChipTxt"/>
+          <p:cNvSpPr txBox="1"/>
+          <p:nvPr/>
+        </p:nvSpPr>
+        <p:spPr>
+          <a:xfrm>
+            <a:off x="457200" y="173736"/>
+            <a:ext cx="3017520" cy="310896"/>
+          </a:xfrm>
+          <a:prstGeom prst="rect">
+            <a:avLst/>
+          </a:prstGeom>
+          <a:noFill/>
+        </p:spPr>
+        <p:txBody>
+          <a:bodyPr wrap="square" anchor="ctr" lIns="45720" rIns="45720" tIns="27432" bIns="27432">
+            <a:normAutofit/>
+          </a:bodyPr>
+          <a:lstStyle/>
+          <a:p>
+            <a:pPr algn="ctr"/>
+            <a:r>
+              <a:rPr sz="950" b="1">
+                <a:solidFill>
+                  <a:srgbClr val="157355"/>
+                </a:solidFill>
+                <a:latin typeface="Inter"/>
+              </a:rPr>
+              <a:t>RETO 8 · ONDERHANDELING &amp; DILEMMA</a:t>
+            </a:r>
+          </a:p>
+        </p:txBody>
+      </p:sp>
+      <p:sp>
+        <p:nvSpPr>
+          <p:cNvPr id="6" name="Titulo"/>
+          <p:cNvSpPr txBox="1"/>
+          <p:nvPr/>
+        </p:nvSpPr>
+        <p:spPr>
+          <a:xfrm>
+            <a:off x="457200" y="502920"/>
+            <a:ext cx="8412480" cy="475488"/>
+          </a:xfrm>
+          <a:prstGeom prst="rect">
+            <a:avLst/>
+          </a:prstGeom>
+          <a:noFill/>
+        </p:spPr>
+        <p:txBody>
+          <a:bodyPr wrap="square" anchor="t" lIns="45720" rIns="45720" tIns="27432" bIns="27432">
+            <a:normAutofit/>
+          </a:bodyPr>
+          <a:lstStyle/>
+          <a:p>
+            <a:pPr algn="l"/>
+            <a:r>
+              <a:rPr sz="2700" b="1">
+                <a:solidFill>
+                  <a:srgbClr val="FFFFFF"/>
+                </a:solidFill>
+                <a:latin typeface="Bricolage Grotesque"/>
+              </a:rPr>
+              <a:t>La sobremesa</a:t>
+            </a:r>
+          </a:p>
+        </p:txBody>
+      </p:sp>
+      <p:sp>
+        <p:nvSpPr>
+          <p:cNvPr id="7" name="Badges"/>
+          <p:cNvSpPr txBox="1"/>
+          <p:nvPr/>
+        </p:nvSpPr>
+        <p:spPr>
+          <a:xfrm>
+            <a:off x="9052560" y="256032"/>
+            <a:ext cx="2651760" cy="640080"/>
+          </a:xfrm>
+          <a:prstGeom prst="rect">
+            <a:avLst/>
+          </a:prstGeom>
+          <a:noFill/>
+        </p:spPr>
+        <p:txBody>
+          <a:bodyPr wrap="square" anchor="t" lIns="45720" rIns="45720" tIns="27432" bIns="27432">
+            <a:normAutofit/>
+          </a:bodyPr>
+          <a:lstStyle/>
+          <a:p>
+            <a:pPr algn="r"/>
+            <a:r>
+              <a:rPr sz="1000">
+                <a:solidFill>
+                  <a:srgbClr val="E4F4EE"/>
+                </a:solidFill>
+                <a:latin typeface="Inter"/>
+              </a:rPr>
+              <a:t>👨‍👩‍👧 En grupos</a:t>
+            </a:r>
+          </a:p>
+          <a:p>
+            <a:pPr algn="r"/>
+            <a:r>
+              <a:rPr sz="1000">
+                <a:solidFill>
+                  <a:srgbClr val="E4F4EE"/>
+                </a:solidFill>
+                <a:latin typeface="Inter"/>
+              </a:rPr>
+              <a:t>± 15 min · ★★★</a:t>
+            </a:r>
+          </a:p>
+        </p:txBody>
+      </p:sp>
+      <p:sp>
+        <p:nvSpPr>
+          <p:cNvPr id="8" name="Gancho"/>
+          <p:cNvSpPr txBox="1"/>
+          <p:nvPr/>
+        </p:nvSpPr>
+        <p:spPr>
+          <a:xfrm>
+            <a:off x="457200" y="1225296"/>
+            <a:ext cx="11274552" cy="566928"/>
+          </a:xfrm>
+          <a:prstGeom prst="rect">
+            <a:avLst/>
+          </a:prstGeom>
+          <a:noFill/>
+        </p:spPr>
+        <p:txBody>
+          <a:bodyPr wrap="square" anchor="t" lIns="45720" rIns="45720" tIns="27432" bIns="27432">
+            <a:normAutofit/>
+          </a:bodyPr>
+          <a:lstStyle/>
+          <a:p>
+            <a:pPr algn="l"/>
+            <a:r>
+              <a:rPr sz="1600" b="1">
+                <a:solidFill>
+                  <a:srgbClr val="157355"/>
+                </a:solidFill>
+                <a:latin typeface="Bricolage Grotesque"/>
+              </a:rPr>
+              <a:t>Habéis cenado bien. Ahora llega la cuenta.</a:t>
+            </a:r>
+          </a:p>
+          <a:p>
+            <a:pPr algn="l"/>
+            <a:r>
+              <a:rPr sz="1100" i="1">
+                <a:solidFill>
+                  <a:srgbClr val="6A6E78"/>
+                </a:solidFill>
+                <a:latin typeface="Inter"/>
+              </a:rPr>
+              <a:t>Jullie hebben goed gegeten. Nu komt de rekening.</a:t>
+            </a:r>
+          </a:p>
+        </p:txBody>
+      </p:sp>
+      <p:sp>
+        <p:nvSpPr>
+          <p:cNvPr id="9" name="ReglaCaja"/>
+          <p:cNvSpPr/>
+          <p:nvPr/>
+        </p:nvSpPr>
+        <p:spPr>
+          <a:xfrm>
+            <a:off x="457200" y="1847088"/>
+            <a:ext cx="11274552" cy="658368"/>
+          </a:xfrm>
+          <a:prstGeom prst="roundRect">
+            <a:avLst>
+              <a:gd name="adj" fmla="val 5000"/>
+            </a:avLst>
+          </a:prstGeom>
+          <a:solidFill>
+            <a:srgbClr val="FBF3D6"/>
+          </a:solidFill>
+          <a:ln>
+            <a:noFill/>
+          </a:ln>
+          <a:effectLst/>
+        </p:spPr>
+        <p:style>
+          <a:lnRef idx="1">
+            <a:schemeClr val="accent1"/>
+          </a:lnRef>
+          <a:fillRef idx="3">
+            <a:schemeClr val="accent1"/>
+          </a:fillRef>
+          <a:effectRef idx="2">
+            <a:schemeClr val="accent1"/>
+          </a:effectRef>
+          <a:fontRef idx="minor">
+            <a:schemeClr val="lt1"/>
+          </a:fontRef>
+        </p:style>
+        <p:txBody>
+          <a:bodyPr rtlCol="0" anchor="ctr"/>
+          <a:lstStyle/>
+          <a:p/>
+        </p:txBody>
+      </p:sp>
+      <p:sp>
+        <p:nvSpPr>
+          <p:cNvPr id="10" name="ReglaTxt"/>
+          <p:cNvSpPr txBox="1"/>
+          <p:nvPr/>
+        </p:nvSpPr>
+        <p:spPr>
+          <a:xfrm>
+            <a:off x="603504" y="1883664"/>
+            <a:ext cx="10972800" cy="585216"/>
+          </a:xfrm>
+          <a:prstGeom prst="rect">
+            <a:avLst/>
+          </a:prstGeom>
+          <a:noFill/>
+        </p:spPr>
+        <p:txBody>
+          <a:bodyPr wrap="square" anchor="t" lIns="45720" rIns="45720" tIns="27432" bIns="27432">
+            <a:normAutofit/>
+          </a:bodyPr>
+          <a:lstStyle/>
+          <a:p>
+            <a:pPr algn="l"/>
+            <a:r>
+              <a:rPr sz="850" b="1">
+                <a:solidFill>
+                  <a:srgbClr val="B7860B"/>
+                </a:solidFill>
+                <a:latin typeface="Inter"/>
+              </a:rPr>
+              <a:t>LA REGLA DEL RETO</a:t>
+            </a:r>
+          </a:p>
+          <a:p>
+            <a:pPr algn="l"/>
+            <a:r>
+              <a:rPr sz="1100">
+                <a:solidFill>
+                  <a:srgbClr val="20242E"/>
+                </a:solidFill>
+                <a:latin typeface="Inter"/>
+              </a:rPr>
+              <a:t>Je geheime instructie moet je volgen, maar je mag ze niet uitspreken. Wie zegt «ik heb weinig geld», heeft verloren — je moet het láten merken.</a:t>
+            </a:r>
+          </a:p>
+        </p:txBody>
+      </p:sp>
+      <p:sp>
+        <p:nvSpPr>
+          <p:cNvPr id="11" name="Tarjeta 0"/>
+          <p:cNvSpPr/>
+          <p:nvPr/>
+        </p:nvSpPr>
+        <p:spPr>
+          <a:xfrm>
+            <a:off x="457200" y="2670048"/>
+            <a:ext cx="2708910" cy="898398"/>
+          </a:xfrm>
+          <a:prstGeom prst="roundRect">
+            <a:avLst>
+              <a:gd name="adj" fmla="val 6000"/>
+            </a:avLst>
+          </a:prstGeom>
+          <a:solidFill>
+            <a:srgbClr val="FFFFFF"/>
+          </a:solidFill>
+          <a:ln w="12700">
+            <a:solidFill>
+              <a:srgbClr val="E4E3DE"/>
+            </a:solidFill>
+          </a:ln>
+          <a:effectLst/>
+        </p:spPr>
+        <p:style>
+          <a:lnRef idx="1">
+            <a:schemeClr val="accent1"/>
+          </a:lnRef>
+          <a:fillRef idx="3">
+            <a:schemeClr val="accent1"/>
+          </a:fillRef>
+          <a:effectRef idx="2">
+            <a:schemeClr val="accent1"/>
+          </a:effectRef>
+          <a:fontRef idx="minor">
+            <a:schemeClr val="lt1"/>
+          </a:fontRef>
+        </p:style>
+        <p:txBody>
+          <a:bodyPr rtlCol="0" anchor="ctr"/>
+          <a:lstStyle/>
+          <a:p/>
+        </p:txBody>
+      </p:sp>
+      <p:sp>
+        <p:nvSpPr>
+          <p:cNvPr id="12" name="TarjetaTxt 0"/>
+          <p:cNvSpPr txBox="1"/>
+          <p:nvPr/>
+        </p:nvSpPr>
+        <p:spPr>
+          <a:xfrm>
+            <a:off x="548640" y="2724912"/>
+            <a:ext cx="2526030" cy="788670"/>
+          </a:xfrm>
+          <a:prstGeom prst="rect">
+            <a:avLst/>
+          </a:prstGeom>
+          <a:noFill/>
+        </p:spPr>
+        <p:txBody>
+          <a:bodyPr wrap="square" anchor="t" lIns="45720" rIns="45720" tIns="27432" bIns="27432">
+            <a:normAutofit/>
+          </a:bodyPr>
+          <a:lstStyle/>
+          <a:p>
+            <a:pPr algn="l"/>
+            <a:r>
+              <a:rPr sz="1100" b="1">
+                <a:solidFill>
+                  <a:srgbClr val="157355"/>
+                </a:solidFill>
+                <a:latin typeface="Bricolage Grotesque"/>
+              </a:rPr>
+              <a:t>La cuenta</a:t>
+            </a:r>
+          </a:p>
+          <a:p>
+            <a:pPr algn="l"/>
+            <a:r>
+              <a:rPr sz="1000">
+                <a:solidFill>
+                  <a:srgbClr val="20242E"/>
+                </a:solidFill>
+                <a:latin typeface="Inter"/>
+              </a:rPr>
+              <a:t>sopa de tortilla — 45 pesos</a:t>
+            </a:r>
+          </a:p>
+        </p:txBody>
+      </p:sp>
+      <p:sp>
+        <p:nvSpPr>
+          <p:cNvPr id="13" name="Tarjeta 1"/>
+          <p:cNvSpPr/>
+          <p:nvPr/>
+        </p:nvSpPr>
+        <p:spPr>
+          <a:xfrm>
+            <a:off x="3312414" y="2670048"/>
+            <a:ext cx="2708910" cy="898398"/>
+          </a:xfrm>
+          <a:prstGeom prst="roundRect">
+            <a:avLst>
+              <a:gd name="adj" fmla="val 6000"/>
+            </a:avLst>
+          </a:prstGeom>
+          <a:solidFill>
+            <a:srgbClr val="FFFFFF"/>
+          </a:solidFill>
+          <a:ln w="12700">
+            <a:solidFill>
+              <a:srgbClr val="E4E3DE"/>
+            </a:solidFill>
+          </a:ln>
+          <a:effectLst/>
+        </p:spPr>
+        <p:style>
+          <a:lnRef idx="1">
+            <a:schemeClr val="accent1"/>
+          </a:lnRef>
+          <a:fillRef idx="3">
+            <a:schemeClr val="accent1"/>
+          </a:fillRef>
+          <a:effectRef idx="2">
+            <a:schemeClr val="accent1"/>
+          </a:effectRef>
+          <a:fontRef idx="minor">
+            <a:schemeClr val="lt1"/>
+          </a:fontRef>
+        </p:style>
+        <p:txBody>
+          <a:bodyPr rtlCol="0" anchor="ctr"/>
+          <a:lstStyle/>
+          <a:p/>
+        </p:txBody>
+      </p:sp>
+      <p:sp>
+        <p:nvSpPr>
+          <p:cNvPr id="14" name="TarjetaTxt 1"/>
+          <p:cNvSpPr txBox="1"/>
+          <p:nvPr/>
+        </p:nvSpPr>
+        <p:spPr>
+          <a:xfrm>
+            <a:off x="3403854" y="2724912"/>
+            <a:ext cx="2526030" cy="788670"/>
+          </a:xfrm>
+          <a:prstGeom prst="rect">
+            <a:avLst/>
+          </a:prstGeom>
+          <a:noFill/>
+        </p:spPr>
+        <p:txBody>
+          <a:bodyPr wrap="square" anchor="t" lIns="45720" rIns="45720" tIns="27432" bIns="27432">
+            <a:normAutofit/>
+          </a:bodyPr>
+          <a:lstStyle/>
+          <a:p>
+            <a:pPr algn="l"/>
+            <a:r>
+              <a:rPr sz="1100" b="1">
+                <a:solidFill>
+                  <a:srgbClr val="157355"/>
+                </a:solidFill>
+                <a:latin typeface="Bricolage Grotesque"/>
+              </a:rPr>
+              <a:t>La cuenta</a:t>
+            </a:r>
+          </a:p>
+          <a:p>
+            <a:pPr algn="l"/>
+            <a:r>
+              <a:rPr sz="1000">
+                <a:solidFill>
+                  <a:srgbClr val="20242E"/>
+                </a:solidFill>
+                <a:latin typeface="Inter"/>
+              </a:rPr>
+              <a:t>dos quesadillas — 120 pesos</a:t>
+            </a:r>
+          </a:p>
+        </p:txBody>
+      </p:sp>
+      <p:sp>
+        <p:nvSpPr>
+          <p:cNvPr id="15" name="Tarjeta 2"/>
+          <p:cNvSpPr/>
+          <p:nvPr/>
+        </p:nvSpPr>
+        <p:spPr>
+          <a:xfrm>
+            <a:off x="6167628" y="2670048"/>
+            <a:ext cx="2708910" cy="898398"/>
+          </a:xfrm>
+          <a:prstGeom prst="roundRect">
+            <a:avLst>
+              <a:gd name="adj" fmla="val 6000"/>
+            </a:avLst>
+          </a:prstGeom>
+          <a:solidFill>
+            <a:srgbClr val="FFFFFF"/>
+          </a:solidFill>
+          <a:ln w="12700">
+            <a:solidFill>
+              <a:srgbClr val="E4E3DE"/>
+            </a:solidFill>
+          </a:ln>
+          <a:effectLst/>
+        </p:spPr>
+        <p:style>
+          <a:lnRef idx="1">
+            <a:schemeClr val="accent1"/>
+          </a:lnRef>
+          <a:fillRef idx="3">
+            <a:schemeClr val="accent1"/>
+          </a:fillRef>
+          <a:effectRef idx="2">
+            <a:schemeClr val="accent1"/>
+          </a:effectRef>
+          <a:fontRef idx="minor">
+            <a:schemeClr val="lt1"/>
+          </a:fontRef>
+        </p:style>
+        <p:txBody>
+          <a:bodyPr rtlCol="0" anchor="ctr"/>
+          <a:lstStyle/>
+          <a:p/>
+        </p:txBody>
+      </p:sp>
+      <p:sp>
+        <p:nvSpPr>
+          <p:cNvPr id="16" name="TarjetaTxt 2"/>
+          <p:cNvSpPr txBox="1"/>
+          <p:nvPr/>
+        </p:nvSpPr>
+        <p:spPr>
+          <a:xfrm>
+            <a:off x="6259068" y="2724912"/>
+            <a:ext cx="2526030" cy="788670"/>
+          </a:xfrm>
+          <a:prstGeom prst="rect">
+            <a:avLst/>
+          </a:prstGeom>
+          <a:noFill/>
+        </p:spPr>
+        <p:txBody>
+          <a:bodyPr wrap="square" anchor="t" lIns="45720" rIns="45720" tIns="27432" bIns="27432">
+            <a:normAutofit/>
+          </a:bodyPr>
+          <a:lstStyle/>
+          <a:p>
+            <a:pPr algn="l"/>
+            <a:r>
+              <a:rPr sz="1100" b="1">
+                <a:solidFill>
+                  <a:srgbClr val="157355"/>
+                </a:solidFill>
+                <a:latin typeface="Bricolage Grotesque"/>
+              </a:rPr>
+              <a:t>La cuenta</a:t>
+            </a:r>
+          </a:p>
+          <a:p>
+            <a:pPr algn="l"/>
+            <a:r>
+              <a:rPr sz="1000">
+                <a:solidFill>
+                  <a:srgbClr val="20242E"/>
+                </a:solidFill>
+                <a:latin typeface="Inter"/>
+              </a:rPr>
+              <a:t>tacos al pastor — 95 pesos</a:t>
+            </a:r>
+          </a:p>
+        </p:txBody>
+      </p:sp>
+      <p:sp>
+        <p:nvSpPr>
+          <p:cNvPr id="17" name="Tarjeta 3"/>
+          <p:cNvSpPr/>
+          <p:nvPr/>
+        </p:nvSpPr>
+        <p:spPr>
+          <a:xfrm>
+            <a:off x="9022842" y="2670048"/>
+            <a:ext cx="2708910" cy="898398"/>
+          </a:xfrm>
+          <a:prstGeom prst="roundRect">
+            <a:avLst>
+              <a:gd name="adj" fmla="val 6000"/>
+            </a:avLst>
+          </a:prstGeom>
+          <a:solidFill>
+            <a:srgbClr val="FFFFFF"/>
+          </a:solidFill>
+          <a:ln w="12700">
+            <a:solidFill>
+              <a:srgbClr val="E4E3DE"/>
+            </a:solidFill>
+          </a:ln>
+          <a:effectLst/>
+        </p:spPr>
+        <p:style>
+          <a:lnRef idx="1">
+            <a:schemeClr val="accent1"/>
+          </a:lnRef>
+          <a:fillRef idx="3">
+            <a:schemeClr val="accent1"/>
+          </a:fillRef>
+          <a:effectRef idx="2">
+            <a:schemeClr val="accent1"/>
+          </a:effectRef>
+          <a:fontRef idx="minor">
+            <a:schemeClr val="lt1"/>
+          </a:fontRef>
+        </p:style>
+        <p:txBody>
+          <a:bodyPr rtlCol="0" anchor="ctr"/>
+          <a:lstStyle/>
+          <a:p/>
+        </p:txBody>
+      </p:sp>
+      <p:sp>
+        <p:nvSpPr>
+          <p:cNvPr id="18" name="TarjetaTxt 3"/>
+          <p:cNvSpPr txBox="1"/>
+          <p:nvPr/>
+        </p:nvSpPr>
+        <p:spPr>
+          <a:xfrm>
+            <a:off x="9114282" y="2724912"/>
+            <a:ext cx="2526030" cy="788670"/>
+          </a:xfrm>
+          <a:prstGeom prst="rect">
+            <a:avLst/>
+          </a:prstGeom>
+          <a:noFill/>
+        </p:spPr>
+        <p:txBody>
+          <a:bodyPr wrap="square" anchor="t" lIns="45720" rIns="45720" tIns="27432" bIns="27432">
+            <a:normAutofit/>
+          </a:bodyPr>
+          <a:lstStyle/>
+          <a:p>
+            <a:pPr algn="l"/>
+            <a:r>
+              <a:rPr sz="1100" b="1">
+                <a:solidFill>
+                  <a:srgbClr val="157355"/>
+                </a:solidFill>
+                <a:latin typeface="Bricolage Grotesque"/>
+              </a:rPr>
+              <a:t>La cuenta</a:t>
+            </a:r>
+          </a:p>
+          <a:p>
+            <a:pPr algn="l"/>
+            <a:r>
+              <a:rPr sz="1000">
+                <a:solidFill>
+                  <a:srgbClr val="20242E"/>
+                </a:solidFill>
+                <a:latin typeface="Inter"/>
+              </a:rPr>
+              <a:t>tres horchatas — 75 pesos</a:t>
+            </a:r>
+          </a:p>
+        </p:txBody>
+      </p:sp>
+      <p:sp>
+        <p:nvSpPr>
+          <p:cNvPr id="19" name="Tarjeta 4"/>
+          <p:cNvSpPr/>
+          <p:nvPr/>
+        </p:nvSpPr>
+        <p:spPr>
+          <a:xfrm>
+            <a:off x="457200" y="3696462"/>
+            <a:ext cx="2708910" cy="898398"/>
+          </a:xfrm>
+          <a:prstGeom prst="roundRect">
+            <a:avLst>
+              <a:gd name="adj" fmla="val 6000"/>
+            </a:avLst>
+          </a:prstGeom>
+          <a:solidFill>
+            <a:srgbClr val="FFFFFF"/>
+          </a:solidFill>
+          <a:ln w="12700">
+            <a:solidFill>
+              <a:srgbClr val="E4E3DE"/>
+            </a:solidFill>
+          </a:ln>
+          <a:effectLst/>
+        </p:spPr>
+        <p:style>
+          <a:lnRef idx="1">
+            <a:schemeClr val="accent1"/>
+          </a:lnRef>
+          <a:fillRef idx="3">
+            <a:schemeClr val="accent1"/>
+          </a:fillRef>
+          <a:effectRef idx="2">
+            <a:schemeClr val="accent1"/>
+          </a:effectRef>
+          <a:fontRef idx="minor">
+            <a:schemeClr val="lt1"/>
+          </a:fontRef>
+        </p:style>
+        <p:txBody>
+          <a:bodyPr rtlCol="0" anchor="ctr"/>
+          <a:lstStyle/>
+          <a:p/>
+        </p:txBody>
+      </p:sp>
+      <p:sp>
+        <p:nvSpPr>
+          <p:cNvPr id="20" name="TarjetaTxt 4"/>
+          <p:cNvSpPr txBox="1"/>
+          <p:nvPr/>
+        </p:nvSpPr>
+        <p:spPr>
+          <a:xfrm>
+            <a:off x="548640" y="3751326"/>
+            <a:ext cx="2526030" cy="788670"/>
+          </a:xfrm>
+          <a:prstGeom prst="rect">
+            <a:avLst/>
+          </a:prstGeom>
+          <a:noFill/>
+        </p:spPr>
+        <p:txBody>
+          <a:bodyPr wrap="square" anchor="t" lIns="45720" rIns="45720" tIns="27432" bIns="27432">
+            <a:normAutofit/>
+          </a:bodyPr>
+          <a:lstStyle/>
+          <a:p>
+            <a:pPr algn="l"/>
+            <a:r>
+              <a:rPr sz="1100" b="1">
+                <a:solidFill>
+                  <a:srgbClr val="157355"/>
+                </a:solidFill>
+                <a:latin typeface="Bricolage Grotesque"/>
+              </a:rPr>
+              <a:t>La cuenta</a:t>
+            </a:r>
+          </a:p>
+          <a:p>
+            <a:pPr algn="l"/>
+            <a:r>
+              <a:rPr sz="1000">
+                <a:solidFill>
+                  <a:srgbClr val="20242E"/>
+                </a:solidFill>
+                <a:latin typeface="Inter"/>
+              </a:rPr>
+              <a:t>flan — 40 pesos</a:t>
+            </a:r>
+          </a:p>
+        </p:txBody>
+      </p:sp>
+      <p:sp>
+        <p:nvSpPr>
+          <p:cNvPr id="21" name="Tarjeta 5"/>
+          <p:cNvSpPr/>
+          <p:nvPr/>
+        </p:nvSpPr>
+        <p:spPr>
+          <a:xfrm>
+            <a:off x="3312414" y="3696462"/>
+            <a:ext cx="2708910" cy="898398"/>
+          </a:xfrm>
+          <a:prstGeom prst="roundRect">
+            <a:avLst>
+              <a:gd name="adj" fmla="val 6000"/>
+            </a:avLst>
+          </a:prstGeom>
+          <a:solidFill>
+            <a:srgbClr val="FFFFFF"/>
+          </a:solidFill>
+          <a:ln w="12700">
+            <a:solidFill>
+              <a:srgbClr val="E4E3DE"/>
+            </a:solidFill>
+          </a:ln>
+          <a:effectLst/>
+        </p:spPr>
+        <p:style>
+          <a:lnRef idx="1">
+            <a:schemeClr val="accent1"/>
+          </a:lnRef>
+          <a:fillRef idx="3">
+            <a:schemeClr val="accent1"/>
+          </a:fillRef>
+          <a:effectRef idx="2">
+            <a:schemeClr val="accent1"/>
+          </a:effectRef>
+          <a:fontRef idx="minor">
+            <a:schemeClr val="lt1"/>
+          </a:fontRef>
+        </p:style>
+        <p:txBody>
+          <a:bodyPr rtlCol="0" anchor="ctr"/>
+          <a:lstStyle/>
+          <a:p/>
+        </p:txBody>
+      </p:sp>
+      <p:sp>
+        <p:nvSpPr>
+          <p:cNvPr id="22" name="TarjetaTxt 5"/>
+          <p:cNvSpPr txBox="1"/>
+          <p:nvPr/>
+        </p:nvSpPr>
+        <p:spPr>
+          <a:xfrm>
+            <a:off x="3403854" y="3751326"/>
+            <a:ext cx="2526030" cy="788670"/>
+          </a:xfrm>
+          <a:prstGeom prst="rect">
+            <a:avLst/>
+          </a:prstGeom>
+          <a:noFill/>
+        </p:spPr>
+        <p:txBody>
+          <a:bodyPr wrap="square" anchor="t" lIns="45720" rIns="45720" tIns="27432" bIns="27432">
+            <a:normAutofit/>
+          </a:bodyPr>
+          <a:lstStyle/>
+          <a:p>
+            <a:pPr algn="l"/>
+            <a:r>
+              <a:rPr sz="1100" b="1">
+                <a:solidFill>
+                  <a:srgbClr val="157355"/>
+                </a:solidFill>
+                <a:latin typeface="Bricolage Grotesque"/>
+              </a:rPr>
+              <a:t>La cuenta</a:t>
+            </a:r>
+          </a:p>
+          <a:p>
+            <a:pPr algn="l"/>
+            <a:r>
+              <a:rPr sz="1000">
+                <a:solidFill>
+                  <a:srgbClr val="20242E"/>
+                </a:solidFill>
+                <a:latin typeface="Inter"/>
+              </a:rPr>
+              <a:t>propina — 40 pesos</a:t>
+            </a:r>
+          </a:p>
+        </p:txBody>
+      </p:sp>
+      <p:sp>
+        <p:nvSpPr>
+          <p:cNvPr id="23" name="Tarjeta 6"/>
+          <p:cNvSpPr/>
+          <p:nvPr/>
+        </p:nvSpPr>
+        <p:spPr>
+          <a:xfrm>
+            <a:off x="6167628" y="3696462"/>
+            <a:ext cx="2708910" cy="898398"/>
+          </a:xfrm>
+          <a:prstGeom prst="roundRect">
+            <a:avLst>
+              <a:gd name="adj" fmla="val 6000"/>
+            </a:avLst>
+          </a:prstGeom>
+          <a:solidFill>
+            <a:srgbClr val="FFFFFF"/>
+          </a:solidFill>
+          <a:ln w="12700">
+            <a:solidFill>
+              <a:srgbClr val="E4E3DE"/>
+            </a:solidFill>
+          </a:ln>
+          <a:effectLst/>
+        </p:spPr>
+        <p:style>
+          <a:lnRef idx="1">
+            <a:schemeClr val="accent1"/>
+          </a:lnRef>
+          <a:fillRef idx="3">
+            <a:schemeClr val="accent1"/>
+          </a:fillRef>
+          <a:effectRef idx="2">
+            <a:schemeClr val="accent1"/>
+          </a:effectRef>
+          <a:fontRef idx="minor">
+            <a:schemeClr val="lt1"/>
+          </a:fontRef>
+        </p:style>
+        <p:txBody>
+          <a:bodyPr rtlCol="0" anchor="ctr"/>
+          <a:lstStyle/>
+          <a:p/>
+        </p:txBody>
+      </p:sp>
+      <p:sp>
+        <p:nvSpPr>
+          <p:cNvPr id="24" name="TarjetaTxt 6"/>
+          <p:cNvSpPr txBox="1"/>
+          <p:nvPr/>
+        </p:nvSpPr>
+        <p:spPr>
+          <a:xfrm>
+            <a:off x="6259068" y="3751326"/>
+            <a:ext cx="2526030" cy="788670"/>
+          </a:xfrm>
+          <a:prstGeom prst="rect">
+            <a:avLst/>
+          </a:prstGeom>
+          <a:noFill/>
+        </p:spPr>
+        <p:txBody>
+          <a:bodyPr wrap="square" anchor="t" lIns="45720" rIns="45720" tIns="27432" bIns="27432">
+            <a:normAutofit/>
+          </a:bodyPr>
+          <a:lstStyle/>
+          <a:p>
+            <a:pPr algn="l"/>
+            <a:r>
+              <a:rPr sz="1100" b="1">
+                <a:solidFill>
+                  <a:srgbClr val="157355"/>
+                </a:solidFill>
+                <a:latin typeface="Bricolage Grotesque"/>
+              </a:rPr>
+              <a:t>TOTAL</a:t>
+            </a:r>
+          </a:p>
+          <a:p>
+            <a:pPr algn="l"/>
+            <a:r>
+              <a:rPr sz="1000">
+                <a:solidFill>
+                  <a:srgbClr val="20242E"/>
+                </a:solidFill>
+                <a:latin typeface="Inter"/>
+              </a:rPr>
+              <a:t>415 pesos</a:t>
+            </a:r>
+          </a:p>
+        </p:txBody>
+      </p:sp>
+      <p:sp>
+        <p:nvSpPr>
+          <p:cNvPr id="25" name="Tarjeta 7"/>
+          <p:cNvSpPr/>
+          <p:nvPr/>
+        </p:nvSpPr>
+        <p:spPr>
+          <a:xfrm>
+            <a:off x="9022842" y="3696462"/>
+            <a:ext cx="2708910" cy="898398"/>
+          </a:xfrm>
+          <a:prstGeom prst="roundRect">
+            <a:avLst>
+              <a:gd name="adj" fmla="val 6000"/>
+            </a:avLst>
+          </a:prstGeom>
+          <a:solidFill>
+            <a:srgbClr val="FFFFFF"/>
+          </a:solidFill>
+          <a:ln w="12700">
+            <a:solidFill>
+              <a:srgbClr val="E4E3DE"/>
+            </a:solidFill>
+          </a:ln>
+          <a:effectLst/>
+        </p:spPr>
+        <p:style>
+          <a:lnRef idx="1">
+            <a:schemeClr val="accent1"/>
+          </a:lnRef>
+          <a:fillRef idx="3">
+            <a:schemeClr val="accent1"/>
+          </a:fillRef>
+          <a:effectRef idx="2">
+            <a:schemeClr val="accent1"/>
+          </a:effectRef>
+          <a:fontRef idx="minor">
+            <a:schemeClr val="lt1"/>
+          </a:fontRef>
+        </p:style>
+        <p:txBody>
+          <a:bodyPr rtlCol="0" anchor="ctr"/>
+          <a:lstStyle/>
+          <a:p/>
+        </p:txBody>
+      </p:sp>
+      <p:sp>
+        <p:nvSpPr>
+          <p:cNvPr id="26" name="TarjetaTxt 7"/>
+          <p:cNvSpPr txBox="1"/>
+          <p:nvPr/>
+        </p:nvSpPr>
+        <p:spPr>
+          <a:xfrm>
+            <a:off x="9114282" y="3751326"/>
+            <a:ext cx="2526030" cy="788670"/>
+          </a:xfrm>
+          <a:prstGeom prst="rect">
+            <a:avLst/>
+          </a:prstGeom>
+          <a:noFill/>
+        </p:spPr>
+        <p:txBody>
+          <a:bodyPr wrap="square" anchor="t" lIns="45720" rIns="45720" tIns="27432" bIns="27432">
+            <a:normAutofit/>
+          </a:bodyPr>
+          <a:lstStyle/>
+          <a:p>
+            <a:pPr algn="l"/>
+            <a:r>
+              <a:rPr sz="1100" b="1">
+                <a:solidFill>
+                  <a:srgbClr val="157355"/>
+                </a:solidFill>
+                <a:latin typeface="Bricolage Grotesque"/>
+              </a:rPr>
+              <a:t>Diego</a:t>
+            </a:r>
+          </a:p>
+          <a:p>
+            <a:pPr algn="l"/>
+            <a:r>
+              <a:rPr sz="1000">
+                <a:solidFill>
+                  <a:srgbClr val="20242E"/>
+                </a:solidFill>
+                <a:latin typeface="Inter"/>
+              </a:rPr>
+              <a:t>Estás sin dinero, pero te da vergüenza decirlo.</a:t>
+            </a:r>
+          </a:p>
+        </p:txBody>
+      </p:sp>
+      <p:sp>
+        <p:nvSpPr>
+          <p:cNvPr id="27" name="Tarjeta 8"/>
+          <p:cNvSpPr/>
+          <p:nvPr/>
+        </p:nvSpPr>
+        <p:spPr>
+          <a:xfrm>
+            <a:off x="457200" y="4722876"/>
+            <a:ext cx="2708910" cy="898398"/>
+          </a:xfrm>
+          <a:prstGeom prst="roundRect">
+            <a:avLst>
+              <a:gd name="adj" fmla="val 6000"/>
+            </a:avLst>
+          </a:prstGeom>
+          <a:solidFill>
+            <a:srgbClr val="FFFFFF"/>
+          </a:solidFill>
+          <a:ln w="12700">
+            <a:solidFill>
+              <a:srgbClr val="E4E3DE"/>
+            </a:solidFill>
+          </a:ln>
+          <a:effectLst/>
+        </p:spPr>
+        <p:style>
+          <a:lnRef idx="1">
+            <a:schemeClr val="accent1"/>
+          </a:lnRef>
+          <a:fillRef idx="3">
+            <a:schemeClr val="accent1"/>
+          </a:fillRef>
+          <a:effectRef idx="2">
+            <a:schemeClr val="accent1"/>
+          </a:effectRef>
+          <a:fontRef idx="minor">
+            <a:schemeClr val="lt1"/>
+          </a:fontRef>
+        </p:style>
+        <p:txBody>
+          <a:bodyPr rtlCol="0" anchor="ctr"/>
+          <a:lstStyle/>
+          <a:p/>
+        </p:txBody>
+      </p:sp>
+      <p:sp>
+        <p:nvSpPr>
+          <p:cNvPr id="28" name="TarjetaTxt 8"/>
+          <p:cNvSpPr txBox="1"/>
+          <p:nvPr/>
+        </p:nvSpPr>
+        <p:spPr>
+          <a:xfrm>
+            <a:off x="548640" y="4777740"/>
+            <a:ext cx="2526030" cy="788670"/>
+          </a:xfrm>
+          <a:prstGeom prst="rect">
+            <a:avLst/>
+          </a:prstGeom>
+          <a:noFill/>
+        </p:spPr>
+        <p:txBody>
+          <a:bodyPr wrap="square" anchor="t" lIns="45720" rIns="45720" tIns="27432" bIns="27432">
+            <a:normAutofit/>
+          </a:bodyPr>
+          <a:lstStyle/>
+          <a:p>
+            <a:pPr algn="l"/>
+            <a:r>
+              <a:rPr sz="1100" b="1">
+                <a:solidFill>
+                  <a:srgbClr val="157355"/>
+                </a:solidFill>
+                <a:latin typeface="Bricolage Grotesque"/>
+              </a:rPr>
+              <a:t>Valen</a:t>
+            </a:r>
+          </a:p>
+          <a:p>
+            <a:pPr algn="l"/>
+            <a:r>
+              <a:rPr sz="1000">
+                <a:solidFill>
+                  <a:srgbClr val="20242E"/>
+                </a:solidFill>
+                <a:latin typeface="Inter"/>
+              </a:rPr>
+              <a:t>Quieres invitar a todos, pero sin ofender a nadie.</a:t>
+            </a:r>
+          </a:p>
+        </p:txBody>
+      </p:sp>
+      <p:sp>
+        <p:nvSpPr>
+          <p:cNvPr id="29" name="Tarjeta 9"/>
+          <p:cNvSpPr/>
+          <p:nvPr/>
+        </p:nvSpPr>
+        <p:spPr>
+          <a:xfrm>
+            <a:off x="3312414" y="4722876"/>
+            <a:ext cx="2708910" cy="898398"/>
+          </a:xfrm>
+          <a:prstGeom prst="roundRect">
+            <a:avLst>
+              <a:gd name="adj" fmla="val 6000"/>
+            </a:avLst>
+          </a:prstGeom>
+          <a:solidFill>
+            <a:srgbClr val="FFFFFF"/>
+          </a:solidFill>
+          <a:ln w="12700">
+            <a:solidFill>
+              <a:srgbClr val="E4E3DE"/>
+            </a:solidFill>
+          </a:ln>
+          <a:effectLst/>
+        </p:spPr>
+        <p:style>
+          <a:lnRef idx="1">
+            <a:schemeClr val="accent1"/>
+          </a:lnRef>
+          <a:fillRef idx="3">
+            <a:schemeClr val="accent1"/>
+          </a:fillRef>
+          <a:effectRef idx="2">
+            <a:schemeClr val="accent1"/>
+          </a:effectRef>
+          <a:fontRef idx="minor">
+            <a:schemeClr val="lt1"/>
+          </a:fontRef>
+        </p:style>
+        <p:txBody>
+          <a:bodyPr rtlCol="0" anchor="ctr"/>
+          <a:lstStyle/>
+          <a:p/>
+        </p:txBody>
+      </p:sp>
+      <p:sp>
+        <p:nvSpPr>
+          <p:cNvPr id="30" name="TarjetaTxt 9"/>
+          <p:cNvSpPr txBox="1"/>
+          <p:nvPr/>
+        </p:nvSpPr>
+        <p:spPr>
+          <a:xfrm>
+            <a:off x="3403854" y="4777740"/>
+            <a:ext cx="2526030" cy="788670"/>
+          </a:xfrm>
+          <a:prstGeom prst="rect">
+            <a:avLst/>
+          </a:prstGeom>
+          <a:noFill/>
+        </p:spPr>
+        <p:txBody>
+          <a:bodyPr wrap="square" anchor="t" lIns="45720" rIns="45720" tIns="27432" bIns="27432">
+            <a:normAutofit/>
+          </a:bodyPr>
+          <a:lstStyle/>
+          <a:p>
+            <a:pPr algn="l"/>
+            <a:r>
+              <a:rPr sz="1100" b="1">
+                <a:solidFill>
+                  <a:srgbClr val="157355"/>
+                </a:solidFill>
+                <a:latin typeface="Bricolage Grotesque"/>
+              </a:rPr>
+              <a:t>Nina</a:t>
+            </a:r>
+          </a:p>
+          <a:p>
+            <a:pPr algn="l"/>
+            <a:r>
+              <a:rPr sz="1000">
+                <a:solidFill>
+                  <a:srgbClr val="20242E"/>
+                </a:solidFill>
+                <a:latin typeface="Inter"/>
+              </a:rPr>
+              <a:t>Solo has comido el flan. No quieres pagar lo demás.</a:t>
+            </a:r>
+          </a:p>
+        </p:txBody>
+      </p:sp>
+      <p:sp>
+        <p:nvSpPr>
+          <p:cNvPr id="31" name="Tarjeta 10"/>
+          <p:cNvSpPr/>
+          <p:nvPr/>
+        </p:nvSpPr>
+        <p:spPr>
+          <a:xfrm>
+            <a:off x="6167628" y="4722876"/>
+            <a:ext cx="2708910" cy="898398"/>
+          </a:xfrm>
+          <a:prstGeom prst="roundRect">
+            <a:avLst>
+              <a:gd name="adj" fmla="val 6000"/>
+            </a:avLst>
+          </a:prstGeom>
+          <a:solidFill>
+            <a:srgbClr val="FFFFFF"/>
+          </a:solidFill>
+          <a:ln w="12700">
+            <a:solidFill>
+              <a:srgbClr val="E4E3DE"/>
+            </a:solidFill>
+          </a:ln>
+          <a:effectLst/>
+        </p:spPr>
+        <p:style>
+          <a:lnRef idx="1">
+            <a:schemeClr val="accent1"/>
+          </a:lnRef>
+          <a:fillRef idx="3">
+            <a:schemeClr val="accent1"/>
+          </a:fillRef>
+          <a:effectRef idx="2">
+            <a:schemeClr val="accent1"/>
+          </a:effectRef>
+          <a:fontRef idx="minor">
+            <a:schemeClr val="lt1"/>
+          </a:fontRef>
+        </p:style>
+        <p:txBody>
+          <a:bodyPr rtlCol="0" anchor="ctr"/>
+          <a:lstStyle/>
+          <a:p/>
+        </p:txBody>
+      </p:sp>
+      <p:sp>
+        <p:nvSpPr>
+          <p:cNvPr id="32" name="TarjetaTxt 10"/>
+          <p:cNvSpPr txBox="1"/>
+          <p:nvPr/>
+        </p:nvSpPr>
+        <p:spPr>
+          <a:xfrm>
+            <a:off x="6259068" y="4777740"/>
+            <a:ext cx="2526030" cy="788670"/>
+          </a:xfrm>
+          <a:prstGeom prst="rect">
+            <a:avLst/>
+          </a:prstGeom>
+          <a:noFill/>
+        </p:spPr>
+        <p:txBody>
+          <a:bodyPr wrap="square" anchor="t" lIns="45720" rIns="45720" tIns="27432" bIns="27432">
+            <a:normAutofit/>
+          </a:bodyPr>
+          <a:lstStyle/>
+          <a:p>
+            <a:pPr algn="l"/>
+            <a:r>
+              <a:rPr sz="1100" b="1">
+                <a:solidFill>
+                  <a:srgbClr val="157355"/>
+                </a:solidFill>
+                <a:latin typeface="Bricolage Grotesque"/>
+              </a:rPr>
+              <a:t>Tú</a:t>
+            </a:r>
+          </a:p>
+          <a:p>
+            <a:pPr algn="l"/>
+            <a:r>
+              <a:rPr sz="1000">
+                <a:solidFill>
+                  <a:srgbClr val="20242E"/>
+                </a:solidFill>
+                <a:latin typeface="Inter"/>
+              </a:rPr>
+              <a:t>Has olvidado la cartera en casa. De verdad.</a:t>
+            </a:r>
+          </a:p>
+        </p:txBody>
+      </p:sp>
+      <p:sp>
+        <p:nvSpPr>
+          <p:cNvPr id="33" name="Tarjeta 11"/>
+          <p:cNvSpPr/>
+          <p:nvPr/>
+        </p:nvSpPr>
+        <p:spPr>
+          <a:xfrm>
+            <a:off x="9022842" y="4722876"/>
+            <a:ext cx="2708910" cy="898398"/>
+          </a:xfrm>
+          <a:prstGeom prst="roundRect">
+            <a:avLst>
+              <a:gd name="adj" fmla="val 6000"/>
+            </a:avLst>
+          </a:prstGeom>
+          <a:solidFill>
+            <a:srgbClr val="FFFFFF"/>
+          </a:solidFill>
+          <a:ln w="12700">
+            <a:solidFill>
+              <a:srgbClr val="E4E3DE"/>
+            </a:solidFill>
+          </a:ln>
+          <a:effectLst/>
+        </p:spPr>
+        <p:style>
+          <a:lnRef idx="1">
+            <a:schemeClr val="accent1"/>
+          </a:lnRef>
+          <a:fillRef idx="3">
+            <a:schemeClr val="accent1"/>
+          </a:fillRef>
+          <a:effectRef idx="2">
+            <a:schemeClr val="accent1"/>
+          </a:effectRef>
+          <a:fontRef idx="minor">
+            <a:schemeClr val="lt1"/>
+          </a:fontRef>
+        </p:style>
+        <p:txBody>
+          <a:bodyPr rtlCol="0" anchor="ctr"/>
+          <a:lstStyle/>
+          <a:p/>
+        </p:txBody>
+      </p:sp>
+      <p:sp>
+        <p:nvSpPr>
+          <p:cNvPr id="34" name="TarjetaTxt 11"/>
+          <p:cNvSpPr txBox="1"/>
+          <p:nvPr/>
+        </p:nvSpPr>
+        <p:spPr>
+          <a:xfrm>
+            <a:off x="9114282" y="4777740"/>
+            <a:ext cx="2526030" cy="788670"/>
+          </a:xfrm>
+          <a:prstGeom prst="rect">
+            <a:avLst/>
+          </a:prstGeom>
+          <a:noFill/>
+        </p:spPr>
+        <p:txBody>
+          <a:bodyPr wrap="square" anchor="t" lIns="45720" rIns="45720" tIns="27432" bIns="27432">
+            <a:normAutofit/>
+          </a:bodyPr>
+          <a:lstStyle/>
+          <a:p>
+            <a:pPr algn="l"/>
+            <a:r>
+              <a:rPr sz="1100" b="1">
+                <a:solidFill>
+                  <a:srgbClr val="157355"/>
+                </a:solidFill>
+                <a:latin typeface="Bricolage Grotesque"/>
+              </a:rPr>
+              <a:t>marco</a:t>
+            </a:r>
+          </a:p>
+          <a:p>
+            <a:pPr algn="l"/>
+            <a:r>
+              <a:rPr sz="1000">
+                <a:solidFill>
+                  <a:srgbClr val="20242E"/>
+                </a:solidFill>
+                <a:latin typeface="Inter"/>
+              </a:rPr>
+              <a:t>Yo pago …</a:t>
+            </a:r>
+          </a:p>
+        </p:txBody>
+      </p:sp>
+      <p:sp>
+        <p:nvSpPr>
+          <p:cNvPr id="35" name="Tarjeta 12"/>
+          <p:cNvSpPr/>
+          <p:nvPr/>
+        </p:nvSpPr>
+        <p:spPr>
+          <a:xfrm>
+            <a:off x="457200" y="5749290"/>
+            <a:ext cx="2708910" cy="898398"/>
+          </a:xfrm>
+          <a:prstGeom prst="roundRect">
+            <a:avLst>
+              <a:gd name="adj" fmla="val 6000"/>
+            </a:avLst>
+          </a:prstGeom>
+          <a:solidFill>
+            <a:srgbClr val="FFFFFF"/>
+          </a:solidFill>
+          <a:ln w="12700">
+            <a:solidFill>
+              <a:srgbClr val="E4E3DE"/>
+            </a:solidFill>
+          </a:ln>
+          <a:effectLst/>
+        </p:spPr>
+        <p:style>
+          <a:lnRef idx="1">
+            <a:schemeClr val="accent1"/>
+          </a:lnRef>
+          <a:fillRef idx="3">
+            <a:schemeClr val="accent1"/>
+          </a:fillRef>
+          <a:effectRef idx="2">
+            <a:schemeClr val="accent1"/>
+          </a:effectRef>
+          <a:fontRef idx="minor">
+            <a:schemeClr val="lt1"/>
+          </a:fontRef>
+        </p:style>
+        <p:txBody>
+          <a:bodyPr rtlCol="0" anchor="ctr"/>
+          <a:lstStyle/>
+          <a:p/>
+        </p:txBody>
+      </p:sp>
+      <p:sp>
+        <p:nvSpPr>
+          <p:cNvPr id="36" name="TarjetaTxt 12"/>
+          <p:cNvSpPr txBox="1"/>
+          <p:nvPr/>
+        </p:nvSpPr>
+        <p:spPr>
+          <a:xfrm>
+            <a:off x="548640" y="5804154"/>
+            <a:ext cx="2526030" cy="788670"/>
+          </a:xfrm>
+          <a:prstGeom prst="rect">
+            <a:avLst/>
+          </a:prstGeom>
+          <a:noFill/>
+        </p:spPr>
+        <p:txBody>
+          <a:bodyPr wrap="square" anchor="t" lIns="45720" rIns="45720" tIns="27432" bIns="27432">
+            <a:normAutofit/>
+          </a:bodyPr>
+          <a:lstStyle/>
+          <a:p>
+            <a:pPr algn="l"/>
+            <a:r>
+              <a:rPr sz="1100" b="1">
+                <a:solidFill>
+                  <a:srgbClr val="157355"/>
+                </a:solidFill>
+                <a:latin typeface="Bricolage Grotesque"/>
+              </a:rPr>
+              <a:t>marco</a:t>
+            </a:r>
+          </a:p>
+          <a:p>
+            <a:pPr algn="l"/>
+            <a:r>
+              <a:rPr sz="1000">
+                <a:solidFill>
+                  <a:srgbClr val="20242E"/>
+                </a:solidFill>
+                <a:latin typeface="Inter"/>
+              </a:rPr>
+              <a:t>Yo solo he tomado …</a:t>
+            </a:r>
+          </a:p>
+        </p:txBody>
+      </p:sp>
+      <p:sp>
+        <p:nvSpPr>
+          <p:cNvPr id="37" name="Tarjeta 13"/>
+          <p:cNvSpPr/>
+          <p:nvPr/>
+        </p:nvSpPr>
+        <p:spPr>
+          <a:xfrm>
+            <a:off x="3312414" y="5749290"/>
+            <a:ext cx="2708910" cy="898398"/>
+          </a:xfrm>
+          <a:prstGeom prst="roundRect">
+            <a:avLst>
+              <a:gd name="adj" fmla="val 6000"/>
+            </a:avLst>
+          </a:prstGeom>
+          <a:solidFill>
+            <a:srgbClr val="FFFFFF"/>
+          </a:solidFill>
+          <a:ln w="12700">
+            <a:solidFill>
+              <a:srgbClr val="E4E3DE"/>
+            </a:solidFill>
+          </a:ln>
+          <a:effectLst/>
+        </p:spPr>
+        <p:style>
+          <a:lnRef idx="1">
+            <a:schemeClr val="accent1"/>
+          </a:lnRef>
+          <a:fillRef idx="3">
+            <a:schemeClr val="accent1"/>
+          </a:fillRef>
+          <a:effectRef idx="2">
+            <a:schemeClr val="accent1"/>
+          </a:effectRef>
+          <a:fontRef idx="minor">
+            <a:schemeClr val="lt1"/>
+          </a:fontRef>
+        </p:style>
+        <p:txBody>
+          <a:bodyPr rtlCol="0" anchor="ctr"/>
+          <a:lstStyle/>
+          <a:p/>
+        </p:txBody>
+      </p:sp>
+      <p:sp>
+        <p:nvSpPr>
+          <p:cNvPr id="38" name="TarjetaTxt 13"/>
+          <p:cNvSpPr txBox="1"/>
+          <p:nvPr/>
+        </p:nvSpPr>
+        <p:spPr>
+          <a:xfrm>
+            <a:off x="3403854" y="5804154"/>
+            <a:ext cx="2526030" cy="788670"/>
+          </a:xfrm>
+          <a:prstGeom prst="rect">
+            <a:avLst/>
+          </a:prstGeom>
+          <a:noFill/>
+        </p:spPr>
+        <p:txBody>
+          <a:bodyPr wrap="square" anchor="t" lIns="45720" rIns="45720" tIns="27432" bIns="27432">
+            <a:normAutofit/>
+          </a:bodyPr>
+          <a:lstStyle/>
+          <a:p>
+            <a:pPr algn="l"/>
+            <a:r>
+              <a:rPr sz="1100" b="1">
+                <a:solidFill>
+                  <a:srgbClr val="157355"/>
+                </a:solidFill>
+                <a:latin typeface="Bricolage Grotesque"/>
+              </a:rPr>
+              <a:t>marco</a:t>
+            </a:r>
+          </a:p>
+          <a:p>
+            <a:pPr algn="l"/>
+            <a:r>
+              <a:rPr sz="1000">
+                <a:solidFill>
+                  <a:srgbClr val="20242E"/>
+                </a:solidFill>
+                <a:latin typeface="Inter"/>
+              </a:rPr>
+              <a:t>¿Y si …?</a:t>
+            </a:r>
+          </a:p>
+        </p:txBody>
+      </p:sp>
+      <p:sp>
+        <p:nvSpPr>
+          <p:cNvPr id="39" name="Tarjeta 14"/>
+          <p:cNvSpPr/>
+          <p:nvPr/>
+        </p:nvSpPr>
+        <p:spPr>
+          <a:xfrm>
+            <a:off x="6167628" y="5749290"/>
+            <a:ext cx="2708910" cy="898398"/>
+          </a:xfrm>
+          <a:prstGeom prst="roundRect">
+            <a:avLst>
+              <a:gd name="adj" fmla="val 6000"/>
+            </a:avLst>
+          </a:prstGeom>
+          <a:solidFill>
+            <a:srgbClr val="FFFFFF"/>
+          </a:solidFill>
+          <a:ln w="12700">
+            <a:solidFill>
+              <a:srgbClr val="E4E3DE"/>
+            </a:solidFill>
+          </a:ln>
+          <a:effectLst/>
+        </p:spPr>
+        <p:style>
+          <a:lnRef idx="1">
+            <a:schemeClr val="accent1"/>
+          </a:lnRef>
+          <a:fillRef idx="3">
+            <a:schemeClr val="accent1"/>
+          </a:fillRef>
+          <a:effectRef idx="2">
+            <a:schemeClr val="accent1"/>
+          </a:effectRef>
+          <a:fontRef idx="minor">
+            <a:schemeClr val="lt1"/>
+          </a:fontRef>
+        </p:style>
+        <p:txBody>
+          <a:bodyPr rtlCol="0" anchor="ctr"/>
+          <a:lstStyle/>
+          <a:p/>
+        </p:txBody>
+      </p:sp>
+      <p:sp>
+        <p:nvSpPr>
+          <p:cNvPr id="40" name="TarjetaTxt 14"/>
+          <p:cNvSpPr txBox="1"/>
+          <p:nvPr/>
+        </p:nvSpPr>
+        <p:spPr>
+          <a:xfrm>
+            <a:off x="6259068" y="5804154"/>
+            <a:ext cx="2526030" cy="788670"/>
+          </a:xfrm>
+          <a:prstGeom prst="rect">
+            <a:avLst/>
+          </a:prstGeom>
+          <a:noFill/>
+        </p:spPr>
+        <p:txBody>
+          <a:bodyPr wrap="square" anchor="t" lIns="45720" rIns="45720" tIns="27432" bIns="27432">
+            <a:normAutofit/>
+          </a:bodyPr>
+          <a:lstStyle/>
+          <a:p>
+            <a:pPr algn="l"/>
+            <a:r>
+              <a:rPr sz="1100" b="1">
+                <a:solidFill>
+                  <a:srgbClr val="157355"/>
+                </a:solidFill>
+                <a:latin typeface="Bricolage Grotesque"/>
+              </a:rPr>
+              <a:t>marco</a:t>
+            </a:r>
+          </a:p>
+          <a:p>
+            <a:pPr algn="l"/>
+            <a:r>
+              <a:rPr sz="1000">
+                <a:solidFill>
+                  <a:srgbClr val="20242E"/>
+                </a:solidFill>
+                <a:latin typeface="Inter"/>
+              </a:rPr>
+              <a:t>No hace falta, de verdad.</a:t>
+            </a:r>
+          </a:p>
+        </p:txBody>
+      </p:sp>
+      <p:sp>
+        <p:nvSpPr>
+          <p:cNvPr id="41" name="Tarjeta 15"/>
+          <p:cNvSpPr/>
+          <p:nvPr/>
+        </p:nvSpPr>
+        <p:spPr>
+          <a:xfrm>
+            <a:off x="9022842" y="5749290"/>
+            <a:ext cx="2708910" cy="898398"/>
+          </a:xfrm>
+          <a:prstGeom prst="roundRect">
+            <a:avLst>
+              <a:gd name="adj" fmla="val 6000"/>
+            </a:avLst>
+          </a:prstGeom>
+          <a:solidFill>
+            <a:srgbClr val="FFFFFF"/>
+          </a:solidFill>
+          <a:ln w="12700">
+            <a:solidFill>
+              <a:srgbClr val="E4E3DE"/>
+            </a:solidFill>
+          </a:ln>
+          <a:effectLst/>
+        </p:spPr>
+        <p:style>
+          <a:lnRef idx="1">
+            <a:schemeClr val="accent1"/>
+          </a:lnRef>
+          <a:fillRef idx="3">
+            <a:schemeClr val="accent1"/>
+          </a:fillRef>
+          <a:effectRef idx="2">
+            <a:schemeClr val="accent1"/>
+          </a:effectRef>
+          <a:fontRef idx="minor">
+            <a:schemeClr val="lt1"/>
+          </a:fontRef>
+        </p:style>
+        <p:txBody>
+          <a:bodyPr rtlCol="0" anchor="ctr"/>
+          <a:lstStyle/>
+          <a:p/>
+        </p:txBody>
+      </p:sp>
+      <p:sp>
+        <p:nvSpPr>
+          <p:cNvPr id="42" name="TarjetaTxt 15"/>
+          <p:cNvSpPr txBox="1"/>
+          <p:nvPr/>
+        </p:nvSpPr>
+        <p:spPr>
+          <a:xfrm>
+            <a:off x="9114282" y="5804154"/>
+            <a:ext cx="2526030" cy="788670"/>
+          </a:xfrm>
+          <a:prstGeom prst="rect">
+            <a:avLst/>
+          </a:prstGeom>
+          <a:noFill/>
+        </p:spPr>
+        <p:txBody>
+          <a:bodyPr wrap="square" anchor="t" lIns="45720" rIns="45720" tIns="27432" bIns="27432">
+            <a:normAutofit/>
+          </a:bodyPr>
+          <a:lstStyle/>
+          <a:p>
+            <a:pPr algn="l"/>
+            <a:r>
+              <a:rPr sz="1100" b="1">
+                <a:solidFill>
+                  <a:srgbClr val="157355"/>
+                </a:solidFill>
+                <a:latin typeface="Bricolage Grotesque"/>
+              </a:rPr>
+              <a:t>marco</a:t>
+            </a:r>
+          </a:p>
+          <a:p>
+            <a:pPr algn="l"/>
+            <a:r>
+              <a:rPr sz="1000">
+                <a:solidFill>
+                  <a:srgbClr val="20242E"/>
+                </a:solidFill>
+                <a:latin typeface="Inter"/>
+              </a:rPr>
+              <a:t>Entonces la próxima vez invito yo.</a:t>
+            </a:r>
+          </a:p>
+        </p:txBody>
+      </p:sp>
+    </p:spTree>
+  </p:cSld>
+  <p:clrMapOvr>
+    <a:masterClrMapping/>
+  </p:clrMapOvr>
+</p:sld>
+</file>
+
 <file path=ppt/slides/slide3.xml><?xml version="1.0" encoding="utf-8"?>
 <p:sld xmlns:a="http://schemas.openxmlformats.org/drawingml/2006/main" xmlns:p="http://schemas.openxmlformats.org/presentationml/2006/main" xmlns:r="http://schemas.openxmlformats.org/officeDocument/2006/relationships">
   <p:cSld>
